--- a/docs/fmva/packs/day2-slides.pptx
+++ b/docs/fmva/packs/day2-slides.pptx
@@ -17,9 +17,16 @@
     <p:sldId id="265" r:id="rId11"/>
     <p:sldId id="266" r:id="rId12"/>
     <p:sldId id="267" r:id="rId13"/>
+    <p:sldId id="268" r:id="rId14"/>
+    <p:sldId id="269" r:id="rId15"/>
+    <p:sldId id="270" r:id="rId16"/>
+    <p:sldId id="271" r:id="rId17"/>
+    <p:sldId id="272" r:id="rId18"/>
+    <p:sldId id="273" r:id="rId19"/>
+    <p:sldId id="274" r:id="rId20"/>
   </p:sldIdLst>
   <p:notesMasterIdLst>
-    <p:notesMasterId r:id="rId14"/>
+    <p:notesMasterId r:id="rId21"/>
   </p:notesMasterIdLst>
   <p:sldSz cx="9144000" cy="5148072"/>
   <p:notesSz cx="5148072" cy="9144000"/>
@@ -801,6 +808,622 @@
             <a:fld id="{F7021451-1387-4CA6-816F-3879F97B5CBC}" type="slidenum">
               <a:rPr lang="en-US"/>
               <a:t>12</a:t>
+            </a:fld>
+            <a:endParaRPr lang="en-US"/>
+          </a:p>
+        </p:txBody>
+      </p:sp>
+    </p:spTree>
+    <p:extLst>
+      <p:ext uri="{BB962C8B-B14F-4D97-AF65-F5344CB8AC3E}">
+        <p14:creationId xmlns:p14="http://schemas.microsoft.com/office/powerpoint/2010/main" val="1024086991"/>
+      </p:ext>
+    </p:extLst>
+  </p:cSld>
+  <p:clrMapOvr>
+    <a:masterClrMapping/>
+  </p:clrMapOvr>
+</p:notes>
+</file>
+
+<file path=ppt/notesSlides/notesSlide13.xml><?xml version="1.0" encoding="utf-8"?>
+<p:notes xmlns:a="http://schemas.openxmlformats.org/drawingml/2006/main" xmlns:r="http://schemas.openxmlformats.org/officeDocument/2006/relationships" xmlns:p="http://schemas.openxmlformats.org/presentationml/2006/main">
+  <p:cSld>
+    <p:spTree>
+      <p:nvGrpSpPr>
+        <p:cNvPr id="1" name=""/>
+        <p:cNvGrpSpPr/>
+        <p:nvPr/>
+      </p:nvGrpSpPr>
+      <p:grpSpPr>
+        <a:xfrm>
+          <a:off x="0" y="0"/>
+          <a:ext cx="0" cy="0"/>
+          <a:chOff x="0" y="0"/>
+          <a:chExt cx="0" cy="0"/>
+        </a:xfrm>
+      </p:grpSpPr>
+      <p:sp>
+        <p:nvSpPr>
+          <p:cNvPr id="2" name="Slide Image Placeholder 1"/>
+          <p:cNvSpPr>
+            <a:spLocks noGrp="1" noRot="1" noChangeAspect="1"/>
+          </p:cNvSpPr>
+          <p:nvPr>
+            <p:ph type="sldImg"/>
+          </p:nvPr>
+        </p:nvSpPr>
+        <p:spPr/>
+      </p:sp>
+      <p:sp>
+        <p:nvSpPr>
+          <p:cNvPr id="3" name="Notes Placeholder 2"/>
+          <p:cNvSpPr>
+            <a:spLocks noGrp="1"/>
+          </p:cNvSpPr>
+          <p:nvPr>
+            <p:ph type="body" idx="1"/>
+          </p:nvPr>
+        </p:nvSpPr>
+        <p:spPr/>
+        <p:txBody>
+          <a:bodyPr/>
+          <a:lstStyle/>
+          <a:p>
+            <a:r>
+              <a:rPr lang="en-US" dirty="0"/>
+              <a:t/>
+            </a:r>
+            <a:endParaRPr lang="en-US" dirty="0"/>
+          </a:p>
+        </p:txBody>
+      </p:sp>
+      <p:sp>
+        <p:nvSpPr>
+          <p:cNvPr id="4" name="Slide Number Placeholder 3"/>
+          <p:cNvSpPr>
+            <a:spLocks noGrp="1"/>
+          </p:cNvSpPr>
+          <p:nvPr>
+            <p:ph type="sldNum" sz="quarter" idx="10"/>
+          </p:nvPr>
+        </p:nvSpPr>
+        <p:spPr/>
+        <p:txBody>
+          <a:bodyPr/>
+          <a:lstStyle/>
+          <a:p>
+            <a:fld id="{F7021451-1387-4CA6-816F-3879F97B5CBC}" type="slidenum">
+              <a:rPr lang="en-US"/>
+              <a:t>13</a:t>
+            </a:fld>
+            <a:endParaRPr lang="en-US"/>
+          </a:p>
+        </p:txBody>
+      </p:sp>
+    </p:spTree>
+    <p:extLst>
+      <p:ext uri="{BB962C8B-B14F-4D97-AF65-F5344CB8AC3E}">
+        <p14:creationId xmlns:p14="http://schemas.microsoft.com/office/powerpoint/2010/main" val="1024086991"/>
+      </p:ext>
+    </p:extLst>
+  </p:cSld>
+  <p:clrMapOvr>
+    <a:masterClrMapping/>
+  </p:clrMapOvr>
+</p:notes>
+</file>
+
+<file path=ppt/notesSlides/notesSlide14.xml><?xml version="1.0" encoding="utf-8"?>
+<p:notes xmlns:a="http://schemas.openxmlformats.org/drawingml/2006/main" xmlns:r="http://schemas.openxmlformats.org/officeDocument/2006/relationships" xmlns:p="http://schemas.openxmlformats.org/presentationml/2006/main">
+  <p:cSld>
+    <p:spTree>
+      <p:nvGrpSpPr>
+        <p:cNvPr id="1" name=""/>
+        <p:cNvGrpSpPr/>
+        <p:nvPr/>
+      </p:nvGrpSpPr>
+      <p:grpSpPr>
+        <a:xfrm>
+          <a:off x="0" y="0"/>
+          <a:ext cx="0" cy="0"/>
+          <a:chOff x="0" y="0"/>
+          <a:chExt cx="0" cy="0"/>
+        </a:xfrm>
+      </p:grpSpPr>
+      <p:sp>
+        <p:nvSpPr>
+          <p:cNvPr id="2" name="Slide Image Placeholder 1"/>
+          <p:cNvSpPr>
+            <a:spLocks noGrp="1" noRot="1" noChangeAspect="1"/>
+          </p:cNvSpPr>
+          <p:nvPr>
+            <p:ph type="sldImg"/>
+          </p:nvPr>
+        </p:nvSpPr>
+        <p:spPr/>
+      </p:sp>
+      <p:sp>
+        <p:nvSpPr>
+          <p:cNvPr id="3" name="Notes Placeholder 2"/>
+          <p:cNvSpPr>
+            <a:spLocks noGrp="1"/>
+          </p:cNvSpPr>
+          <p:nvPr>
+            <p:ph type="body" idx="1"/>
+          </p:nvPr>
+        </p:nvSpPr>
+        <p:spPr/>
+        <p:txBody>
+          <a:bodyPr/>
+          <a:lstStyle/>
+          <a:p>
+            <a:r>
+              <a:rPr lang="en-US" dirty="0"/>
+              <a:t/>
+            </a:r>
+            <a:endParaRPr lang="en-US" dirty="0"/>
+          </a:p>
+        </p:txBody>
+      </p:sp>
+      <p:sp>
+        <p:nvSpPr>
+          <p:cNvPr id="4" name="Slide Number Placeholder 3"/>
+          <p:cNvSpPr>
+            <a:spLocks noGrp="1"/>
+          </p:cNvSpPr>
+          <p:nvPr>
+            <p:ph type="sldNum" sz="quarter" idx="10"/>
+          </p:nvPr>
+        </p:nvSpPr>
+        <p:spPr/>
+        <p:txBody>
+          <a:bodyPr/>
+          <a:lstStyle/>
+          <a:p>
+            <a:fld id="{F7021451-1387-4CA6-816F-3879F97B5CBC}" type="slidenum">
+              <a:rPr lang="en-US"/>
+              <a:t>14</a:t>
+            </a:fld>
+            <a:endParaRPr lang="en-US"/>
+          </a:p>
+        </p:txBody>
+      </p:sp>
+    </p:spTree>
+    <p:extLst>
+      <p:ext uri="{BB962C8B-B14F-4D97-AF65-F5344CB8AC3E}">
+        <p14:creationId xmlns:p14="http://schemas.microsoft.com/office/powerpoint/2010/main" val="1024086991"/>
+      </p:ext>
+    </p:extLst>
+  </p:cSld>
+  <p:clrMapOvr>
+    <a:masterClrMapping/>
+  </p:clrMapOvr>
+</p:notes>
+</file>
+
+<file path=ppt/notesSlides/notesSlide15.xml><?xml version="1.0" encoding="utf-8"?>
+<p:notes xmlns:a="http://schemas.openxmlformats.org/drawingml/2006/main" xmlns:r="http://schemas.openxmlformats.org/officeDocument/2006/relationships" xmlns:p="http://schemas.openxmlformats.org/presentationml/2006/main">
+  <p:cSld>
+    <p:spTree>
+      <p:nvGrpSpPr>
+        <p:cNvPr id="1" name=""/>
+        <p:cNvGrpSpPr/>
+        <p:nvPr/>
+      </p:nvGrpSpPr>
+      <p:grpSpPr>
+        <a:xfrm>
+          <a:off x="0" y="0"/>
+          <a:ext cx="0" cy="0"/>
+          <a:chOff x="0" y="0"/>
+          <a:chExt cx="0" cy="0"/>
+        </a:xfrm>
+      </p:grpSpPr>
+      <p:sp>
+        <p:nvSpPr>
+          <p:cNvPr id="2" name="Slide Image Placeholder 1"/>
+          <p:cNvSpPr>
+            <a:spLocks noGrp="1" noRot="1" noChangeAspect="1"/>
+          </p:cNvSpPr>
+          <p:nvPr>
+            <p:ph type="sldImg"/>
+          </p:nvPr>
+        </p:nvSpPr>
+        <p:spPr/>
+      </p:sp>
+      <p:sp>
+        <p:nvSpPr>
+          <p:cNvPr id="3" name="Notes Placeholder 2"/>
+          <p:cNvSpPr>
+            <a:spLocks noGrp="1"/>
+          </p:cNvSpPr>
+          <p:nvPr>
+            <p:ph type="body" idx="1"/>
+          </p:nvPr>
+        </p:nvSpPr>
+        <p:spPr/>
+        <p:txBody>
+          <a:bodyPr/>
+          <a:lstStyle/>
+          <a:p>
+            <a:r>
+              <a:rPr lang="en-US" dirty="0"/>
+              <a:t/>
+            </a:r>
+            <a:endParaRPr lang="en-US" dirty="0"/>
+          </a:p>
+        </p:txBody>
+      </p:sp>
+      <p:sp>
+        <p:nvSpPr>
+          <p:cNvPr id="4" name="Slide Number Placeholder 3"/>
+          <p:cNvSpPr>
+            <a:spLocks noGrp="1"/>
+          </p:cNvSpPr>
+          <p:nvPr>
+            <p:ph type="sldNum" sz="quarter" idx="10"/>
+          </p:nvPr>
+        </p:nvSpPr>
+        <p:spPr/>
+        <p:txBody>
+          <a:bodyPr/>
+          <a:lstStyle/>
+          <a:p>
+            <a:fld id="{F7021451-1387-4CA6-816F-3879F97B5CBC}" type="slidenum">
+              <a:rPr lang="en-US"/>
+              <a:t>15</a:t>
+            </a:fld>
+            <a:endParaRPr lang="en-US"/>
+          </a:p>
+        </p:txBody>
+      </p:sp>
+    </p:spTree>
+    <p:extLst>
+      <p:ext uri="{BB962C8B-B14F-4D97-AF65-F5344CB8AC3E}">
+        <p14:creationId xmlns:p14="http://schemas.microsoft.com/office/powerpoint/2010/main" val="1024086991"/>
+      </p:ext>
+    </p:extLst>
+  </p:cSld>
+  <p:clrMapOvr>
+    <a:masterClrMapping/>
+  </p:clrMapOvr>
+</p:notes>
+</file>
+
+<file path=ppt/notesSlides/notesSlide16.xml><?xml version="1.0" encoding="utf-8"?>
+<p:notes xmlns:a="http://schemas.openxmlformats.org/drawingml/2006/main" xmlns:r="http://schemas.openxmlformats.org/officeDocument/2006/relationships" xmlns:p="http://schemas.openxmlformats.org/presentationml/2006/main">
+  <p:cSld>
+    <p:spTree>
+      <p:nvGrpSpPr>
+        <p:cNvPr id="1" name=""/>
+        <p:cNvGrpSpPr/>
+        <p:nvPr/>
+      </p:nvGrpSpPr>
+      <p:grpSpPr>
+        <a:xfrm>
+          <a:off x="0" y="0"/>
+          <a:ext cx="0" cy="0"/>
+          <a:chOff x="0" y="0"/>
+          <a:chExt cx="0" cy="0"/>
+        </a:xfrm>
+      </p:grpSpPr>
+      <p:sp>
+        <p:nvSpPr>
+          <p:cNvPr id="2" name="Slide Image Placeholder 1"/>
+          <p:cNvSpPr>
+            <a:spLocks noGrp="1" noRot="1" noChangeAspect="1"/>
+          </p:cNvSpPr>
+          <p:nvPr>
+            <p:ph type="sldImg"/>
+          </p:nvPr>
+        </p:nvSpPr>
+        <p:spPr/>
+      </p:sp>
+      <p:sp>
+        <p:nvSpPr>
+          <p:cNvPr id="3" name="Notes Placeholder 2"/>
+          <p:cNvSpPr>
+            <a:spLocks noGrp="1"/>
+          </p:cNvSpPr>
+          <p:nvPr>
+            <p:ph type="body" idx="1"/>
+          </p:nvPr>
+        </p:nvSpPr>
+        <p:spPr/>
+        <p:txBody>
+          <a:bodyPr/>
+          <a:lstStyle/>
+          <a:p>
+            <a:r>
+              <a:rPr lang="en-US" dirty="0"/>
+              <a:t/>
+            </a:r>
+            <a:endParaRPr lang="en-US" dirty="0"/>
+          </a:p>
+        </p:txBody>
+      </p:sp>
+      <p:sp>
+        <p:nvSpPr>
+          <p:cNvPr id="4" name="Slide Number Placeholder 3"/>
+          <p:cNvSpPr>
+            <a:spLocks noGrp="1"/>
+          </p:cNvSpPr>
+          <p:nvPr>
+            <p:ph type="sldNum" sz="quarter" idx="10"/>
+          </p:nvPr>
+        </p:nvSpPr>
+        <p:spPr/>
+        <p:txBody>
+          <a:bodyPr/>
+          <a:lstStyle/>
+          <a:p>
+            <a:fld id="{F7021451-1387-4CA6-816F-3879F97B5CBC}" type="slidenum">
+              <a:rPr lang="en-US"/>
+              <a:t>16</a:t>
+            </a:fld>
+            <a:endParaRPr lang="en-US"/>
+          </a:p>
+        </p:txBody>
+      </p:sp>
+    </p:spTree>
+    <p:extLst>
+      <p:ext uri="{BB962C8B-B14F-4D97-AF65-F5344CB8AC3E}">
+        <p14:creationId xmlns:p14="http://schemas.microsoft.com/office/powerpoint/2010/main" val="1024086991"/>
+      </p:ext>
+    </p:extLst>
+  </p:cSld>
+  <p:clrMapOvr>
+    <a:masterClrMapping/>
+  </p:clrMapOvr>
+</p:notes>
+</file>
+
+<file path=ppt/notesSlides/notesSlide17.xml><?xml version="1.0" encoding="utf-8"?>
+<p:notes xmlns:a="http://schemas.openxmlformats.org/drawingml/2006/main" xmlns:r="http://schemas.openxmlformats.org/officeDocument/2006/relationships" xmlns:p="http://schemas.openxmlformats.org/presentationml/2006/main">
+  <p:cSld>
+    <p:spTree>
+      <p:nvGrpSpPr>
+        <p:cNvPr id="1" name=""/>
+        <p:cNvGrpSpPr/>
+        <p:nvPr/>
+      </p:nvGrpSpPr>
+      <p:grpSpPr>
+        <a:xfrm>
+          <a:off x="0" y="0"/>
+          <a:ext cx="0" cy="0"/>
+          <a:chOff x="0" y="0"/>
+          <a:chExt cx="0" cy="0"/>
+        </a:xfrm>
+      </p:grpSpPr>
+      <p:sp>
+        <p:nvSpPr>
+          <p:cNvPr id="2" name="Slide Image Placeholder 1"/>
+          <p:cNvSpPr>
+            <a:spLocks noGrp="1" noRot="1" noChangeAspect="1"/>
+          </p:cNvSpPr>
+          <p:nvPr>
+            <p:ph type="sldImg"/>
+          </p:nvPr>
+        </p:nvSpPr>
+        <p:spPr/>
+      </p:sp>
+      <p:sp>
+        <p:nvSpPr>
+          <p:cNvPr id="3" name="Notes Placeholder 2"/>
+          <p:cNvSpPr>
+            <a:spLocks noGrp="1"/>
+          </p:cNvSpPr>
+          <p:nvPr>
+            <p:ph type="body" idx="1"/>
+          </p:nvPr>
+        </p:nvSpPr>
+        <p:spPr/>
+        <p:txBody>
+          <a:bodyPr/>
+          <a:lstStyle/>
+          <a:p>
+            <a:r>
+              <a:rPr lang="en-US" dirty="0"/>
+              <a:t/>
+            </a:r>
+            <a:endParaRPr lang="en-US" dirty="0"/>
+          </a:p>
+        </p:txBody>
+      </p:sp>
+      <p:sp>
+        <p:nvSpPr>
+          <p:cNvPr id="4" name="Slide Number Placeholder 3"/>
+          <p:cNvSpPr>
+            <a:spLocks noGrp="1"/>
+          </p:cNvSpPr>
+          <p:nvPr>
+            <p:ph type="sldNum" sz="quarter" idx="10"/>
+          </p:nvPr>
+        </p:nvSpPr>
+        <p:spPr/>
+        <p:txBody>
+          <a:bodyPr/>
+          <a:lstStyle/>
+          <a:p>
+            <a:fld id="{F7021451-1387-4CA6-816F-3879F97B5CBC}" type="slidenum">
+              <a:rPr lang="en-US"/>
+              <a:t>17</a:t>
+            </a:fld>
+            <a:endParaRPr lang="en-US"/>
+          </a:p>
+        </p:txBody>
+      </p:sp>
+    </p:spTree>
+    <p:extLst>
+      <p:ext uri="{BB962C8B-B14F-4D97-AF65-F5344CB8AC3E}">
+        <p14:creationId xmlns:p14="http://schemas.microsoft.com/office/powerpoint/2010/main" val="1024086991"/>
+      </p:ext>
+    </p:extLst>
+  </p:cSld>
+  <p:clrMapOvr>
+    <a:masterClrMapping/>
+  </p:clrMapOvr>
+</p:notes>
+</file>
+
+<file path=ppt/notesSlides/notesSlide18.xml><?xml version="1.0" encoding="utf-8"?>
+<p:notes xmlns:a="http://schemas.openxmlformats.org/drawingml/2006/main" xmlns:r="http://schemas.openxmlformats.org/officeDocument/2006/relationships" xmlns:p="http://schemas.openxmlformats.org/presentationml/2006/main">
+  <p:cSld>
+    <p:spTree>
+      <p:nvGrpSpPr>
+        <p:cNvPr id="1" name=""/>
+        <p:cNvGrpSpPr/>
+        <p:nvPr/>
+      </p:nvGrpSpPr>
+      <p:grpSpPr>
+        <a:xfrm>
+          <a:off x="0" y="0"/>
+          <a:ext cx="0" cy="0"/>
+          <a:chOff x="0" y="0"/>
+          <a:chExt cx="0" cy="0"/>
+        </a:xfrm>
+      </p:grpSpPr>
+      <p:sp>
+        <p:nvSpPr>
+          <p:cNvPr id="2" name="Slide Image Placeholder 1"/>
+          <p:cNvSpPr>
+            <a:spLocks noGrp="1" noRot="1" noChangeAspect="1"/>
+          </p:cNvSpPr>
+          <p:nvPr>
+            <p:ph type="sldImg"/>
+          </p:nvPr>
+        </p:nvSpPr>
+        <p:spPr/>
+      </p:sp>
+      <p:sp>
+        <p:nvSpPr>
+          <p:cNvPr id="3" name="Notes Placeholder 2"/>
+          <p:cNvSpPr>
+            <a:spLocks noGrp="1"/>
+          </p:cNvSpPr>
+          <p:nvPr>
+            <p:ph type="body" idx="1"/>
+          </p:nvPr>
+        </p:nvSpPr>
+        <p:spPr/>
+        <p:txBody>
+          <a:bodyPr/>
+          <a:lstStyle/>
+          <a:p>
+            <a:r>
+              <a:rPr lang="en-US" dirty="0"/>
+              <a:t/>
+            </a:r>
+            <a:endParaRPr lang="en-US" dirty="0"/>
+          </a:p>
+        </p:txBody>
+      </p:sp>
+      <p:sp>
+        <p:nvSpPr>
+          <p:cNvPr id="4" name="Slide Number Placeholder 3"/>
+          <p:cNvSpPr>
+            <a:spLocks noGrp="1"/>
+          </p:cNvSpPr>
+          <p:nvPr>
+            <p:ph type="sldNum" sz="quarter" idx="10"/>
+          </p:nvPr>
+        </p:nvSpPr>
+        <p:spPr/>
+        <p:txBody>
+          <a:bodyPr/>
+          <a:lstStyle/>
+          <a:p>
+            <a:fld id="{F7021451-1387-4CA6-816F-3879F97B5CBC}" type="slidenum">
+              <a:rPr lang="en-US"/>
+              <a:t>18</a:t>
+            </a:fld>
+            <a:endParaRPr lang="en-US"/>
+          </a:p>
+        </p:txBody>
+      </p:sp>
+    </p:spTree>
+    <p:extLst>
+      <p:ext uri="{BB962C8B-B14F-4D97-AF65-F5344CB8AC3E}">
+        <p14:creationId xmlns:p14="http://schemas.microsoft.com/office/powerpoint/2010/main" val="1024086991"/>
+      </p:ext>
+    </p:extLst>
+  </p:cSld>
+  <p:clrMapOvr>
+    <a:masterClrMapping/>
+  </p:clrMapOvr>
+</p:notes>
+</file>
+
+<file path=ppt/notesSlides/notesSlide19.xml><?xml version="1.0" encoding="utf-8"?>
+<p:notes xmlns:a="http://schemas.openxmlformats.org/drawingml/2006/main" xmlns:r="http://schemas.openxmlformats.org/officeDocument/2006/relationships" xmlns:p="http://schemas.openxmlformats.org/presentationml/2006/main">
+  <p:cSld>
+    <p:spTree>
+      <p:nvGrpSpPr>
+        <p:cNvPr id="1" name=""/>
+        <p:cNvGrpSpPr/>
+        <p:nvPr/>
+      </p:nvGrpSpPr>
+      <p:grpSpPr>
+        <a:xfrm>
+          <a:off x="0" y="0"/>
+          <a:ext cx="0" cy="0"/>
+          <a:chOff x="0" y="0"/>
+          <a:chExt cx="0" cy="0"/>
+        </a:xfrm>
+      </p:grpSpPr>
+      <p:sp>
+        <p:nvSpPr>
+          <p:cNvPr id="2" name="Slide Image Placeholder 1"/>
+          <p:cNvSpPr>
+            <a:spLocks noGrp="1" noRot="1" noChangeAspect="1"/>
+          </p:cNvSpPr>
+          <p:nvPr>
+            <p:ph type="sldImg"/>
+          </p:nvPr>
+        </p:nvSpPr>
+        <p:spPr/>
+      </p:sp>
+      <p:sp>
+        <p:nvSpPr>
+          <p:cNvPr id="3" name="Notes Placeholder 2"/>
+          <p:cNvSpPr>
+            <a:spLocks noGrp="1"/>
+          </p:cNvSpPr>
+          <p:nvPr>
+            <p:ph type="body" idx="1"/>
+          </p:nvPr>
+        </p:nvSpPr>
+        <p:spPr/>
+        <p:txBody>
+          <a:bodyPr/>
+          <a:lstStyle/>
+          <a:p>
+            <a:r>
+              <a:rPr lang="en-US" dirty="0"/>
+              <a:t/>
+            </a:r>
+            <a:endParaRPr lang="en-US" dirty="0"/>
+          </a:p>
+        </p:txBody>
+      </p:sp>
+      <p:sp>
+        <p:nvSpPr>
+          <p:cNvPr id="4" name="Slide Number Placeholder 3"/>
+          <p:cNvSpPr>
+            <a:spLocks noGrp="1"/>
+          </p:cNvSpPr>
+          <p:nvPr>
+            <p:ph type="sldNum" sz="quarter" idx="10"/>
+          </p:nvPr>
+        </p:nvSpPr>
+        <p:spPr/>
+        <p:txBody>
+          <a:bodyPr/>
+          <a:lstStyle/>
+          <a:p>
+            <a:fld id="{F7021451-1387-4CA6-816F-3879F97B5CBC}" type="slidenum">
+              <a:rPr lang="en-US"/>
+              <a:t>19</a:t>
             </a:fld>
             <a:endParaRPr lang="en-US"/>
           </a:p>
@@ -1833,6 +2456,13 @@
 <file path=ppt/slides/slide1.xml><?xml version="1.0" encoding="utf-8"?>
 <p:sld xmlns:a="http://schemas.openxmlformats.org/drawingml/2006/main" xmlns:r="http://schemas.openxmlformats.org/officeDocument/2006/relationships" xmlns:p="http://schemas.openxmlformats.org/presentationml/2006/main">
   <p:cSld name="Slide 1">
+    <p:bg>
+      <p:bgPr>
+        <a:solidFill>
+          <a:srgbClr val="FFFFFF"/>
+        </a:solidFill>
+      </p:bgPr>
+    </p:bg>
     <p:spTree>
       <p:nvGrpSpPr>
         <p:cNvPr id="1" name=""/>
@@ -1849,14 +2479,56 @@
       </p:grpSpPr>
       <p:sp>
         <p:nvSpPr>
-          <p:cNvPr id="2" name="Text 0"/>
-          <p:cNvSpPr/>
-          <p:nvPr/>
-        </p:nvSpPr>
-        <p:spPr>
-          <a:xfrm>
-            <a:off x="548640" y="1828800"/>
-            <a:ext cx="8046720" cy="1097280"/>
+          <p:cNvPr id="2" name="Shape 0"/>
+          <p:cNvSpPr/>
+          <p:nvPr/>
+        </p:nvSpPr>
+        <p:spPr>
+          <a:xfrm>
+            <a:off x="0" y="0"/>
+            <a:ext cx="256032" cy="5148072"/>
+          </a:xfrm>
+          <a:prstGeom prst="rect">
+            <a:avLst/>
+          </a:prstGeom>
+          <a:solidFill>
+            <a:srgbClr val="B45309"/>
+          </a:solidFill>
+          <a:ln/>
+        </p:spPr>
+      </p:sp>
+      <p:sp>
+        <p:nvSpPr>
+          <p:cNvPr id="3" name="Shape 1"/>
+          <p:cNvSpPr/>
+          <p:nvPr/>
+        </p:nvSpPr>
+        <p:spPr>
+          <a:xfrm>
+            <a:off x="256032" y="0"/>
+            <a:ext cx="8887968" cy="109728"/>
+          </a:xfrm>
+          <a:prstGeom prst="rect">
+            <a:avLst/>
+          </a:prstGeom>
+          <a:solidFill>
+            <a:srgbClr val="B45309">
+              <a:alpha val="40000"/>
+            </a:srgbClr>
+          </a:solidFill>
+          <a:ln/>
+        </p:spPr>
+      </p:sp>
+      <p:sp>
+        <p:nvSpPr>
+          <p:cNvPr id="4" name="Text 2"/>
+          <p:cNvSpPr/>
+          <p:nvPr/>
+        </p:nvSpPr>
+        <p:spPr>
+          <a:xfrm>
+            <a:off x="685800" y="1051560"/>
+            <a:ext cx="7863840" cy="365760"/>
           </a:xfrm>
           <a:prstGeom prst="rect">
             <a:avLst/>
@@ -1872,27 +2544,30 @@
               <a:buNone/>
             </a:pPr>
             <a:r>
-              <a:rPr lang="en-US" sz="3200" b="1" dirty="0">
+              <a:rPr lang="en-US" sz="1300" b="1" spc="300" kern="0" dirty="0">
                 <a:solidFill>
                   <a:srgbClr val="B45309"/>
                 </a:solidFill>
-              </a:rPr>
-              <a:t>Financial Statement Forecasting and Analysis</a:t>
-            </a:r>
-            <a:endParaRPr lang="en-US" sz="3200" dirty="0"/>
-          </a:p>
-        </p:txBody>
-      </p:sp>
-      <p:sp>
-        <p:nvSpPr>
-          <p:cNvPr id="3" name="Text 1"/>
-          <p:cNvSpPr/>
-          <p:nvPr/>
-        </p:nvSpPr>
-        <p:spPr>
-          <a:xfrm>
-            <a:off x="548640" y="3017520"/>
-            <a:ext cx="8046720" cy="457200"/>
+                <a:latin typeface="Arial" pitchFamily="34" charset="0"/>
+                <a:ea typeface="Arial" pitchFamily="34" charset="-122"/>
+                <a:cs typeface="Arial" pitchFamily="34" charset="-120"/>
+              </a:rPr>
+              <a:t>DAY 2</a:t>
+            </a:r>
+            <a:endParaRPr lang="en-US" sz="1300" dirty="0"/>
+          </a:p>
+        </p:txBody>
+      </p:sp>
+      <p:sp>
+        <p:nvSpPr>
+          <p:cNvPr id="5" name="Text 3"/>
+          <p:cNvSpPr/>
+          <p:nvPr/>
+        </p:nvSpPr>
+        <p:spPr>
+          <a:xfrm>
+            <a:off x="685800" y="1417320"/>
+            <a:ext cx="7863840" cy="1463040"/>
           </a:xfrm>
           <a:prstGeom prst="rect">
             <a:avLst/>
@@ -1908,27 +2583,30 @@
               <a:buNone/>
             </a:pPr>
             <a:r>
-              <a:rPr lang="en-US" sz="1400" dirty="0">
-                <a:solidFill>
-                  <a:srgbClr val="666666"/>
-                </a:solidFill>
-              </a:rPr>
-              <a:t>Lesson Forge Pro (owner)</a:t>
-            </a:r>
-            <a:endParaRPr lang="en-US" sz="1400" dirty="0"/>
-          </a:p>
-        </p:txBody>
-      </p:sp>
-      <p:sp>
-        <p:nvSpPr>
-          <p:cNvPr id="4" name="Text 2"/>
-          <p:cNvSpPr/>
-          <p:nvPr/>
-        </p:nvSpPr>
-        <p:spPr>
-          <a:xfrm>
-            <a:off x="548640" y="4389120"/>
-            <a:ext cx="8046720" cy="548640"/>
+              <a:rPr lang="en-US" sz="3300" b="1" dirty="0">
+                <a:solidFill>
+                  <a:srgbClr val="1C1917"/>
+                </a:solidFill>
+                <a:latin typeface="Arial" pitchFamily="34" charset="0"/>
+                <a:ea typeface="Arial" pitchFamily="34" charset="-122"/>
+                <a:cs typeface="Arial" pitchFamily="34" charset="-120"/>
+              </a:rPr>
+              <a:t>Financial Statement Forecasting and Analysis</a:t>
+            </a:r>
+            <a:endParaRPr lang="en-US" sz="3300" dirty="0"/>
+          </a:p>
+        </p:txBody>
+      </p:sp>
+      <p:sp>
+        <p:nvSpPr>
+          <p:cNvPr id="6" name="Text 4"/>
+          <p:cNvSpPr/>
+          <p:nvPr/>
+        </p:nvSpPr>
+        <p:spPr>
+          <a:xfrm>
+            <a:off x="685800" y="2971800"/>
+            <a:ext cx="7863840" cy="411480"/>
           </a:xfrm>
           <a:prstGeom prst="rect">
             <a:avLst/>
@@ -1944,14 +2622,95 @@
               <a:buNone/>
             </a:pPr>
             <a:r>
-              <a:rPr lang="en-US" sz="1000" dirty="0">
-                <a:solidFill>
-                  <a:srgbClr val="888888"/>
-                </a:solidFill>
+              <a:rPr lang="en-US" sz="1400" dirty="0">
+                <a:solidFill>
+                  <a:srgbClr val="78716C"/>
+                </a:solidFill>
+                <a:latin typeface="Arial" pitchFamily="34" charset="0"/>
+                <a:ea typeface="Arial" pitchFamily="34" charset="-122"/>
+                <a:cs typeface="Arial" pitchFamily="34" charset="-120"/>
+              </a:rPr>
+              <a:t>FMVA Certification Prep: Financial Modeling and Valuation Bootcamp</a:t>
+            </a:r>
+            <a:endParaRPr lang="en-US" sz="1400" dirty="0"/>
+          </a:p>
+        </p:txBody>
+      </p:sp>
+      <p:sp>
+        <p:nvSpPr>
+          <p:cNvPr id="7" name="Text 5"/>
+          <p:cNvSpPr/>
+          <p:nvPr/>
+        </p:nvSpPr>
+        <p:spPr>
+          <a:xfrm>
+            <a:off x="685800" y="4343400"/>
+            <a:ext cx="7863840" cy="365760"/>
+          </a:xfrm>
+          <a:prstGeom prst="rect">
+            <a:avLst/>
+          </a:prstGeom>
+          <a:noFill/>
+          <a:ln/>
+        </p:spPr>
+        <p:txBody>
+          <a:bodyPr wrap="square" rtlCol="0" anchor="ctr"/>
+          <a:lstStyle/>
+          <a:p>
+            <a:pPr indent="0" marL="0">
+              <a:buNone/>
+            </a:pPr>
+            <a:r>
+              <a:rPr lang="en-US" sz="1200" b="1" dirty="0">
+                <a:solidFill>
+                  <a:srgbClr val="B45309"/>
+                </a:solidFill>
+                <a:latin typeface="Arial" pitchFamily="34" charset="0"/>
+                <a:ea typeface="Arial" pitchFamily="34" charset="-122"/>
+                <a:cs typeface="Arial" pitchFamily="34" charset="-120"/>
+              </a:rPr>
+              <a:t>Lesson Forge Pro (owner)</a:t>
+            </a:r>
+            <a:endParaRPr lang="en-US" sz="1200" dirty="0"/>
+          </a:p>
+        </p:txBody>
+      </p:sp>
+      <p:sp>
+        <p:nvSpPr>
+          <p:cNvPr id="8" name="Text 6"/>
+          <p:cNvSpPr/>
+          <p:nvPr/>
+        </p:nvSpPr>
+        <p:spPr>
+          <a:xfrm>
+            <a:off x="685800" y="4709160"/>
+            <a:ext cx="7863840" cy="320040"/>
+          </a:xfrm>
+          <a:prstGeom prst="rect">
+            <a:avLst/>
+          </a:prstGeom>
+          <a:noFill/>
+          <a:ln/>
+        </p:spPr>
+        <p:txBody>
+          <a:bodyPr wrap="square" rtlCol="0" anchor="ctr"/>
+          <a:lstStyle/>
+          <a:p>
+            <a:pPr indent="0" marL="0">
+              <a:buNone/>
+            </a:pPr>
+            <a:r>
+              <a:rPr lang="en-US" sz="850" dirty="0">
+                <a:solidFill>
+                  <a:srgbClr val="AAAAAA"/>
+                </a:solidFill>
+                <a:latin typeface="Arial" pitchFamily="34" charset="0"/>
+                <a:ea typeface="Arial" pitchFamily="34" charset="-122"/>
+                <a:cs typeface="Arial" pitchFamily="34" charset="-120"/>
               </a:rPr>
               <a:t>This content is educational material only and does not constitute financial, investment, or trading advice.</a:t>
             </a:r>
-            <a:endParaRPr lang="en-US" sz="1000" dirty="0"/>
+            <a:endParaRPr lang="en-US" sz="850" dirty="0"/>
           </a:p>
         </p:txBody>
       </p:sp>
@@ -1966,6 +2725,13 @@
 <file path=ppt/slides/slide10.xml><?xml version="1.0" encoding="utf-8"?>
 <p:sld xmlns:a="http://schemas.openxmlformats.org/drawingml/2006/main" xmlns:r="http://schemas.openxmlformats.org/officeDocument/2006/relationships" xmlns:p="http://schemas.openxmlformats.org/presentationml/2006/main">
   <p:cSld name="Slide 10">
+    <p:bg>
+      <p:bgPr>
+        <a:solidFill>
+          <a:srgbClr val="FFFFFF"/>
+        </a:solidFill>
+      </p:bgPr>
+    </p:bg>
     <p:spTree>
       <p:nvGrpSpPr>
         <p:cNvPr id="1" name=""/>
@@ -1982,14 +2748,34 @@
       </p:grpSpPr>
       <p:sp>
         <p:nvSpPr>
-          <p:cNvPr id="2" name="Text 0"/>
-          <p:cNvSpPr/>
-          <p:nvPr/>
-        </p:nvSpPr>
-        <p:spPr>
-          <a:xfrm>
-            <a:off x="457200" y="320040"/>
-            <a:ext cx="8229600" cy="731520"/>
+          <p:cNvPr id="2" name="Shape 0"/>
+          <p:cNvSpPr/>
+          <p:nvPr/>
+        </p:nvSpPr>
+        <p:spPr>
+          <a:xfrm>
+            <a:off x="411480" y="402336"/>
+            <a:ext cx="82296" cy="329184"/>
+          </a:xfrm>
+          <a:prstGeom prst="rect">
+            <a:avLst/>
+          </a:prstGeom>
+          <a:solidFill>
+            <a:srgbClr val="B45309"/>
+          </a:solidFill>
+          <a:ln/>
+        </p:spPr>
+      </p:sp>
+      <p:sp>
+        <p:nvSpPr>
+          <p:cNvPr id="3" name="Text 1"/>
+          <p:cNvSpPr/>
+          <p:nvPr/>
+        </p:nvSpPr>
+        <p:spPr>
+          <a:xfrm>
+            <a:off x="566928" y="292608"/>
+            <a:ext cx="8138160" cy="548640"/>
           </a:xfrm>
           <a:prstGeom prst="rect">
             <a:avLst/>
@@ -2005,27 +2791,92 @@
               <a:buNone/>
             </a:pPr>
             <a:r>
-              <a:rPr lang="en-US" sz="2400" b="1" dirty="0">
-                <a:solidFill>
-                  <a:srgbClr val="B45309"/>
-                </a:solidFill>
-              </a:rPr>
-              <a:t>Case Study and Group Discussion (1:10 - 1:30)</a:t>
-            </a:r>
-            <a:endParaRPr lang="en-US" sz="2400" dirty="0"/>
-          </a:p>
-        </p:txBody>
-      </p:sp>
-      <p:sp>
-        <p:nvSpPr>
-          <p:cNvPr id="3" name="Text 1"/>
-          <p:cNvSpPr/>
-          <p:nvPr/>
-        </p:nvSpPr>
-        <p:spPr>
-          <a:xfrm>
-            <a:off x="640080" y="1188720"/>
-            <a:ext cx="7863840" cy="3291840"/>
+              <a:rPr lang="en-US" sz="2100" b="1" dirty="0">
+                <a:solidFill>
+                  <a:srgbClr val="1C1917"/>
+                </a:solidFill>
+                <a:latin typeface="Arial" pitchFamily="34" charset="0"/>
+                <a:ea typeface="Arial" pitchFamily="34" charset="-122"/>
+                <a:cs typeface="Arial" pitchFamily="34" charset="-120"/>
+              </a:rPr>
+              <a:t>The Standard Forecasting Steps</a:t>
+            </a:r>
+            <a:endParaRPr lang="en-US" sz="2100" dirty="0"/>
+          </a:p>
+        </p:txBody>
+      </p:sp>
+      <p:sp>
+        <p:nvSpPr>
+          <p:cNvPr id="4" name="Shape 2"/>
+          <p:cNvSpPr/>
+          <p:nvPr/>
+        </p:nvSpPr>
+        <p:spPr>
+          <a:xfrm>
+            <a:off x="411480" y="960120"/>
+            <a:ext cx="8321040" cy="0"/>
+          </a:xfrm>
+          <a:prstGeom prst="line">
+            <a:avLst/>
+          </a:prstGeom>
+          <a:noFill/>
+          <a:ln w="12700">
+            <a:solidFill>
+              <a:srgbClr val="E7E5E4"/>
+            </a:solidFill>
+            <a:prstDash val="solid"/>
+          </a:ln>
+        </p:spPr>
+      </p:sp>
+      <p:sp>
+        <p:nvSpPr>
+          <p:cNvPr id="5" name="Text 3"/>
+          <p:cNvSpPr/>
+          <p:nvPr/>
+        </p:nvSpPr>
+        <p:spPr>
+          <a:xfrm>
+            <a:off x="411480" y="4864608"/>
+            <a:ext cx="8321040" cy="237744"/>
+          </a:xfrm>
+          <a:prstGeom prst="rect">
+            <a:avLst/>
+          </a:prstGeom>
+          <a:noFill/>
+          <a:ln/>
+        </p:spPr>
+        <p:txBody>
+          <a:bodyPr wrap="square" rtlCol="0" anchor="ctr"/>
+          <a:lstStyle/>
+          <a:p>
+            <a:pPr indent="0" marL="0">
+              <a:buNone/>
+            </a:pPr>
+            <a:r>
+              <a:rPr lang="en-US" sz="750" dirty="0">
+                <a:solidFill>
+                  <a:srgbClr val="AAAAAA"/>
+                </a:solidFill>
+                <a:latin typeface="Arial" pitchFamily="34" charset="0"/>
+                <a:ea typeface="Arial" pitchFamily="34" charset="-122"/>
+                <a:cs typeface="Arial" pitchFamily="34" charset="-120"/>
+              </a:rPr>
+              <a:t>Lesson Forge Pro (owner) — This content is educational material only and does not constitute financial, investment, or trading advice.</a:t>
+            </a:r>
+            <a:endParaRPr lang="en-US" sz="750" dirty="0"/>
+          </a:p>
+        </p:txBody>
+      </p:sp>
+      <p:sp>
+        <p:nvSpPr>
+          <p:cNvPr id="6" name="Text 4"/>
+          <p:cNvSpPr/>
+          <p:nvPr/>
+        </p:nvSpPr>
+        <p:spPr>
+          <a:xfrm>
+            <a:off x="731520" y="1188720"/>
+            <a:ext cx="7680960" cy="2743200"/>
           </a:xfrm>
           <a:prstGeom prst="rect">
             <a:avLst/>
@@ -2037,32 +2888,151 @@
           <a:bodyPr wrap="square" rtlCol="0" anchor="t"/>
           <a:lstStyle/>
           <a:p>
-            <a:pPr marL="342900" indent="-342900">
+            <a:pPr marL="152400" indent="-152400">
+              <a:spcAft>
+                <a:spcPts val="800"/>
+              </a:spcAft>
               <a:buSzPct val="100000"/>
               <a:buChar char="•"/>
             </a:pPr>
             <a:r>
-              <a:rPr lang="en-US" sz="1600" dirty="0">
-                <a:solidFill>
-                  <a:srgbClr val="333333"/>
-                </a:solidFill>
-              </a:rPr>
-              <a:t>Let's apply what we've learned to a real-world case study. We will work in groups to analyze a company's financial statements and identify key areas of strength</a:t>
-            </a:r>
-            <a:endParaRPr lang="en-US" sz="1600" dirty="0"/>
-          </a:p>
-        </p:txBody>
-      </p:sp>
-      <p:sp>
-        <p:nvSpPr>
-          <p:cNvPr id="4" name="Text 2"/>
-          <p:cNvSpPr/>
-          <p:nvPr/>
-        </p:nvSpPr>
-        <p:spPr>
-          <a:xfrm>
-            <a:off x="457200" y="4709160"/>
-            <a:ext cx="8229600" cy="320040"/>
+              <a:rPr lang="en-US" sz="1500" dirty="0">
+                <a:solidFill>
+                  <a:srgbClr val="1C1917"/>
+                </a:solidFill>
+                <a:latin typeface="Arial" pitchFamily="34" charset="0"/>
+                <a:ea typeface="Arial" pitchFamily="34" charset="-122"/>
+                <a:cs typeface="Arial" pitchFamily="34" charset="-120"/>
+              </a:rPr>
+              <a:t>Step 1: Forecast revenue—the engine driving nearly every other line item.</a:t>
+            </a:r>
+            <a:endParaRPr lang="en-US" sz="1500" dirty="0"/>
+          </a:p>
+          <a:p>
+            <a:pPr marL="152400" indent="-152400">
+              <a:spcAft>
+                <a:spcPts val="800"/>
+              </a:spcAft>
+              <a:buSzPct val="100000"/>
+              <a:buChar char="•"/>
+            </a:pPr>
+            <a:r>
+              <a:rPr lang="en-US" sz="1500" dirty="0">
+                <a:solidFill>
+                  <a:srgbClr val="1C1917"/>
+                </a:solidFill>
+                <a:latin typeface="Arial" pitchFamily="34" charset="0"/>
+                <a:ea typeface="Arial" pitchFamily="34" charset="-122"/>
+                <a:cs typeface="Arial" pitchFamily="34" charset="-120"/>
+              </a:rPr>
+              <a:t>Step 2: Build income statement top-to-bottom using margin and expense drivers.</a:t>
+            </a:r>
+            <a:endParaRPr lang="en-US" sz="1500" dirty="0"/>
+          </a:p>
+          <a:p>
+            <a:pPr marL="152400" indent="-152400">
+              <a:spcAft>
+                <a:spcPts val="800"/>
+              </a:spcAft>
+              <a:buSzPct val="100000"/>
+              <a:buChar char="•"/>
+            </a:pPr>
+            <a:r>
+              <a:rPr lang="en-US" sz="1500" dirty="0">
+                <a:solidFill>
+                  <a:srgbClr val="1C1917"/>
+                </a:solidFill>
+                <a:latin typeface="Arial" pitchFamily="34" charset="0"/>
+                <a:ea typeface="Arial" pitchFamily="34" charset="-122"/>
+                <a:cs typeface="Arial" pitchFamily="34" charset="-120"/>
+              </a:rPr>
+              <a:t>Step 3: Forecast balance sheet using days-outstanding metrics and PP&amp;E roll-forward.</a:t>
+            </a:r>
+            <a:endParaRPr lang="en-US" sz="1500" dirty="0"/>
+          </a:p>
+          <a:p>
+            <a:pPr marL="152400" indent="-152400">
+              <a:spcAft>
+                <a:spcPts val="800"/>
+              </a:spcAft>
+              <a:buSzPct val="100000"/>
+              <a:buChar char="•"/>
+            </a:pPr>
+            <a:r>
+              <a:rPr lang="en-US" sz="1500" dirty="0">
+                <a:solidFill>
+                  <a:srgbClr val="1C1917"/>
+                </a:solidFill>
+                <a:latin typeface="Arial" pitchFamily="34" charset="0"/>
+                <a:ea typeface="Arial" pitchFamily="34" charset="-122"/>
+                <a:cs typeface="Arial" pitchFamily="34" charset="-120"/>
+              </a:rPr>
+              <a:t>Step 4: Build debt and interest schedule; link interest expense to debt balances.</a:t>
+            </a:r>
+            <a:endParaRPr lang="en-US" sz="1500" dirty="0"/>
+          </a:p>
+          <a:p>
+            <a:pPr marL="152400" indent="-152400">
+              <a:spcAft>
+                <a:spcPts val="800"/>
+              </a:spcAft>
+              <a:buSzPct val="100000"/>
+              <a:buChar char="•"/>
+            </a:pPr>
+            <a:r>
+              <a:rPr lang="en-US" sz="1500" dirty="0">
+                <a:solidFill>
+                  <a:srgbClr val="1C1917"/>
+                </a:solidFill>
+                <a:latin typeface="Arial" pitchFamily="34" charset="0"/>
+                <a:ea typeface="Arial" pitchFamily="34" charset="-122"/>
+                <a:cs typeface="Arial" pitchFamily="34" charset="-120"/>
+              </a:rPr>
+              <a:t>Document rationale for every assumption before touching a formula.</a:t>
+            </a:r>
+            <a:endParaRPr lang="en-US" sz="1500" dirty="0"/>
+          </a:p>
+        </p:txBody>
+      </p:sp>
+      <p:sp>
+        <p:nvSpPr>
+          <p:cNvPr id="7" name="Shape 5"/>
+          <p:cNvSpPr/>
+          <p:nvPr/>
+        </p:nvSpPr>
+        <p:spPr>
+          <a:xfrm>
+            <a:off x="731520" y="4041648"/>
+            <a:ext cx="7680960" cy="566928"/>
+          </a:xfrm>
+          <a:prstGeom prst="roundRect">
+            <a:avLst>
+              <a:gd name="adj" fmla="val 12903"/>
+            </a:avLst>
+          </a:prstGeom>
+          <a:solidFill>
+            <a:srgbClr val="B45309">
+              <a:alpha val="12000"/>
+            </a:srgbClr>
+          </a:solidFill>
+          <a:ln w="12700">
+            <a:solidFill>
+              <a:srgbClr val="B45309"/>
+            </a:solidFill>
+            <a:prstDash val="solid"/>
+          </a:ln>
+        </p:spPr>
+      </p:sp>
+      <p:sp>
+        <p:nvSpPr>
+          <p:cNvPr id="8" name="Text 6"/>
+          <p:cNvSpPr/>
+          <p:nvPr/>
+        </p:nvSpPr>
+        <p:spPr>
+          <a:xfrm>
+            <a:off x="868680" y="4087368"/>
+            <a:ext cx="7406640" cy="475488"/>
           </a:xfrm>
           <a:prstGeom prst="rect">
             <a:avLst/>
@@ -2078,14 +3048,31 @@
               <a:buNone/>
             </a:pPr>
             <a:r>
-              <a:rPr lang="en-US" sz="800" dirty="0">
-                <a:solidFill>
-                  <a:srgbClr val="AAAAAA"/>
-                </a:solidFill>
-              </a:rPr>
-              <a:t>Lesson Forge Pro (owner) — This content is educational material only and does not constitute financial, investment, or trading advice.</a:t>
-            </a:r>
-            <a:endParaRPr lang="en-US" sz="800" dirty="0"/>
+              <a:rPr lang="en-US" sz="1100" b="1" dirty="0">
+                <a:solidFill>
+                  <a:srgbClr val="B45309"/>
+                </a:solidFill>
+                <a:latin typeface="Arial" pitchFamily="34" charset="0"/>
+                <a:ea typeface="Arial" pitchFamily="34" charset="-122"/>
+                <a:cs typeface="Arial" pitchFamily="34" charset="-120"/>
+              </a:rPr>
+              <a:t>Takeaway  </a:t>
+            </a:r>
+            <a:pPr indent="0" marL="0">
+              <a:buNone/>
+            </a:pPr>
+            <a:r>
+              <a:rPr lang="en-US" sz="1150" dirty="0">
+                <a:solidFill>
+                  <a:srgbClr val="1C1917"/>
+                </a:solidFill>
+                <a:latin typeface="Arial" pitchFamily="34" charset="0"/>
+                <a:ea typeface="Arial" pitchFamily="34" charset="-122"/>
+                <a:cs typeface="Arial" pitchFamily="34" charset="-120"/>
+              </a:rPr>
+              <a:t>A disciplined, sequential four-step procedure applies to any company, industry, or forecast horizon.</a:t>
+            </a:r>
+            <a:endParaRPr lang="en-US" sz="1100" dirty="0"/>
           </a:p>
         </p:txBody>
       </p:sp>
@@ -2100,6 +3087,13 @@
 <file path=ppt/slides/slide11.xml><?xml version="1.0" encoding="utf-8"?>
 <p:sld xmlns:a="http://schemas.openxmlformats.org/drawingml/2006/main" xmlns:r="http://schemas.openxmlformats.org/officeDocument/2006/relationships" xmlns:p="http://schemas.openxmlformats.org/presentationml/2006/main">
   <p:cSld name="Slide 11">
+    <p:bg>
+      <p:bgPr>
+        <a:solidFill>
+          <a:srgbClr val="FFFFFF"/>
+        </a:solidFill>
+      </p:bgPr>
+    </p:bg>
     <p:spTree>
       <p:nvGrpSpPr>
         <p:cNvPr id="1" name=""/>
@@ -2116,14 +3110,34 @@
       </p:grpSpPr>
       <p:sp>
         <p:nvSpPr>
-          <p:cNvPr id="2" name="Text 0"/>
-          <p:cNvSpPr/>
-          <p:nvPr/>
-        </p:nvSpPr>
-        <p:spPr>
-          <a:xfrm>
-            <a:off x="457200" y="320040"/>
-            <a:ext cx="8229600" cy="731520"/>
+          <p:cNvPr id="2" name="Shape 0"/>
+          <p:cNvSpPr/>
+          <p:nvPr/>
+        </p:nvSpPr>
+        <p:spPr>
+          <a:xfrm>
+            <a:off x="411480" y="384048"/>
+            <a:ext cx="82296" cy="310896"/>
+          </a:xfrm>
+          <a:prstGeom prst="rect">
+            <a:avLst/>
+          </a:prstGeom>
+          <a:solidFill>
+            <a:srgbClr val="B45309"/>
+          </a:solidFill>
+          <a:ln/>
+        </p:spPr>
+      </p:sp>
+      <p:sp>
+        <p:nvSpPr>
+          <p:cNvPr id="3" name="Text 1"/>
+          <p:cNvSpPr/>
+          <p:nvPr/>
+        </p:nvSpPr>
+        <p:spPr>
+          <a:xfrm>
+            <a:off x="566928" y="292608"/>
+            <a:ext cx="8138160" cy="502920"/>
           </a:xfrm>
           <a:prstGeom prst="rect">
             <a:avLst/>
@@ -2139,51 +3153,17 @@
               <a:buNone/>
             </a:pPr>
             <a:r>
-              <a:rPr lang="en-US" sz="2400" b="1" dirty="0">
-                <a:solidFill>
-                  <a:srgbClr val="B45309"/>
-                </a:solidFill>
-              </a:rPr>
-              <a:t>Conclusion and Q&amp;A (1:30 - 1:40)</a:t>
-            </a:r>
-            <a:endParaRPr lang="en-US" sz="2400" dirty="0"/>
-          </a:p>
-        </p:txBody>
-      </p:sp>
-      <p:sp>
-        <p:nvSpPr>
-          <p:cNvPr id="3" name="Text 1"/>
-          <p:cNvSpPr/>
-          <p:nvPr/>
-        </p:nvSpPr>
-        <p:spPr>
-          <a:xfrm>
-            <a:off x="640080" y="1188720"/>
-            <a:ext cx="7863840" cy="3291840"/>
-          </a:xfrm>
-          <a:prstGeom prst="rect">
-            <a:avLst/>
-          </a:prstGeom>
-          <a:noFill/>
-          <a:ln/>
-        </p:spPr>
-        <p:txBody>
-          <a:bodyPr wrap="square" rtlCol="0" anchor="t"/>
-          <a:lstStyle/>
-          <a:p>
-            <a:pPr marL="342900" indent="-342900">
-              <a:buSzPct val="100000"/>
-              <a:buChar char="•"/>
-            </a:pPr>
-            <a:r>
-              <a:rPr lang="en-US" sz="1600" dirty="0">
-                <a:solidFill>
-                  <a:srgbClr val="333333"/>
-                </a:solidFill>
-              </a:rPr>
-              <a:t>Let's summarize what we've covered today and address any questions you may have. Remember, financial statement forecasting and analysis is like solving a puzzle</a:t>
-            </a:r>
-            <a:endParaRPr lang="en-US" sz="1600" dirty="0"/>
+              <a:rPr lang="en-US" sz="2000" b="1" dirty="0">
+                <a:solidFill>
+                  <a:srgbClr val="1C1917"/>
+                </a:solidFill>
+                <a:latin typeface="Arial" pitchFamily="34" charset="0"/>
+                <a:ea typeface="Arial" pitchFamily="34" charset="-122"/>
+                <a:cs typeface="Arial" pitchFamily="34" charset="-120"/>
+              </a:rPr>
+              <a:t>Maple Ridge Year 1 Pro Forma</a:t>
+            </a:r>
+            <a:endParaRPr lang="en-US" sz="2000" dirty="0"/>
           </a:p>
         </p:txBody>
       </p:sp>
@@ -2195,8 +3175,8 @@
         </p:nvSpPr>
         <p:spPr>
           <a:xfrm>
-            <a:off x="457200" y="4709160"/>
-            <a:ext cx="8229600" cy="320040"/>
+            <a:off x="566928" y="4681728"/>
+            <a:ext cx="8138160" cy="320040"/>
           </a:xfrm>
           <a:prstGeom prst="rect">
             <a:avLst/>
@@ -2212,14 +3192,569 @@
               <a:buNone/>
             </a:pPr>
             <a:r>
-              <a:rPr lang="en-US" sz="800" dirty="0">
+              <a:rPr lang="en-US" sz="1000" i="1" dirty="0">
+                <a:solidFill>
+                  <a:srgbClr val="78716C"/>
+                </a:solidFill>
+                <a:latin typeface="Arial" pitchFamily="34" charset="0"/>
+                <a:ea typeface="Arial" pitchFamily="34" charset="-122"/>
+                <a:cs typeface="Arial" pitchFamily="34" charset="-120"/>
+              </a:rPr>
+              <a:t>All figures derive from just two drivers: 10% growth rate and 40% gross margin.</a:t>
+            </a:r>
+            <a:endParaRPr lang="en-US" sz="1000" dirty="0"/>
+          </a:p>
+        </p:txBody>
+      </p:sp>
+      <p:sp>
+        <p:nvSpPr>
+          <p:cNvPr id="5" name="Text 3"/>
+          <p:cNvSpPr/>
+          <p:nvPr/>
+        </p:nvSpPr>
+        <p:spPr>
+          <a:xfrm>
+            <a:off x="411480" y="4919472"/>
+            <a:ext cx="8321040" cy="219456"/>
+          </a:xfrm>
+          <a:prstGeom prst="rect">
+            <a:avLst/>
+          </a:prstGeom>
+          <a:noFill/>
+          <a:ln/>
+        </p:spPr>
+        <p:txBody>
+          <a:bodyPr wrap="square" rtlCol="0" anchor="ctr"/>
+          <a:lstStyle/>
+          <a:p>
+            <a:pPr indent="0" marL="0">
+              <a:buNone/>
+            </a:pPr>
+            <a:r>
+              <a:rPr lang="en-US" sz="750" dirty="0">
                 <a:solidFill>
                   <a:srgbClr val="AAAAAA"/>
                 </a:solidFill>
+                <a:latin typeface="Arial" pitchFamily="34" charset="0"/>
+                <a:ea typeface="Arial" pitchFamily="34" charset="-122"/>
+                <a:cs typeface="Arial" pitchFamily="34" charset="-120"/>
               </a:rPr>
               <a:t>Lesson Forge Pro (owner) — This content is educational material only and does not constitute financial, investment, or trading advice.</a:t>
             </a:r>
-            <a:endParaRPr lang="en-US" sz="800" dirty="0"/>
+            <a:endParaRPr lang="en-US" sz="750" dirty="0"/>
+          </a:p>
+        </p:txBody>
+      </p:sp>
+      <p:sp>
+        <p:nvSpPr>
+          <p:cNvPr id="6" name="Shape 4"/>
+          <p:cNvSpPr/>
+          <p:nvPr/>
+        </p:nvSpPr>
+        <p:spPr>
+          <a:xfrm>
+            <a:off x="685800" y="4206240"/>
+            <a:ext cx="7772400" cy="0"/>
+          </a:xfrm>
+          <a:prstGeom prst="line">
+            <a:avLst/>
+          </a:prstGeom>
+          <a:noFill/>
+          <a:ln w="12700">
+            <a:solidFill>
+              <a:srgbClr val="1C1917"/>
+            </a:solidFill>
+            <a:prstDash val="solid"/>
+          </a:ln>
+        </p:spPr>
+      </p:sp>
+      <p:sp>
+        <p:nvSpPr>
+          <p:cNvPr id="7" name="Shape 5"/>
+          <p:cNvSpPr/>
+          <p:nvPr/>
+        </p:nvSpPr>
+        <p:spPr>
+          <a:xfrm>
+            <a:off x="1184148" y="1280160"/>
+            <a:ext cx="777240" cy="2926080"/>
+          </a:xfrm>
+          <a:prstGeom prst="rect">
+            <a:avLst/>
+          </a:prstGeom>
+          <a:solidFill>
+            <a:srgbClr val="B45309"/>
+          </a:solidFill>
+          <a:ln/>
+        </p:spPr>
+      </p:sp>
+      <p:sp>
+        <p:nvSpPr>
+          <p:cNvPr id="8" name="Text 6"/>
+          <p:cNvSpPr/>
+          <p:nvPr/>
+        </p:nvSpPr>
+        <p:spPr>
+          <a:xfrm>
+            <a:off x="1001268" y="1005840"/>
+            <a:ext cx="1143000" cy="237744"/>
+          </a:xfrm>
+          <a:prstGeom prst="rect">
+            <a:avLst/>
+          </a:prstGeom>
+          <a:noFill/>
+          <a:ln/>
+        </p:spPr>
+        <p:txBody>
+          <a:bodyPr wrap="square" rtlCol="0" anchor="ctr"/>
+          <a:lstStyle/>
+          <a:p>
+            <a:pPr algn="ctr" indent="0" marL="0">
+              <a:buNone/>
+            </a:pPr>
+            <a:r>
+              <a:rPr lang="en-US" sz="950" b="1" dirty="0">
+                <a:solidFill>
+                  <a:srgbClr val="1C1917"/>
+                </a:solidFill>
+                <a:latin typeface="Arial" pitchFamily="34" charset="0"/>
+                <a:ea typeface="Arial" pitchFamily="34" charset="-122"/>
+                <a:cs typeface="Arial" pitchFamily="34" charset="-120"/>
+              </a:rPr>
+              <a:t>4400000</a:t>
+            </a:r>
+            <a:endParaRPr lang="en-US" sz="950" dirty="0"/>
+          </a:p>
+        </p:txBody>
+      </p:sp>
+      <p:sp>
+        <p:nvSpPr>
+          <p:cNvPr id="9" name="Text 7"/>
+          <p:cNvSpPr/>
+          <p:nvPr/>
+        </p:nvSpPr>
+        <p:spPr>
+          <a:xfrm>
+            <a:off x="955548" y="4315968"/>
+            <a:ext cx="1234440" cy="502920"/>
+          </a:xfrm>
+          <a:prstGeom prst="rect">
+            <a:avLst/>
+          </a:prstGeom>
+          <a:noFill/>
+          <a:ln/>
+        </p:spPr>
+        <p:txBody>
+          <a:bodyPr wrap="square" rtlCol="0" anchor="ctr"/>
+          <a:lstStyle/>
+          <a:p>
+            <a:pPr algn="ctr" indent="0" marL="0">
+              <a:buNone/>
+            </a:pPr>
+            <a:r>
+              <a:rPr lang="en-US" sz="850" dirty="0">
+                <a:solidFill>
+                  <a:srgbClr val="78716C"/>
+                </a:solidFill>
+                <a:latin typeface="Arial" pitchFamily="34" charset="0"/>
+                <a:ea typeface="Arial" pitchFamily="34" charset="-122"/>
+                <a:cs typeface="Arial" pitchFamily="34" charset="-120"/>
+              </a:rPr>
+              <a:t>Revenue</a:t>
+            </a:r>
+            <a:endParaRPr lang="en-US" sz="850" dirty="0"/>
+          </a:p>
+        </p:txBody>
+      </p:sp>
+      <p:sp>
+        <p:nvSpPr>
+          <p:cNvPr id="10" name="Shape 8"/>
+          <p:cNvSpPr/>
+          <p:nvPr/>
+        </p:nvSpPr>
+        <p:spPr>
+          <a:xfrm>
+            <a:off x="2683764" y="2450592"/>
+            <a:ext cx="777240" cy="1755648"/>
+          </a:xfrm>
+          <a:prstGeom prst="rect">
+            <a:avLst/>
+          </a:prstGeom>
+          <a:solidFill>
+            <a:srgbClr val="B45309"/>
+          </a:solidFill>
+          <a:ln/>
+        </p:spPr>
+      </p:sp>
+      <p:sp>
+        <p:nvSpPr>
+          <p:cNvPr id="11" name="Text 9"/>
+          <p:cNvSpPr/>
+          <p:nvPr/>
+        </p:nvSpPr>
+        <p:spPr>
+          <a:xfrm>
+            <a:off x="2500884" y="2176272"/>
+            <a:ext cx="1143000" cy="237744"/>
+          </a:xfrm>
+          <a:prstGeom prst="rect">
+            <a:avLst/>
+          </a:prstGeom>
+          <a:noFill/>
+          <a:ln/>
+        </p:spPr>
+        <p:txBody>
+          <a:bodyPr wrap="square" rtlCol="0" anchor="ctr"/>
+          <a:lstStyle/>
+          <a:p>
+            <a:pPr algn="ctr" indent="0" marL="0">
+              <a:buNone/>
+            </a:pPr>
+            <a:r>
+              <a:rPr lang="en-US" sz="950" b="1" dirty="0">
+                <a:solidFill>
+                  <a:srgbClr val="1C1917"/>
+                </a:solidFill>
+                <a:latin typeface="Arial" pitchFamily="34" charset="0"/>
+                <a:ea typeface="Arial" pitchFamily="34" charset="-122"/>
+                <a:cs typeface="Arial" pitchFamily="34" charset="-120"/>
+              </a:rPr>
+              <a:t>2640000</a:t>
+            </a:r>
+            <a:endParaRPr lang="en-US" sz="950" dirty="0"/>
+          </a:p>
+        </p:txBody>
+      </p:sp>
+      <p:sp>
+        <p:nvSpPr>
+          <p:cNvPr id="12" name="Text 10"/>
+          <p:cNvSpPr/>
+          <p:nvPr/>
+        </p:nvSpPr>
+        <p:spPr>
+          <a:xfrm>
+            <a:off x="2455164" y="4315968"/>
+            <a:ext cx="1234440" cy="502920"/>
+          </a:xfrm>
+          <a:prstGeom prst="rect">
+            <a:avLst/>
+          </a:prstGeom>
+          <a:noFill/>
+          <a:ln/>
+        </p:spPr>
+        <p:txBody>
+          <a:bodyPr wrap="square" rtlCol="0" anchor="ctr"/>
+          <a:lstStyle/>
+          <a:p>
+            <a:pPr algn="ctr" indent="0" marL="0">
+              <a:buNone/>
+            </a:pPr>
+            <a:r>
+              <a:rPr lang="en-US" sz="850" dirty="0">
+                <a:solidFill>
+                  <a:srgbClr val="78716C"/>
+                </a:solidFill>
+                <a:latin typeface="Arial" pitchFamily="34" charset="0"/>
+                <a:ea typeface="Arial" pitchFamily="34" charset="-122"/>
+                <a:cs typeface="Arial" pitchFamily="34" charset="-120"/>
+              </a:rPr>
+              <a:t>COGS</a:t>
+            </a:r>
+            <a:endParaRPr lang="en-US" sz="850" dirty="0"/>
+          </a:p>
+        </p:txBody>
+      </p:sp>
+      <p:sp>
+        <p:nvSpPr>
+          <p:cNvPr id="13" name="Shape 11"/>
+          <p:cNvSpPr/>
+          <p:nvPr/>
+        </p:nvSpPr>
+        <p:spPr>
+          <a:xfrm>
+            <a:off x="4183380" y="3035808"/>
+            <a:ext cx="777240" cy="1170432"/>
+          </a:xfrm>
+          <a:prstGeom prst="rect">
+            <a:avLst/>
+          </a:prstGeom>
+          <a:solidFill>
+            <a:srgbClr val="B45309"/>
+          </a:solidFill>
+          <a:ln/>
+        </p:spPr>
+      </p:sp>
+      <p:sp>
+        <p:nvSpPr>
+          <p:cNvPr id="14" name="Text 12"/>
+          <p:cNvSpPr/>
+          <p:nvPr/>
+        </p:nvSpPr>
+        <p:spPr>
+          <a:xfrm>
+            <a:off x="4000500" y="2761488"/>
+            <a:ext cx="1143000" cy="237744"/>
+          </a:xfrm>
+          <a:prstGeom prst="rect">
+            <a:avLst/>
+          </a:prstGeom>
+          <a:noFill/>
+          <a:ln/>
+        </p:spPr>
+        <p:txBody>
+          <a:bodyPr wrap="square" rtlCol="0" anchor="ctr"/>
+          <a:lstStyle/>
+          <a:p>
+            <a:pPr algn="ctr" indent="0" marL="0">
+              <a:buNone/>
+            </a:pPr>
+            <a:r>
+              <a:rPr lang="en-US" sz="950" b="1" dirty="0">
+                <a:solidFill>
+                  <a:srgbClr val="1C1917"/>
+                </a:solidFill>
+                <a:latin typeface="Arial" pitchFamily="34" charset="0"/>
+                <a:ea typeface="Arial" pitchFamily="34" charset="-122"/>
+                <a:cs typeface="Arial" pitchFamily="34" charset="-120"/>
+              </a:rPr>
+              <a:t>1760000</a:t>
+            </a:r>
+            <a:endParaRPr lang="en-US" sz="950" dirty="0"/>
+          </a:p>
+        </p:txBody>
+      </p:sp>
+      <p:sp>
+        <p:nvSpPr>
+          <p:cNvPr id="15" name="Text 13"/>
+          <p:cNvSpPr/>
+          <p:nvPr/>
+        </p:nvSpPr>
+        <p:spPr>
+          <a:xfrm>
+            <a:off x="3954780" y="4315968"/>
+            <a:ext cx="1234440" cy="502920"/>
+          </a:xfrm>
+          <a:prstGeom prst="rect">
+            <a:avLst/>
+          </a:prstGeom>
+          <a:noFill/>
+          <a:ln/>
+        </p:spPr>
+        <p:txBody>
+          <a:bodyPr wrap="square" rtlCol="0" anchor="ctr"/>
+          <a:lstStyle/>
+          <a:p>
+            <a:pPr algn="ctr" indent="0" marL="0">
+              <a:buNone/>
+            </a:pPr>
+            <a:r>
+              <a:rPr lang="en-US" sz="850" dirty="0">
+                <a:solidFill>
+                  <a:srgbClr val="78716C"/>
+                </a:solidFill>
+                <a:latin typeface="Arial" pitchFamily="34" charset="0"/>
+                <a:ea typeface="Arial" pitchFamily="34" charset="-122"/>
+                <a:cs typeface="Arial" pitchFamily="34" charset="-120"/>
+              </a:rPr>
+              <a:t>Gross Profit</a:t>
+            </a:r>
+            <a:endParaRPr lang="en-US" sz="850" dirty="0"/>
+          </a:p>
+        </p:txBody>
+      </p:sp>
+      <p:sp>
+        <p:nvSpPr>
+          <p:cNvPr id="16" name="Shape 14"/>
+          <p:cNvSpPr/>
+          <p:nvPr/>
+        </p:nvSpPr>
+        <p:spPr>
+          <a:xfrm>
+            <a:off x="5682996" y="3674225"/>
+            <a:ext cx="777240" cy="532015"/>
+          </a:xfrm>
+          <a:prstGeom prst="rect">
+            <a:avLst/>
+          </a:prstGeom>
+          <a:solidFill>
+            <a:srgbClr val="B45309"/>
+          </a:solidFill>
+          <a:ln/>
+        </p:spPr>
+      </p:sp>
+      <p:sp>
+        <p:nvSpPr>
+          <p:cNvPr id="17" name="Text 15"/>
+          <p:cNvSpPr/>
+          <p:nvPr/>
+        </p:nvSpPr>
+        <p:spPr>
+          <a:xfrm>
+            <a:off x="5500116" y="3399905"/>
+            <a:ext cx="1143000" cy="237744"/>
+          </a:xfrm>
+          <a:prstGeom prst="rect">
+            <a:avLst/>
+          </a:prstGeom>
+          <a:noFill/>
+          <a:ln/>
+        </p:spPr>
+        <p:txBody>
+          <a:bodyPr wrap="square" rtlCol="0" anchor="ctr"/>
+          <a:lstStyle/>
+          <a:p>
+            <a:pPr algn="ctr" indent="0" marL="0">
+              <a:buNone/>
+            </a:pPr>
+            <a:r>
+              <a:rPr lang="en-US" sz="950" b="1" dirty="0">
+                <a:solidFill>
+                  <a:srgbClr val="1C1917"/>
+                </a:solidFill>
+                <a:latin typeface="Arial" pitchFamily="34" charset="0"/>
+                <a:ea typeface="Arial" pitchFamily="34" charset="-122"/>
+                <a:cs typeface="Arial" pitchFamily="34" charset="-120"/>
+              </a:rPr>
+              <a:t>800000</a:t>
+            </a:r>
+            <a:endParaRPr lang="en-US" sz="950" dirty="0"/>
+          </a:p>
+        </p:txBody>
+      </p:sp>
+      <p:sp>
+        <p:nvSpPr>
+          <p:cNvPr id="18" name="Text 16"/>
+          <p:cNvSpPr/>
+          <p:nvPr/>
+        </p:nvSpPr>
+        <p:spPr>
+          <a:xfrm>
+            <a:off x="5454396" y="4315968"/>
+            <a:ext cx="1234440" cy="502920"/>
+          </a:xfrm>
+          <a:prstGeom prst="rect">
+            <a:avLst/>
+          </a:prstGeom>
+          <a:noFill/>
+          <a:ln/>
+        </p:spPr>
+        <p:txBody>
+          <a:bodyPr wrap="square" rtlCol="0" anchor="ctr"/>
+          <a:lstStyle/>
+          <a:p>
+            <a:pPr algn="ctr" indent="0" marL="0">
+              <a:buNone/>
+            </a:pPr>
+            <a:r>
+              <a:rPr lang="en-US" sz="850" dirty="0">
+                <a:solidFill>
+                  <a:srgbClr val="78716C"/>
+                </a:solidFill>
+                <a:latin typeface="Arial" pitchFamily="34" charset="0"/>
+                <a:ea typeface="Arial" pitchFamily="34" charset="-122"/>
+                <a:cs typeface="Arial" pitchFamily="34" charset="-120"/>
+              </a:rPr>
+              <a:t>Operating Expenses</a:t>
+            </a:r>
+            <a:endParaRPr lang="en-US" sz="850" dirty="0"/>
+          </a:p>
+        </p:txBody>
+      </p:sp>
+      <p:sp>
+        <p:nvSpPr>
+          <p:cNvPr id="19" name="Shape 17"/>
+          <p:cNvSpPr/>
+          <p:nvPr/>
+        </p:nvSpPr>
+        <p:spPr>
+          <a:xfrm>
+            <a:off x="7182612" y="3567823"/>
+            <a:ext cx="777240" cy="638417"/>
+          </a:xfrm>
+          <a:prstGeom prst="rect">
+            <a:avLst/>
+          </a:prstGeom>
+          <a:solidFill>
+            <a:srgbClr val="B45309"/>
+          </a:solidFill>
+          <a:ln/>
+        </p:spPr>
+      </p:sp>
+      <p:sp>
+        <p:nvSpPr>
+          <p:cNvPr id="20" name="Text 18"/>
+          <p:cNvSpPr/>
+          <p:nvPr/>
+        </p:nvSpPr>
+        <p:spPr>
+          <a:xfrm>
+            <a:off x="6999732" y="3293503"/>
+            <a:ext cx="1143000" cy="237744"/>
+          </a:xfrm>
+          <a:prstGeom prst="rect">
+            <a:avLst/>
+          </a:prstGeom>
+          <a:noFill/>
+          <a:ln/>
+        </p:spPr>
+        <p:txBody>
+          <a:bodyPr wrap="square" rtlCol="0" anchor="ctr"/>
+          <a:lstStyle/>
+          <a:p>
+            <a:pPr algn="ctr" indent="0" marL="0">
+              <a:buNone/>
+            </a:pPr>
+            <a:r>
+              <a:rPr lang="en-US" sz="950" b="1" dirty="0">
+                <a:solidFill>
+                  <a:srgbClr val="1C1917"/>
+                </a:solidFill>
+                <a:latin typeface="Arial" pitchFamily="34" charset="0"/>
+                <a:ea typeface="Arial" pitchFamily="34" charset="-122"/>
+                <a:cs typeface="Arial" pitchFamily="34" charset="-120"/>
+              </a:rPr>
+              <a:t>960000</a:t>
+            </a:r>
+            <a:endParaRPr lang="en-US" sz="950" dirty="0"/>
+          </a:p>
+        </p:txBody>
+      </p:sp>
+      <p:sp>
+        <p:nvSpPr>
+          <p:cNvPr id="21" name="Text 19"/>
+          <p:cNvSpPr/>
+          <p:nvPr/>
+        </p:nvSpPr>
+        <p:spPr>
+          <a:xfrm>
+            <a:off x="6954012" y="4315968"/>
+            <a:ext cx="1234440" cy="502920"/>
+          </a:xfrm>
+          <a:prstGeom prst="rect">
+            <a:avLst/>
+          </a:prstGeom>
+          <a:noFill/>
+          <a:ln/>
+        </p:spPr>
+        <p:txBody>
+          <a:bodyPr wrap="square" rtlCol="0" anchor="ctr"/>
+          <a:lstStyle/>
+          <a:p>
+            <a:pPr algn="ctr" indent="0" marL="0">
+              <a:buNone/>
+            </a:pPr>
+            <a:r>
+              <a:rPr lang="en-US" sz="850" dirty="0">
+                <a:solidFill>
+                  <a:srgbClr val="78716C"/>
+                </a:solidFill>
+                <a:latin typeface="Arial" pitchFamily="34" charset="0"/>
+                <a:ea typeface="Arial" pitchFamily="34" charset="-122"/>
+                <a:cs typeface="Arial" pitchFamily="34" charset="-120"/>
+              </a:rPr>
+              <a:t>EBIT</a:t>
+            </a:r>
+            <a:endParaRPr lang="en-US" sz="850" dirty="0"/>
           </a:p>
         </p:txBody>
       </p:sp>
@@ -2234,6 +3769,13 @@
 <file path=ppt/slides/slide12.xml><?xml version="1.0" encoding="utf-8"?>
 <p:sld xmlns:a="http://schemas.openxmlformats.org/drawingml/2006/main" xmlns:r="http://schemas.openxmlformats.org/officeDocument/2006/relationships" xmlns:p="http://schemas.openxmlformats.org/presentationml/2006/main">
   <p:cSld name="Slide 12">
+    <p:bg>
+      <p:bgPr>
+        <a:solidFill>
+          <a:srgbClr val="FFFFFF"/>
+        </a:solidFill>
+      </p:bgPr>
+    </p:bg>
     <p:spTree>
       <p:nvGrpSpPr>
         <p:cNvPr id="1" name=""/>
@@ -2250,14 +3792,34 @@
       </p:grpSpPr>
       <p:sp>
         <p:nvSpPr>
-          <p:cNvPr id="2" name="Text 0"/>
-          <p:cNvSpPr/>
-          <p:nvPr/>
-        </p:nvSpPr>
-        <p:spPr>
-          <a:xfrm>
-            <a:off x="457200" y="320040"/>
-            <a:ext cx="8229600" cy="731520"/>
+          <p:cNvPr id="2" name="Shape 0"/>
+          <p:cNvSpPr/>
+          <p:nvPr/>
+        </p:nvSpPr>
+        <p:spPr>
+          <a:xfrm>
+            <a:off x="411480" y="402336"/>
+            <a:ext cx="82296" cy="329184"/>
+          </a:xfrm>
+          <a:prstGeom prst="rect">
+            <a:avLst/>
+          </a:prstGeom>
+          <a:solidFill>
+            <a:srgbClr val="B45309"/>
+          </a:solidFill>
+          <a:ln/>
+        </p:spPr>
+      </p:sp>
+      <p:sp>
+        <p:nvSpPr>
+          <p:cNvPr id="3" name="Text 1"/>
+          <p:cNvSpPr/>
+          <p:nvPr/>
+        </p:nvSpPr>
+        <p:spPr>
+          <a:xfrm>
+            <a:off x="566928" y="292608"/>
+            <a:ext cx="8138160" cy="548640"/>
           </a:xfrm>
           <a:prstGeom prst="rect">
             <a:avLst/>
@@ -2273,27 +3835,92 @@
               <a:buNone/>
             </a:pPr>
             <a:r>
-              <a:rPr lang="en-US" sz="2400" b="1" dirty="0">
-                <a:solidFill>
-                  <a:srgbClr val="B45309"/>
-                </a:solidFill>
-              </a:rPr>
-              <a:t>Anticipated Learner Questions and Answers</a:t>
-            </a:r>
-            <a:endParaRPr lang="en-US" sz="2400" dirty="0"/>
-          </a:p>
-        </p:txBody>
-      </p:sp>
-      <p:sp>
-        <p:nvSpPr>
-          <p:cNvPr id="3" name="Text 1"/>
-          <p:cNvSpPr/>
-          <p:nvPr/>
-        </p:nvSpPr>
-        <p:spPr>
-          <a:xfrm>
-            <a:off x="640080" y="1188720"/>
-            <a:ext cx="7863840" cy="3291840"/>
+              <a:rPr lang="en-US" sz="2100" b="1" dirty="0">
+                <a:solidFill>
+                  <a:srgbClr val="1C1917"/>
+                </a:solidFill>
+                <a:latin typeface="Arial" pitchFamily="34" charset="0"/>
+                <a:ea typeface="Arial" pitchFamily="34" charset="-122"/>
+                <a:cs typeface="Arial" pitchFamily="34" charset="-120"/>
+              </a:rPr>
+              <a:t>Worked Example: Ridgeline Manufacturing Year 1</a:t>
+            </a:r>
+            <a:endParaRPr lang="en-US" sz="2100" dirty="0"/>
+          </a:p>
+        </p:txBody>
+      </p:sp>
+      <p:sp>
+        <p:nvSpPr>
+          <p:cNvPr id="4" name="Shape 2"/>
+          <p:cNvSpPr/>
+          <p:nvPr/>
+        </p:nvSpPr>
+        <p:spPr>
+          <a:xfrm>
+            <a:off x="411480" y="960120"/>
+            <a:ext cx="8321040" cy="0"/>
+          </a:xfrm>
+          <a:prstGeom prst="line">
+            <a:avLst/>
+          </a:prstGeom>
+          <a:noFill/>
+          <a:ln w="12700">
+            <a:solidFill>
+              <a:srgbClr val="E7E5E4"/>
+            </a:solidFill>
+            <a:prstDash val="solid"/>
+          </a:ln>
+        </p:spPr>
+      </p:sp>
+      <p:sp>
+        <p:nvSpPr>
+          <p:cNvPr id="5" name="Text 3"/>
+          <p:cNvSpPr/>
+          <p:nvPr/>
+        </p:nvSpPr>
+        <p:spPr>
+          <a:xfrm>
+            <a:off x="411480" y="4864608"/>
+            <a:ext cx="8321040" cy="237744"/>
+          </a:xfrm>
+          <a:prstGeom prst="rect">
+            <a:avLst/>
+          </a:prstGeom>
+          <a:noFill/>
+          <a:ln/>
+        </p:spPr>
+        <p:txBody>
+          <a:bodyPr wrap="square" rtlCol="0" anchor="ctr"/>
+          <a:lstStyle/>
+          <a:p>
+            <a:pPr indent="0" marL="0">
+              <a:buNone/>
+            </a:pPr>
+            <a:r>
+              <a:rPr lang="en-US" sz="750" dirty="0">
+                <a:solidFill>
+                  <a:srgbClr val="AAAAAA"/>
+                </a:solidFill>
+                <a:latin typeface="Arial" pitchFamily="34" charset="0"/>
+                <a:ea typeface="Arial" pitchFamily="34" charset="-122"/>
+                <a:cs typeface="Arial" pitchFamily="34" charset="-120"/>
+              </a:rPr>
+              <a:t>Lesson Forge Pro (owner) — This content is educational material only and does not constitute financial, investment, or trading advice.</a:t>
+            </a:r>
+            <a:endParaRPr lang="en-US" sz="750" dirty="0"/>
+          </a:p>
+        </p:txBody>
+      </p:sp>
+      <p:sp>
+        <p:nvSpPr>
+          <p:cNvPr id="6" name="Text 4"/>
+          <p:cNvSpPr/>
+          <p:nvPr/>
+        </p:nvSpPr>
+        <p:spPr>
+          <a:xfrm>
+            <a:off x="731520" y="1188720"/>
+            <a:ext cx="7680960" cy="2743200"/>
           </a:xfrm>
           <a:prstGeom prst="rect">
             <a:avLst/>
@@ -2305,107 +3932,151 @@
           <a:bodyPr wrap="square" rtlCol="0" anchor="t"/>
           <a:lstStyle/>
           <a:p>
-            <a:pPr marL="342900" indent="-342900">
+            <a:pPr marL="152400" indent="-152400">
+              <a:spcAft>
+                <a:spcPts val="800"/>
+              </a:spcAft>
               <a:buSzPct val="100000"/>
               <a:buChar char="•"/>
             </a:pPr>
             <a:r>
-              <a:rPr lang="en-US" sz="1600" dirty="0">
-                <a:solidFill>
-                  <a:srgbClr val="333333"/>
-                </a:solidFill>
-              </a:rPr>
-              <a:t>Q: What is the difference between financial modeling and financial statement analysis?</a:t>
-            </a:r>
-            <a:endParaRPr lang="en-US" sz="1600" dirty="0"/>
-          </a:p>
-          <a:p>
-            <a:pPr marL="342900" indent="-342900">
+              <a:rPr lang="en-US" sz="1500" dirty="0">
+                <a:solidFill>
+                  <a:srgbClr val="1C1917"/>
+                </a:solidFill>
+                <a:latin typeface="Arial" pitchFamily="34" charset="0"/>
+                <a:ea typeface="Arial" pitchFamily="34" charset="-122"/>
+                <a:cs typeface="Arial" pitchFamily="34" charset="-120"/>
+              </a:rPr>
+              <a:t>Revenue: $10M × 1.08 = $10.8M; gross profit at 40% = $4.32M.</a:t>
+            </a:r>
+            <a:endParaRPr lang="en-US" sz="1500" dirty="0"/>
+          </a:p>
+          <a:p>
+            <a:pPr marL="152400" indent="-152400">
+              <a:spcAft>
+                <a:spcPts val="800"/>
+              </a:spcAft>
               <a:buSzPct val="100000"/>
               <a:buChar char="•"/>
             </a:pPr>
             <a:r>
-              <a:rPr lang="en-US" sz="1600" dirty="0">
-                <a:solidFill>
-                  <a:srgbClr val="333333"/>
-                </a:solidFill>
-              </a:rPr>
-              <a:t>A: Financial modeling is the process of creating a forecast or projection of a company's financial performance, while financial statement analysis is the proces</a:t>
-            </a:r>
-            <a:endParaRPr lang="en-US" sz="1600" dirty="0"/>
-          </a:p>
-          <a:p>
-            <a:pPr marL="342900" indent="-342900">
+              <a:rPr lang="en-US" sz="1500" dirty="0">
+                <a:solidFill>
+                  <a:srgbClr val="1C1917"/>
+                </a:solidFill>
+                <a:latin typeface="Arial" pitchFamily="34" charset="0"/>
+                <a:ea typeface="Arial" pitchFamily="34" charset="-122"/>
+                <a:cs typeface="Arial" pitchFamily="34" charset="-120"/>
+              </a:rPr>
+              <a:t>EBIT: $4.32M − $2.2M opex = $2.12M; net income after interest and tax = $1.455M.</a:t>
+            </a:r>
+            <a:endParaRPr lang="en-US" sz="1500" dirty="0"/>
+          </a:p>
+          <a:p>
+            <a:pPr marL="152400" indent="-152400">
+              <a:spcAft>
+                <a:spcPts val="800"/>
+              </a:spcAft>
               <a:buSzPct val="100000"/>
               <a:buChar char="•"/>
             </a:pPr>
             <a:r>
-              <a:rPr lang="en-US" sz="1600" dirty="0">
-                <a:solidFill>
-                  <a:srgbClr val="333333"/>
-                </a:solidFill>
-              </a:rPr>
-              <a:t>Q: How do I choose the right financial ratios and metrics for my analysis?</a:t>
-            </a:r>
-            <a:endParaRPr lang="en-US" sz="1600" dirty="0"/>
-          </a:p>
-          <a:p>
-            <a:pPr marL="342900" indent="-342900">
+              <a:rPr lang="en-US" sz="1500" dirty="0">
+                <a:solidFill>
+                  <a:srgbClr val="1C1917"/>
+                </a:solidFill>
+                <a:latin typeface="Arial" pitchFamily="34" charset="0"/>
+                <a:ea typeface="Arial" pitchFamily="34" charset="-122"/>
+                <a:cs typeface="Arial" pitchFamily="34" charset="-120"/>
+              </a:rPr>
+              <a:t>AR: ($10.8M ÷ 365) × 45 days DSO = $1,331,507.</a:t>
+            </a:r>
+            <a:endParaRPr lang="en-US" sz="1500" dirty="0"/>
+          </a:p>
+          <a:p>
+            <a:pPr marL="152400" indent="-152400">
+              <a:spcAft>
+                <a:spcPts val="800"/>
+              </a:spcAft>
               <a:buSzPct val="100000"/>
               <a:buChar char="•"/>
             </a:pPr>
             <a:r>
-              <a:rPr lang="en-US" sz="1600" dirty="0">
-                <a:solidFill>
-                  <a:srgbClr val="333333"/>
-                </a:solidFill>
-              </a:rPr>
-              <a:t>A: The choice of ratios and metrics depends on the company's industry, size, and specific circumstances. It's essential to select ratios that are relevant and m</a:t>
-            </a:r>
-            <a:endParaRPr lang="en-US" sz="1600" dirty="0"/>
-          </a:p>
-          <a:p>
-            <a:pPr marL="342900" indent="-342900">
+              <a:rPr lang="en-US" sz="1500" dirty="0">
+                <a:solidFill>
+                  <a:srgbClr val="1C1917"/>
+                </a:solidFill>
+                <a:latin typeface="Arial" pitchFamily="34" charset="0"/>
+                <a:ea typeface="Arial" pitchFamily="34" charset="-122"/>
+                <a:cs typeface="Arial" pitchFamily="34" charset="-120"/>
+              </a:rPr>
+              <a:t>Ending PP&amp;E: $2M + $500K CapEx − $300K depreciation = $2.2M.</a:t>
+            </a:r>
+            <a:endParaRPr lang="en-US" sz="1500" dirty="0"/>
+          </a:p>
+          <a:p>
+            <a:pPr marL="152400" indent="-152400">
+              <a:spcAft>
+                <a:spcPts val="800"/>
+              </a:spcAft>
               <a:buSzPct val="100000"/>
               <a:buChar char="•"/>
             </a:pPr>
             <a:r>
-              <a:rPr lang="en-US" sz="1600" dirty="0">
-                <a:solidFill>
-                  <a:srgbClr val="333333"/>
-                </a:solidFill>
-              </a:rPr>
-              <a:t>Q: What are some common pitfalls to avoid in financial statement forecasting and analysis?</a:t>
-            </a:r>
-            <a:endParaRPr lang="en-US" sz="1600" dirty="0"/>
-          </a:p>
-          <a:p>
-            <a:pPr marL="342900" indent="-342900">
-              <a:buSzPct val="100000"/>
-              <a:buChar char="•"/>
-            </a:pPr>
-            <a:r>
-              <a:rPr lang="en-US" sz="1600" dirty="0">
-                <a:solidFill>
-                  <a:srgbClr val="333333"/>
-                </a:solidFill>
-              </a:rPr>
-              <a:t>A: Some common pitfalls include relying too heavily on historical data, failing to consider external factors, and ignoring the limitations of financial models. </a:t>
-            </a:r>
-            <a:endParaRPr lang="en-US" sz="1600" dirty="0"/>
-          </a:p>
-        </p:txBody>
-      </p:sp>
-      <p:sp>
-        <p:nvSpPr>
-          <p:cNvPr id="4" name="Text 2"/>
-          <p:cNvSpPr/>
-          <p:nvPr/>
-        </p:nvSpPr>
-        <p:spPr>
-          <a:xfrm>
-            <a:off x="457200" y="4709160"/>
-            <a:ext cx="8229600" cy="320040"/>
+              <a:rPr lang="en-US" sz="1500" dirty="0">
+                <a:solidFill>
+                  <a:srgbClr val="1C1917"/>
+                </a:solidFill>
+                <a:latin typeface="Arial" pitchFamily="34" charset="0"/>
+                <a:ea typeface="Arial" pitchFamily="34" charset="-122"/>
+                <a:cs typeface="Arial" pitchFamily="34" charset="-120"/>
+              </a:rPr>
+              <a:t>Operating CF: net income $1.455M + depreciation $300K = $1.755M.</a:t>
+            </a:r>
+            <a:endParaRPr lang="en-US" sz="1500" dirty="0"/>
+          </a:p>
+        </p:txBody>
+      </p:sp>
+      <p:sp>
+        <p:nvSpPr>
+          <p:cNvPr id="7" name="Shape 5"/>
+          <p:cNvSpPr/>
+          <p:nvPr/>
+        </p:nvSpPr>
+        <p:spPr>
+          <a:xfrm>
+            <a:off x="731520" y="4041648"/>
+            <a:ext cx="7680960" cy="566928"/>
+          </a:xfrm>
+          <a:prstGeom prst="roundRect">
+            <a:avLst>
+              <a:gd name="adj" fmla="val 12903"/>
+            </a:avLst>
+          </a:prstGeom>
+          <a:solidFill>
+            <a:srgbClr val="B45309">
+              <a:alpha val="12000"/>
+            </a:srgbClr>
+          </a:solidFill>
+          <a:ln w="12700">
+            <a:solidFill>
+              <a:srgbClr val="B45309"/>
+            </a:solidFill>
+            <a:prstDash val="solid"/>
+          </a:ln>
+        </p:spPr>
+      </p:sp>
+      <p:sp>
+        <p:nvSpPr>
+          <p:cNvPr id="8" name="Text 6"/>
+          <p:cNvSpPr/>
+          <p:nvPr/>
+        </p:nvSpPr>
+        <p:spPr>
+          <a:xfrm>
+            <a:off x="868680" y="4087368"/>
+            <a:ext cx="7406640" cy="475488"/>
           </a:xfrm>
           <a:prstGeom prst="rect">
             <a:avLst/>
@@ -2421,14 +4092,31 @@
               <a:buNone/>
             </a:pPr>
             <a:r>
-              <a:rPr lang="en-US" sz="800" dirty="0">
-                <a:solidFill>
-                  <a:srgbClr val="AAAAAA"/>
-                </a:solidFill>
-              </a:rPr>
-              <a:t>Lesson Forge Pro (owner) — This content is educational material only and does not constitute financial, investment, or trading advice.</a:t>
-            </a:r>
-            <a:endParaRPr lang="en-US" sz="800" dirty="0"/>
+              <a:rPr lang="en-US" sz="1100" b="1" dirty="0">
+                <a:solidFill>
+                  <a:srgbClr val="B45309"/>
+                </a:solidFill>
+                <a:latin typeface="Arial" pitchFamily="34" charset="0"/>
+                <a:ea typeface="Arial" pitchFamily="34" charset="-122"/>
+                <a:cs typeface="Arial" pitchFamily="34" charset="-120"/>
+              </a:rPr>
+              <a:t>Takeaway  </a:t>
+            </a:r>
+            <a:pPr indent="0" marL="0">
+              <a:buNone/>
+            </a:pPr>
+            <a:r>
+              <a:rPr lang="en-US" sz="1150" dirty="0">
+                <a:solidFill>
+                  <a:srgbClr val="1C1917"/>
+                </a:solidFill>
+                <a:latin typeface="Arial" pitchFamily="34" charset="0"/>
+                <a:ea typeface="Arial" pitchFamily="34" charset="-122"/>
+                <a:cs typeface="Arial" pitchFamily="34" charset="-120"/>
+              </a:rPr>
+              <a:t>Every balance sheet and cash flow figure in this example links directly to an income statement or operational driver.</a:t>
+            </a:r>
+            <a:endParaRPr lang="en-US" sz="1100" dirty="0"/>
           </a:p>
         </p:txBody>
       </p:sp>
@@ -2440,9 +4128,16 @@
 </p:sld>
 </file>
 
-<file path=ppt/slides/slide2.xml><?xml version="1.0" encoding="utf-8"?>
+<file path=ppt/slides/slide13.xml><?xml version="1.0" encoding="utf-8"?>
 <p:sld xmlns:a="http://schemas.openxmlformats.org/drawingml/2006/main" xmlns:r="http://schemas.openxmlformats.org/officeDocument/2006/relationships" xmlns:p="http://schemas.openxmlformats.org/presentationml/2006/main">
-  <p:cSld name="Slide 2">
+  <p:cSld name="Slide 13">
+    <p:bg>
+      <p:bgPr>
+        <a:solidFill>
+          <a:srgbClr val="FFFFFF"/>
+        </a:solidFill>
+      </p:bgPr>
+    </p:bg>
     <p:spTree>
       <p:nvGrpSpPr>
         <p:cNvPr id="1" name=""/>
@@ -2459,14 +4154,34 @@
       </p:grpSpPr>
       <p:sp>
         <p:nvSpPr>
-          <p:cNvPr id="2" name="Text 0"/>
-          <p:cNvSpPr/>
-          <p:nvPr/>
-        </p:nvSpPr>
-        <p:spPr>
-          <a:xfrm>
-            <a:off x="457200" y="320040"/>
-            <a:ext cx="8229600" cy="731520"/>
+          <p:cNvPr id="2" name="Shape 0"/>
+          <p:cNvSpPr/>
+          <p:nvPr/>
+        </p:nvSpPr>
+        <p:spPr>
+          <a:xfrm>
+            <a:off x="411480" y="402336"/>
+            <a:ext cx="82296" cy="329184"/>
+          </a:xfrm>
+          <a:prstGeom prst="rect">
+            <a:avLst/>
+          </a:prstGeom>
+          <a:solidFill>
+            <a:srgbClr val="B45309"/>
+          </a:solidFill>
+          <a:ln/>
+        </p:spPr>
+      </p:sp>
+      <p:sp>
+        <p:nvSpPr>
+          <p:cNvPr id="3" name="Text 1"/>
+          <p:cNvSpPr/>
+          <p:nvPr/>
+        </p:nvSpPr>
+        <p:spPr>
+          <a:xfrm>
+            <a:off x="566928" y="292608"/>
+            <a:ext cx="8138160" cy="548640"/>
           </a:xfrm>
           <a:prstGeom prst="rect">
             <a:avLst/>
@@ -2482,27 +4197,53 @@
               <a:buNone/>
             </a:pPr>
             <a:r>
-              <a:rPr lang="en-US" sz="2400" b="1" dirty="0">
-                <a:solidFill>
-                  <a:srgbClr val="B45309"/>
-                </a:solidFill>
-              </a:rPr>
-              <a:t>Financial Statement Forecasting and Analysis</a:t>
-            </a:r>
-            <a:endParaRPr lang="en-US" sz="2400" dirty="0"/>
-          </a:p>
-        </p:txBody>
-      </p:sp>
-      <p:sp>
-        <p:nvSpPr>
-          <p:cNvPr id="3" name="Text 1"/>
-          <p:cNvSpPr/>
-          <p:nvPr/>
-        </p:nvSpPr>
-        <p:spPr>
-          <a:xfrm>
-            <a:off x="457200" y="4709160"/>
-            <a:ext cx="8229600" cy="320040"/>
+              <a:rPr lang="en-US" sz="2100" b="1" dirty="0">
+                <a:solidFill>
+                  <a:srgbClr val="1C1917"/>
+                </a:solidFill>
+                <a:latin typeface="Arial" pitchFamily="34" charset="0"/>
+                <a:ea typeface="Arial" pitchFamily="34" charset="-122"/>
+                <a:cs typeface="Arial" pitchFamily="34" charset="-120"/>
+              </a:rPr>
+              <a:t>Outputs and Integrity Checks</a:t>
+            </a:r>
+            <a:endParaRPr lang="en-US" sz="2100" dirty="0"/>
+          </a:p>
+        </p:txBody>
+      </p:sp>
+      <p:sp>
+        <p:nvSpPr>
+          <p:cNvPr id="4" name="Shape 2"/>
+          <p:cNvSpPr/>
+          <p:nvPr/>
+        </p:nvSpPr>
+        <p:spPr>
+          <a:xfrm>
+            <a:off x="411480" y="960120"/>
+            <a:ext cx="8321040" cy="0"/>
+          </a:xfrm>
+          <a:prstGeom prst="line">
+            <a:avLst/>
+          </a:prstGeom>
+          <a:noFill/>
+          <a:ln w="12700">
+            <a:solidFill>
+              <a:srgbClr val="E7E5E4"/>
+            </a:solidFill>
+            <a:prstDash val="solid"/>
+          </a:ln>
+        </p:spPr>
+      </p:sp>
+      <p:sp>
+        <p:nvSpPr>
+          <p:cNvPr id="5" name="Text 3"/>
+          <p:cNvSpPr/>
+          <p:nvPr/>
+        </p:nvSpPr>
+        <p:spPr>
+          <a:xfrm>
+            <a:off x="411480" y="4864608"/>
+            <a:ext cx="8321040" cy="237744"/>
           </a:xfrm>
           <a:prstGeom prst="rect">
             <a:avLst/>
@@ -2518,14 +4259,226 @@
               <a:buNone/>
             </a:pPr>
             <a:r>
-              <a:rPr lang="en-US" sz="800" dirty="0">
+              <a:rPr lang="en-US" sz="750" dirty="0">
                 <a:solidFill>
                   <a:srgbClr val="AAAAAA"/>
                 </a:solidFill>
+                <a:latin typeface="Arial" pitchFamily="34" charset="0"/>
+                <a:ea typeface="Arial" pitchFamily="34" charset="-122"/>
+                <a:cs typeface="Arial" pitchFamily="34" charset="-120"/>
               </a:rPr>
               <a:t>Lesson Forge Pro (owner) — This content is educational material only and does not constitute financial, investment, or trading advice.</a:t>
             </a:r>
-            <a:endParaRPr lang="en-US" sz="800" dirty="0"/>
+            <a:endParaRPr lang="en-US" sz="750" dirty="0"/>
+          </a:p>
+        </p:txBody>
+      </p:sp>
+      <p:sp>
+        <p:nvSpPr>
+          <p:cNvPr id="6" name="Text 4"/>
+          <p:cNvSpPr/>
+          <p:nvPr/>
+        </p:nvSpPr>
+        <p:spPr>
+          <a:xfrm>
+            <a:off x="731520" y="1188720"/>
+            <a:ext cx="7680960" cy="2743200"/>
+          </a:xfrm>
+          <a:prstGeom prst="rect">
+            <a:avLst/>
+          </a:prstGeom>
+          <a:noFill/>
+          <a:ln/>
+        </p:spPr>
+        <p:txBody>
+          <a:bodyPr wrap="square" rtlCol="0" anchor="t"/>
+          <a:lstStyle/>
+          <a:p>
+            <a:pPr marL="152400" indent="-152400">
+              <a:spcAft>
+                <a:spcPts val="800"/>
+              </a:spcAft>
+              <a:buSzPct val="100000"/>
+              <a:buChar char="•"/>
+            </a:pPr>
+            <a:r>
+              <a:rPr lang="en-US" sz="1500" dirty="0">
+                <a:solidFill>
+                  <a:srgbClr val="1C1917"/>
+                </a:solidFill>
+                <a:latin typeface="Arial" pitchFamily="34" charset="0"/>
+                <a:ea typeface="Arial" pitchFamily="34" charset="-122"/>
+                <a:cs typeface="Arial" pitchFamily="34" charset="-120"/>
+              </a:rPr>
+              <a:t>Deliverables: projected income statement, balance sheet, and cash flow statement.</a:t>
+            </a:r>
+            <a:endParaRPr lang="en-US" sz="1500" dirty="0"/>
+          </a:p>
+          <a:p>
+            <a:pPr marL="152400" indent="-152400">
+              <a:spcAft>
+                <a:spcPts val="800"/>
+              </a:spcAft>
+              <a:buSzPct val="100000"/>
+              <a:buChar char="•"/>
+            </a:pPr>
+            <a:r>
+              <a:rPr lang="en-US" sz="1500" dirty="0">
+                <a:solidFill>
+                  <a:srgbClr val="1C1917"/>
+                </a:solidFill>
+                <a:latin typeface="Arial" pitchFamily="34" charset="0"/>
+                <a:ea typeface="Arial" pitchFamily="34" charset="-122"/>
+                <a:cs typeface="Arial" pitchFamily="34" charset="-120"/>
+              </a:rPr>
+              <a:t>Balance sheet must balance: total assets = total liabilities + equity, always.</a:t>
+            </a:r>
+            <a:endParaRPr lang="en-US" sz="1500" dirty="0"/>
+          </a:p>
+          <a:p>
+            <a:pPr marL="152400" indent="-152400">
+              <a:spcAft>
+                <a:spcPts val="800"/>
+              </a:spcAft>
+              <a:buSzPct val="100000"/>
+              <a:buChar char="•"/>
+            </a:pPr>
+            <a:r>
+              <a:rPr lang="en-US" sz="1500" dirty="0">
+                <a:solidFill>
+                  <a:srgbClr val="1C1917"/>
+                </a:solidFill>
+                <a:latin typeface="Arial" pitchFamily="34" charset="0"/>
+                <a:ea typeface="Arial" pitchFamily="34" charset="-122"/>
+                <a:cs typeface="Arial" pitchFamily="34" charset="-120"/>
+              </a:rPr>
+              <a:t>Ending cash on cash flow statement must match cash on the balance sheet.</a:t>
+            </a:r>
+            <a:endParaRPr lang="en-US" sz="1500" dirty="0"/>
+          </a:p>
+          <a:p>
+            <a:pPr marL="152400" indent="-152400">
+              <a:spcAft>
+                <a:spcPts val="800"/>
+              </a:spcAft>
+              <a:buSzPct val="100000"/>
+              <a:buChar char="•"/>
+            </a:pPr>
+            <a:r>
+              <a:rPr lang="en-US" sz="1500" dirty="0">
+                <a:solidFill>
+                  <a:srgbClr val="1C1917"/>
+                </a:solidFill>
+                <a:latin typeface="Arial" pitchFamily="34" charset="0"/>
+                <a:ea typeface="Arial" pitchFamily="34" charset="-122"/>
+                <a:cs typeface="Arial" pitchFamily="34" charset="-120"/>
+              </a:rPr>
+              <a:t>Ratios—gross margin, EBITDA margin, leverage—must move consistently with assumptions.</a:t>
+            </a:r>
+            <a:endParaRPr lang="en-US" sz="1500" dirty="0"/>
+          </a:p>
+          <a:p>
+            <a:pPr marL="152400" indent="-152400">
+              <a:spcAft>
+                <a:spcPts val="800"/>
+              </a:spcAft>
+              <a:buSzPct val="100000"/>
+              <a:buChar char="•"/>
+            </a:pPr>
+            <a:r>
+              <a:rPr lang="en-US" sz="1500" dirty="0">
+                <a:solidFill>
+                  <a:srgbClr val="1C1917"/>
+                </a:solidFill>
+                <a:latin typeface="Arial" pitchFamily="34" charset="0"/>
+                <a:ea typeface="Arial" pitchFamily="34" charset="-122"/>
+                <a:cs typeface="Arial" pitchFamily="34" charset="-120"/>
+              </a:rPr>
+              <a:t>Always trace net income explicitly into retained earnings before declaring model complete.</a:t>
+            </a:r>
+            <a:endParaRPr lang="en-US" sz="1500" dirty="0"/>
+          </a:p>
+        </p:txBody>
+      </p:sp>
+      <p:sp>
+        <p:nvSpPr>
+          <p:cNvPr id="7" name="Shape 5"/>
+          <p:cNvSpPr/>
+          <p:nvPr/>
+        </p:nvSpPr>
+        <p:spPr>
+          <a:xfrm>
+            <a:off x="731520" y="4041648"/>
+            <a:ext cx="7680960" cy="566928"/>
+          </a:xfrm>
+          <a:prstGeom prst="roundRect">
+            <a:avLst>
+              <a:gd name="adj" fmla="val 12903"/>
+            </a:avLst>
+          </a:prstGeom>
+          <a:solidFill>
+            <a:srgbClr val="B45309">
+              <a:alpha val="12000"/>
+            </a:srgbClr>
+          </a:solidFill>
+          <a:ln w="12700">
+            <a:solidFill>
+              <a:srgbClr val="B45309"/>
+            </a:solidFill>
+            <a:prstDash val="solid"/>
+          </a:ln>
+        </p:spPr>
+      </p:sp>
+      <p:sp>
+        <p:nvSpPr>
+          <p:cNvPr id="8" name="Text 6"/>
+          <p:cNvSpPr/>
+          <p:nvPr/>
+        </p:nvSpPr>
+        <p:spPr>
+          <a:xfrm>
+            <a:off x="868680" y="4087368"/>
+            <a:ext cx="7406640" cy="475488"/>
+          </a:xfrm>
+          <a:prstGeom prst="rect">
+            <a:avLst/>
+          </a:prstGeom>
+          <a:noFill/>
+          <a:ln/>
+        </p:spPr>
+        <p:txBody>
+          <a:bodyPr wrap="square" rtlCol="0" anchor="ctr"/>
+          <a:lstStyle/>
+          <a:p>
+            <a:pPr indent="0" marL="0">
+              <a:buNone/>
+            </a:pPr>
+            <a:r>
+              <a:rPr lang="en-US" sz="1100" b="1" dirty="0">
+                <a:solidFill>
+                  <a:srgbClr val="B45309"/>
+                </a:solidFill>
+                <a:latin typeface="Arial" pitchFamily="34" charset="0"/>
+                <a:ea typeface="Arial" pitchFamily="34" charset="-122"/>
+                <a:cs typeface="Arial" pitchFamily="34" charset="-120"/>
+              </a:rPr>
+              <a:t>Takeaway  </a:t>
+            </a:r>
+            <a:pPr indent="0" marL="0">
+              <a:buNone/>
+            </a:pPr>
+            <a:r>
+              <a:rPr lang="en-US" sz="1150" dirty="0">
+                <a:solidFill>
+                  <a:srgbClr val="1C1917"/>
+                </a:solidFill>
+                <a:latin typeface="Arial" pitchFamily="34" charset="0"/>
+                <a:ea typeface="Arial" pitchFamily="34" charset="-122"/>
+                <a:cs typeface="Arial" pitchFamily="34" charset="-120"/>
+              </a:rPr>
+              <a:t>A model is only complete when it balances, reconciles, and passes ratio sanity checks in every period.</a:t>
+            </a:r>
+            <a:endParaRPr lang="en-US" sz="1100" dirty="0"/>
           </a:p>
         </p:txBody>
       </p:sp>
@@ -2537,9 +4490,16 @@
 </p:sld>
 </file>
 
-<file path=ppt/slides/slide3.xml><?xml version="1.0" encoding="utf-8"?>
+<file path=ppt/slides/slide14.xml><?xml version="1.0" encoding="utf-8"?>
 <p:sld xmlns:a="http://schemas.openxmlformats.org/drawingml/2006/main" xmlns:r="http://schemas.openxmlformats.org/officeDocument/2006/relationships" xmlns:p="http://schemas.openxmlformats.org/presentationml/2006/main">
-  <p:cSld name="Slide 3">
+  <p:cSld name="Slide 14">
+    <p:bg>
+      <p:bgPr>
+        <a:solidFill>
+          <a:srgbClr val="FFFFFF"/>
+        </a:solidFill>
+      </p:bgPr>
+    </p:bg>
     <p:spTree>
       <p:nvGrpSpPr>
         <p:cNvPr id="1" name=""/>
@@ -2556,14 +4516,34 @@
       </p:grpSpPr>
       <p:sp>
         <p:nvSpPr>
-          <p:cNvPr id="2" name="Text 0"/>
-          <p:cNvSpPr/>
-          <p:nvPr/>
-        </p:nvSpPr>
-        <p:spPr>
-          <a:xfrm>
-            <a:off x="457200" y="320040"/>
-            <a:ext cx="8229600" cy="731520"/>
+          <p:cNvPr id="2" name="Shape 0"/>
+          <p:cNvSpPr/>
+          <p:nvPr/>
+        </p:nvSpPr>
+        <p:spPr>
+          <a:xfrm>
+            <a:off x="411480" y="402336"/>
+            <a:ext cx="82296" cy="329184"/>
+          </a:xfrm>
+          <a:prstGeom prst="rect">
+            <a:avLst/>
+          </a:prstGeom>
+          <a:solidFill>
+            <a:srgbClr val="B45309"/>
+          </a:solidFill>
+          <a:ln/>
+        </p:spPr>
+      </p:sp>
+      <p:sp>
+        <p:nvSpPr>
+          <p:cNvPr id="3" name="Text 1"/>
+          <p:cNvSpPr/>
+          <p:nvPr/>
+        </p:nvSpPr>
+        <p:spPr>
+          <a:xfrm>
+            <a:off x="566928" y="292608"/>
+            <a:ext cx="8138160" cy="548640"/>
           </a:xfrm>
           <a:prstGeom prst="rect">
             <a:avLst/>
@@ -2579,27 +4559,92 @@
               <a:buNone/>
             </a:pPr>
             <a:r>
-              <a:rPr lang="en-US" sz="2400" b="1" dirty="0">
-                <a:solidFill>
-                  <a:srgbClr val="B45309"/>
-                </a:solidFill>
-              </a:rPr>
-              <a:t>Session Overview</a:t>
-            </a:r>
-            <a:endParaRPr lang="en-US" sz="2400" dirty="0"/>
-          </a:p>
-        </p:txBody>
-      </p:sp>
-      <p:sp>
-        <p:nvSpPr>
-          <p:cNvPr id="3" name="Text 1"/>
-          <p:cNvSpPr/>
-          <p:nvPr/>
-        </p:nvSpPr>
-        <p:spPr>
-          <a:xfrm>
-            <a:off x="640080" y="1188720"/>
-            <a:ext cx="7863840" cy="3291840"/>
+              <a:rPr lang="en-US" sz="2100" b="1" dirty="0">
+                <a:solidFill>
+                  <a:srgbClr val="1C1917"/>
+                </a:solidFill>
+                <a:latin typeface="Arial" pitchFamily="34" charset="0"/>
+                <a:ea typeface="Arial" pitchFamily="34" charset="-122"/>
+                <a:cs typeface="Arial" pitchFamily="34" charset="-120"/>
+              </a:rPr>
+              <a:t>Typical Use Cases for Forecasted Statements</a:t>
+            </a:r>
+            <a:endParaRPr lang="en-US" sz="2100" dirty="0"/>
+          </a:p>
+        </p:txBody>
+      </p:sp>
+      <p:sp>
+        <p:nvSpPr>
+          <p:cNvPr id="4" name="Shape 2"/>
+          <p:cNvSpPr/>
+          <p:nvPr/>
+        </p:nvSpPr>
+        <p:spPr>
+          <a:xfrm>
+            <a:off x="411480" y="960120"/>
+            <a:ext cx="8321040" cy="0"/>
+          </a:xfrm>
+          <a:prstGeom prst="line">
+            <a:avLst/>
+          </a:prstGeom>
+          <a:noFill/>
+          <a:ln w="12700">
+            <a:solidFill>
+              <a:srgbClr val="E7E5E4"/>
+            </a:solidFill>
+            <a:prstDash val="solid"/>
+          </a:ln>
+        </p:spPr>
+      </p:sp>
+      <p:sp>
+        <p:nvSpPr>
+          <p:cNvPr id="5" name="Text 3"/>
+          <p:cNvSpPr/>
+          <p:nvPr/>
+        </p:nvSpPr>
+        <p:spPr>
+          <a:xfrm>
+            <a:off x="411480" y="4864608"/>
+            <a:ext cx="8321040" cy="237744"/>
+          </a:xfrm>
+          <a:prstGeom prst="rect">
+            <a:avLst/>
+          </a:prstGeom>
+          <a:noFill/>
+          <a:ln/>
+        </p:spPr>
+        <p:txBody>
+          <a:bodyPr wrap="square" rtlCol="0" anchor="ctr"/>
+          <a:lstStyle/>
+          <a:p>
+            <a:pPr indent="0" marL="0">
+              <a:buNone/>
+            </a:pPr>
+            <a:r>
+              <a:rPr lang="en-US" sz="750" dirty="0">
+                <a:solidFill>
+                  <a:srgbClr val="AAAAAA"/>
+                </a:solidFill>
+                <a:latin typeface="Arial" pitchFamily="34" charset="0"/>
+                <a:ea typeface="Arial" pitchFamily="34" charset="-122"/>
+                <a:cs typeface="Arial" pitchFamily="34" charset="-120"/>
+              </a:rPr>
+              <a:t>Lesson Forge Pro (owner) — This content is educational material only and does not constitute financial, investment, or trading advice.</a:t>
+            </a:r>
+            <a:endParaRPr lang="en-US" sz="750" dirty="0"/>
+          </a:p>
+        </p:txBody>
+      </p:sp>
+      <p:sp>
+        <p:nvSpPr>
+          <p:cNvPr id="6" name="Text 4"/>
+          <p:cNvSpPr/>
+          <p:nvPr/>
+        </p:nvSpPr>
+        <p:spPr>
+          <a:xfrm>
+            <a:off x="731520" y="1188720"/>
+            <a:ext cx="7680960" cy="2743200"/>
           </a:xfrm>
           <a:prstGeom prst="rect">
             <a:avLst/>
@@ -2611,32 +4656,151 @@
           <a:bodyPr wrap="square" rtlCol="0" anchor="t"/>
           <a:lstStyle/>
           <a:p>
-            <a:pPr marL="342900" indent="-342900">
+            <a:pPr marL="152400" indent="-152400">
+              <a:spcAft>
+                <a:spcPts val="800"/>
+              </a:spcAft>
               <a:buSzPct val="100000"/>
               <a:buChar char="•"/>
             </a:pPr>
             <a:r>
-              <a:rPr lang="en-US" sz="1600" dirty="0">
-                <a:solidFill>
-                  <a:srgbClr val="333333"/>
-                </a:solidFill>
-              </a:rPr>
-              <a:t>In this 120-minute session, we will explore the world of financial statement forecasting and analysis. By the end of this session, you will be able to prepare d</a:t>
-            </a:r>
-            <a:endParaRPr lang="en-US" sz="1600" dirty="0"/>
-          </a:p>
-        </p:txBody>
-      </p:sp>
-      <p:sp>
-        <p:nvSpPr>
-          <p:cNvPr id="4" name="Text 2"/>
-          <p:cNvSpPr/>
-          <p:nvPr/>
-        </p:nvSpPr>
-        <p:spPr>
-          <a:xfrm>
-            <a:off x="457200" y="4709160"/>
-            <a:ext cx="8229600" cy="320040"/>
+              <a:rPr lang="en-US" sz="1500" dirty="0">
+                <a:solidFill>
+                  <a:srgbClr val="1C1917"/>
+                </a:solidFill>
+                <a:latin typeface="Arial" pitchFamily="34" charset="0"/>
+                <a:ea typeface="Arial" pitchFamily="34" charset="-122"/>
+                <a:cs typeface="Arial" pitchFamily="34" charset="-120"/>
+              </a:rPr>
+              <a:t>DCF valuation and M&amp;A: projected free cash flows feed the discounted cash flow analysis.</a:t>
+            </a:r>
+            <a:endParaRPr lang="en-US" sz="1500" dirty="0"/>
+          </a:p>
+          <a:p>
+            <a:pPr marL="152400" indent="-152400">
+              <a:spcAft>
+                <a:spcPts val="800"/>
+              </a:spcAft>
+              <a:buSzPct val="100000"/>
+              <a:buChar char="•"/>
+            </a:pPr>
+            <a:r>
+              <a:rPr lang="en-US" sz="1500" dirty="0">
+                <a:solidFill>
+                  <a:srgbClr val="1C1917"/>
+                </a:solidFill>
+                <a:latin typeface="Arial" pitchFamily="34" charset="0"/>
+                <a:ea typeface="Arial" pitchFamily="34" charset="-122"/>
+                <a:cs typeface="Arial" pitchFamily="34" charset="-120"/>
+              </a:rPr>
+              <a:t>FP&amp;A and budgeting: forecasts translate strategy into headcount and CapEx plans.</a:t>
+            </a:r>
+            <a:endParaRPr lang="en-US" sz="1500" dirty="0"/>
+          </a:p>
+          <a:p>
+            <a:pPr marL="152400" indent="-152400">
+              <a:spcAft>
+                <a:spcPts val="800"/>
+              </a:spcAft>
+              <a:buSzPct val="100000"/>
+              <a:buChar char="•"/>
+            </a:pPr>
+            <a:r>
+              <a:rPr lang="en-US" sz="1500" dirty="0">
+                <a:solidFill>
+                  <a:srgbClr val="1C1917"/>
+                </a:solidFill>
+                <a:latin typeface="Arial" pitchFamily="34" charset="0"/>
+                <a:ea typeface="Arial" pitchFamily="34" charset="-122"/>
+                <a:cs typeface="Arial" pitchFamily="34" charset="-120"/>
+              </a:rPr>
+              <a:t>Credit analysis: projected coverage and leverage ratios assess repayment capacity.</a:t>
+            </a:r>
+            <a:endParaRPr lang="en-US" sz="1500" dirty="0"/>
+          </a:p>
+          <a:p>
+            <a:pPr marL="152400" indent="-152400">
+              <a:spcAft>
+                <a:spcPts val="800"/>
+              </a:spcAft>
+              <a:buSzPct val="100000"/>
+              <a:buChar char="•"/>
+            </a:pPr>
+            <a:r>
+              <a:rPr lang="en-US" sz="1500" dirty="0">
+                <a:solidFill>
+                  <a:srgbClr val="1C1917"/>
+                </a:solidFill>
+                <a:latin typeface="Arial" pitchFamily="34" charset="0"/>
+                <a:ea typeface="Arial" pitchFamily="34" charset="-122"/>
+                <a:cs typeface="Arial" pitchFamily="34" charset="-120"/>
+              </a:rPr>
+              <a:t>Startup funding: forecasts show breakeven timing and capital needed to get there.</a:t>
+            </a:r>
+            <a:endParaRPr lang="en-US" sz="1500" dirty="0"/>
+          </a:p>
+          <a:p>
+            <a:pPr marL="152400" indent="-152400">
+              <a:spcAft>
+                <a:spcPts val="800"/>
+              </a:spcAft>
+              <a:buSzPct val="100000"/>
+              <a:buChar char="•"/>
+            </a:pPr>
+            <a:r>
+              <a:rPr lang="en-US" sz="1500" dirty="0">
+                <a:solidFill>
+                  <a:srgbClr val="1C1917"/>
+                </a:solidFill>
+                <a:latin typeface="Arial" pitchFamily="34" charset="0"/>
+                <a:ea typeface="Arial" pitchFamily="34" charset="-122"/>
+                <a:cs typeface="Arial" pitchFamily="34" charset="-120"/>
+              </a:rPr>
+              <a:t>Credibility depends entirely on assumptions grounded in data and logical relationships.</a:t>
+            </a:r>
+            <a:endParaRPr lang="en-US" sz="1500" dirty="0"/>
+          </a:p>
+        </p:txBody>
+      </p:sp>
+      <p:sp>
+        <p:nvSpPr>
+          <p:cNvPr id="7" name="Shape 5"/>
+          <p:cNvSpPr/>
+          <p:nvPr/>
+        </p:nvSpPr>
+        <p:spPr>
+          <a:xfrm>
+            <a:off x="731520" y="4041648"/>
+            <a:ext cx="7680960" cy="566928"/>
+          </a:xfrm>
+          <a:prstGeom prst="roundRect">
+            <a:avLst>
+              <a:gd name="adj" fmla="val 12903"/>
+            </a:avLst>
+          </a:prstGeom>
+          <a:solidFill>
+            <a:srgbClr val="B45309">
+              <a:alpha val="12000"/>
+            </a:srgbClr>
+          </a:solidFill>
+          <a:ln w="12700">
+            <a:solidFill>
+              <a:srgbClr val="B45309"/>
+            </a:solidFill>
+            <a:prstDash val="solid"/>
+          </a:ln>
+        </p:spPr>
+      </p:sp>
+      <p:sp>
+        <p:nvSpPr>
+          <p:cNvPr id="8" name="Text 6"/>
+          <p:cNvSpPr/>
+          <p:nvPr/>
+        </p:nvSpPr>
+        <p:spPr>
+          <a:xfrm>
+            <a:off x="868680" y="4087368"/>
+            <a:ext cx="7406640" cy="475488"/>
           </a:xfrm>
           <a:prstGeom prst="rect">
             <a:avLst/>
@@ -2652,14 +4816,31 @@
               <a:buNone/>
             </a:pPr>
             <a:r>
-              <a:rPr lang="en-US" sz="800" dirty="0">
-                <a:solidFill>
-                  <a:srgbClr val="AAAAAA"/>
-                </a:solidFill>
-              </a:rPr>
-              <a:t>Lesson Forge Pro (owner) — This content is educational material only and does not constitute financial, investment, or trading advice.</a:t>
-            </a:r>
-            <a:endParaRPr lang="en-US" sz="800" dirty="0"/>
+              <a:rPr lang="en-US" sz="1100" b="1" dirty="0">
+                <a:solidFill>
+                  <a:srgbClr val="B45309"/>
+                </a:solidFill>
+                <a:latin typeface="Arial" pitchFamily="34" charset="0"/>
+                <a:ea typeface="Arial" pitchFamily="34" charset="-122"/>
+                <a:cs typeface="Arial" pitchFamily="34" charset="-120"/>
+              </a:rPr>
+              <a:t>Takeaway  </a:t>
+            </a:r>
+            <a:pPr indent="0" marL="0">
+              <a:buNone/>
+            </a:pPr>
+            <a:r>
+              <a:rPr lang="en-US" sz="1150" dirty="0">
+                <a:solidFill>
+                  <a:srgbClr val="1C1917"/>
+                </a:solidFill>
+                <a:latin typeface="Arial" pitchFamily="34" charset="0"/>
+                <a:ea typeface="Arial" pitchFamily="34" charset="-122"/>
+                <a:cs typeface="Arial" pitchFamily="34" charset="-120"/>
+              </a:rPr>
+              <a:t>Forecasted financial statements are the universal currency of high-stakes financial analysis across every context.</a:t>
+            </a:r>
+            <a:endParaRPr lang="en-US" sz="1100" dirty="0"/>
           </a:p>
         </p:txBody>
       </p:sp>
@@ -2671,9 +4852,16 @@
 </p:sld>
 </file>
 
-<file path=ppt/slides/slide4.xml><?xml version="1.0" encoding="utf-8"?>
+<file path=ppt/slides/slide15.xml><?xml version="1.0" encoding="utf-8"?>
 <p:sld xmlns:a="http://schemas.openxmlformats.org/drawingml/2006/main" xmlns:r="http://schemas.openxmlformats.org/officeDocument/2006/relationships" xmlns:p="http://schemas.openxmlformats.org/presentationml/2006/main">
-  <p:cSld name="Slide 4">
+  <p:cSld name="Slide 15">
+    <p:bg>
+      <p:bgPr>
+        <a:solidFill>
+          <a:srgbClr val="FFFFFF"/>
+        </a:solidFill>
+      </p:bgPr>
+    </p:bg>
     <p:spTree>
       <p:nvGrpSpPr>
         <p:cNvPr id="1" name=""/>
@@ -2690,14 +4878,34 @@
       </p:grpSpPr>
       <p:sp>
         <p:nvSpPr>
-          <p:cNvPr id="2" name="Text 0"/>
-          <p:cNvSpPr/>
-          <p:nvPr/>
-        </p:nvSpPr>
-        <p:spPr>
-          <a:xfrm>
-            <a:off x="457200" y="320040"/>
-            <a:ext cx="8229600" cy="731520"/>
+          <p:cNvPr id="2" name="Shape 0"/>
+          <p:cNvSpPr/>
+          <p:nvPr/>
+        </p:nvSpPr>
+        <p:spPr>
+          <a:xfrm>
+            <a:off x="411480" y="384048"/>
+            <a:ext cx="82296" cy="310896"/>
+          </a:xfrm>
+          <a:prstGeom prst="rect">
+            <a:avLst/>
+          </a:prstGeom>
+          <a:solidFill>
+            <a:srgbClr val="B45309"/>
+          </a:solidFill>
+          <a:ln/>
+        </p:spPr>
+      </p:sp>
+      <p:sp>
+        <p:nvSpPr>
+          <p:cNvPr id="3" name="Text 1"/>
+          <p:cNvSpPr/>
+          <p:nvPr/>
+        </p:nvSpPr>
+        <p:spPr>
+          <a:xfrm>
+            <a:off x="566928" y="292608"/>
+            <a:ext cx="8138160" cy="502920"/>
           </a:xfrm>
           <a:prstGeom prst="rect">
             <a:avLst/>
@@ -2713,156 +4921,17 @@
               <a:buNone/>
             </a:pPr>
             <a:r>
-              <a:rPr lang="en-US" sz="2400" b="1" dirty="0">
-                <a:solidFill>
-                  <a:srgbClr val="B45309"/>
-                </a:solidFill>
-              </a:rPr>
-              <a:t>Timed Agenda</a:t>
-            </a:r>
-            <a:endParaRPr lang="en-US" sz="2400" dirty="0"/>
-          </a:p>
-        </p:txBody>
-      </p:sp>
-      <p:sp>
-        <p:nvSpPr>
-          <p:cNvPr id="3" name="Text 1"/>
-          <p:cNvSpPr/>
-          <p:nvPr/>
-        </p:nvSpPr>
-        <p:spPr>
-          <a:xfrm>
-            <a:off x="640080" y="1188720"/>
-            <a:ext cx="7863840" cy="3291840"/>
-          </a:xfrm>
-          <a:prstGeom prst="rect">
-            <a:avLst/>
-          </a:prstGeom>
-          <a:noFill/>
-          <a:ln/>
-        </p:spPr>
-        <p:txBody>
-          <a:bodyPr wrap="square" rtlCol="0" anchor="t"/>
-          <a:lstStyle/>
-          <a:p>
-            <a:pPr marL="342900" indent="-342900">
-              <a:buSzPct val="100000"/>
-              <a:buChar char="•"/>
-            </a:pPr>
-            <a:r>
-              <a:rPr lang="en-US" sz="1600" dirty="0">
-                <a:solidFill>
-                  <a:srgbClr val="333333"/>
-                </a:solidFill>
-              </a:rPr>
-              <a:t>| Time | Topic | Duration |</a:t>
-            </a:r>
-            <a:endParaRPr lang="en-US" sz="1600" dirty="0"/>
-          </a:p>
-          <a:p>
-            <a:pPr marL="342900" indent="-342900">
-              <a:buSzPct val="100000"/>
-              <a:buChar char="•"/>
-            </a:pPr>
-            <a:r>
-              <a:rPr lang="en-US" sz="1600" dirty="0">
-                <a:solidFill>
-                  <a:srgbClr val="333333"/>
-                </a:solidFill>
-              </a:rPr>
-              <a:t>| --- | --- | --- |</a:t>
-            </a:r>
-            <a:endParaRPr lang="en-US" sz="1600" dirty="0"/>
-          </a:p>
-          <a:p>
-            <a:pPr marL="342900" indent="-342900">
-              <a:buSzPct val="100000"/>
-              <a:buChar char="•"/>
-            </a:pPr>
-            <a:r>
-              <a:rPr lang="en-US" sz="1600" dirty="0">
-                <a:solidFill>
-                  <a:srgbClr val="333333"/>
-                </a:solidFill>
-              </a:rPr>
-              <a:t>| 0:00 | Introduction and Energizer | 5 minutes |</a:t>
-            </a:r>
-            <a:endParaRPr lang="en-US" sz="1600" dirty="0"/>
-          </a:p>
-          <a:p>
-            <a:pPr marL="342900" indent="-342900">
-              <a:buSzPct val="100000"/>
-              <a:buChar char="•"/>
-            </a:pPr>
-            <a:r>
-              <a:rPr lang="en-US" sz="1600" dirty="0">
-                <a:solidFill>
-                  <a:srgbClr val="333333"/>
-                </a:solidFill>
-              </a:rPr>
-              <a:t>| 0:05 | Financial Modeling Overview | 15 minutes |</a:t>
-            </a:r>
-            <a:endParaRPr lang="en-US" sz="1600" dirty="0"/>
-          </a:p>
-          <a:p>
-            <a:pPr marL="342900" indent="-342900">
-              <a:buSzPct val="100000"/>
-              <a:buChar char="•"/>
-            </a:pPr>
-            <a:r>
-              <a:rPr lang="en-US" sz="1600" dirty="0">
-                <a:solidFill>
-                  <a:srgbClr val="333333"/>
-                </a:solidFill>
-              </a:rPr>
-              <a:t>| 0:20 | Financial Statement Analysis | 20 minutes |</a:t>
-            </a:r>
-            <a:endParaRPr lang="en-US" sz="1600" dirty="0"/>
-          </a:p>
-          <a:p>
-            <a:pPr marL="342900" indent="-342900">
-              <a:buSzPct val="100000"/>
-              <a:buChar char="•"/>
-            </a:pPr>
-            <a:r>
-              <a:rPr lang="en-US" sz="1600" dirty="0">
-                <a:solidFill>
-                  <a:srgbClr val="333333"/>
-                </a:solidFill>
-              </a:rPr>
-              <a:t>| 0:40 | Break | 10 minutes |</a:t>
-            </a:r>
-            <a:endParaRPr lang="en-US" sz="1600" dirty="0"/>
-          </a:p>
-          <a:p>
-            <a:pPr marL="342900" indent="-342900">
-              <a:buSzPct val="100000"/>
-              <a:buChar char="•"/>
-            </a:pPr>
-            <a:r>
-              <a:rPr lang="en-US" sz="1600" dirty="0">
-                <a:solidFill>
-                  <a:srgbClr val="333333"/>
-                </a:solidFill>
-              </a:rPr>
-              <a:t>| 0:50 | Key Financial Ratios and Metrics | 20 minutes |</a:t>
-            </a:r>
-            <a:endParaRPr lang="en-US" sz="1600" dirty="0"/>
-          </a:p>
-          <a:p>
-            <a:pPr marL="342900" indent="-342900">
-              <a:buSzPct val="100000"/>
-              <a:buChar char="•"/>
-            </a:pPr>
-            <a:r>
-              <a:rPr lang="en-US" sz="1600" dirty="0">
-                <a:solidFill>
-                  <a:srgbClr val="333333"/>
-                </a:solidFill>
-              </a:rPr>
-              <a:t>| 1:10 | Case Study and Group Discussion | 20 minutes |</a:t>
-            </a:r>
-            <a:endParaRPr lang="en-US" sz="1600" dirty="0"/>
+              <a:rPr lang="en-US" sz="2000" b="1" dirty="0">
+                <a:solidFill>
+                  <a:srgbClr val="1C1917"/>
+                </a:solidFill>
+                <a:latin typeface="Arial" pitchFamily="34" charset="0"/>
+                <a:ea typeface="Arial" pitchFamily="34" charset="-122"/>
+                <a:cs typeface="Arial" pitchFamily="34" charset="-120"/>
+              </a:rPr>
+              <a:t>Key Model Drivers Hierarchy</a:t>
+            </a:r>
+            <a:endParaRPr lang="en-US" sz="2000" dirty="0"/>
           </a:p>
         </p:txBody>
       </p:sp>
@@ -2874,8 +4943,8 @@
         </p:nvSpPr>
         <p:spPr>
           <a:xfrm>
-            <a:off x="457200" y="4709160"/>
-            <a:ext cx="8229600" cy="320040"/>
+            <a:off x="566928" y="4681728"/>
+            <a:ext cx="8138160" cy="320040"/>
           </a:xfrm>
           <a:prstGeom prst="rect">
             <a:avLst/>
@@ -2891,14 +4960,556 @@
               <a:buNone/>
             </a:pPr>
             <a:r>
-              <a:rPr lang="en-US" sz="800" dirty="0">
+              <a:rPr lang="en-US" sz="1000" i="1" dirty="0">
+                <a:solidFill>
+                  <a:srgbClr val="78716C"/>
+                </a:solidFill>
+                <a:latin typeface="Arial" pitchFamily="34" charset="0"/>
+                <a:ea typeface="Arial" pitchFamily="34" charset="-122"/>
+                <a:cs typeface="Arial" pitchFamily="34" charset="-120"/>
+              </a:rPr>
+              <a:t>Drivers at the top have the broadest downstream impact on all three statements.</a:t>
+            </a:r>
+            <a:endParaRPr lang="en-US" sz="1000" dirty="0"/>
+          </a:p>
+        </p:txBody>
+      </p:sp>
+      <p:sp>
+        <p:nvSpPr>
+          <p:cNvPr id="5" name="Text 3"/>
+          <p:cNvSpPr/>
+          <p:nvPr/>
+        </p:nvSpPr>
+        <p:spPr>
+          <a:xfrm>
+            <a:off x="411480" y="4919472"/>
+            <a:ext cx="8321040" cy="219456"/>
+          </a:xfrm>
+          <a:prstGeom prst="rect">
+            <a:avLst/>
+          </a:prstGeom>
+          <a:noFill/>
+          <a:ln/>
+        </p:spPr>
+        <p:txBody>
+          <a:bodyPr wrap="square" rtlCol="0" anchor="ctr"/>
+          <a:lstStyle/>
+          <a:p>
+            <a:pPr indent="0" marL="0">
+              <a:buNone/>
+            </a:pPr>
+            <a:r>
+              <a:rPr lang="en-US" sz="750" dirty="0">
                 <a:solidFill>
                   <a:srgbClr val="AAAAAA"/>
                 </a:solidFill>
+                <a:latin typeface="Arial" pitchFamily="34" charset="0"/>
+                <a:ea typeface="Arial" pitchFamily="34" charset="-122"/>
+                <a:cs typeface="Arial" pitchFamily="34" charset="-120"/>
               </a:rPr>
               <a:t>Lesson Forge Pro (owner) — This content is educational material only and does not constitute financial, investment, or trading advice.</a:t>
             </a:r>
-            <a:endParaRPr lang="en-US" sz="800" dirty="0"/>
+            <a:endParaRPr lang="en-US" sz="750" dirty="0"/>
+          </a:p>
+        </p:txBody>
+      </p:sp>
+      <p:sp>
+        <p:nvSpPr>
+          <p:cNvPr id="6" name="Shape 4"/>
+          <p:cNvSpPr/>
+          <p:nvPr/>
+        </p:nvSpPr>
+        <p:spPr>
+          <a:xfrm flipV="1">
+            <a:off x="2084832" y="1234440"/>
+            <a:ext cx="2048256" cy="658368"/>
+          </a:xfrm>
+          <a:prstGeom prst="trapezoid">
+            <a:avLst/>
+          </a:prstGeom>
+          <a:solidFill>
+            <a:srgbClr val="B45309">
+              <a:alpha val="40000"/>
+            </a:srgbClr>
+          </a:solidFill>
+          <a:ln/>
+        </p:spPr>
+      </p:sp>
+      <p:sp>
+        <p:nvSpPr>
+          <p:cNvPr id="7" name="Text 5"/>
+          <p:cNvSpPr/>
+          <p:nvPr/>
+        </p:nvSpPr>
+        <p:spPr>
+          <a:xfrm>
+            <a:off x="2084832" y="1289304"/>
+            <a:ext cx="2048256" cy="566928"/>
+          </a:xfrm>
+          <a:prstGeom prst="rect">
+            <a:avLst/>
+          </a:prstGeom>
+          <a:noFill/>
+          <a:ln/>
+        </p:spPr>
+        <p:txBody>
+          <a:bodyPr wrap="square" rtlCol="0" anchor="ctr"/>
+          <a:lstStyle/>
+          <a:p>
+            <a:pPr algn="ctr" indent="0" marL="0">
+              <a:buNone/>
+            </a:pPr>
+            <a:r>
+              <a:rPr lang="en-US" sz="1200" b="1" dirty="0">
+                <a:solidFill>
+                  <a:srgbClr val="FFFFFF"/>
+                </a:solidFill>
+                <a:latin typeface="Arial" pitchFamily="34" charset="0"/>
+                <a:ea typeface="Arial" pitchFamily="34" charset="-122"/>
+                <a:cs typeface="Arial" pitchFamily="34" charset="-120"/>
+              </a:rPr>
+              <a:t>Revenue Growth Rate</a:t>
+            </a:r>
+            <a:endParaRPr lang="en-US" sz="1200" dirty="0"/>
+          </a:p>
+        </p:txBody>
+      </p:sp>
+      <p:sp>
+        <p:nvSpPr>
+          <p:cNvPr id="8" name="Text 6"/>
+          <p:cNvSpPr/>
+          <p:nvPr/>
+        </p:nvSpPr>
+        <p:spPr>
+          <a:xfrm>
+            <a:off x="5760720" y="1417320"/>
+            <a:ext cx="2926080" cy="310896"/>
+          </a:xfrm>
+          <a:prstGeom prst="rect">
+            <a:avLst/>
+          </a:prstGeom>
+          <a:noFill/>
+          <a:ln/>
+        </p:spPr>
+        <p:txBody>
+          <a:bodyPr wrap="square" rtlCol="0" anchor="ctr"/>
+          <a:lstStyle/>
+          <a:p>
+            <a:pPr indent="0" marL="0">
+              <a:buNone/>
+            </a:pPr>
+            <a:r>
+              <a:rPr lang="en-US" sz="1000" dirty="0">
+                <a:solidFill>
+                  <a:srgbClr val="78716C"/>
+                </a:solidFill>
+                <a:latin typeface="Arial" pitchFamily="34" charset="0"/>
+                <a:ea typeface="Arial" pitchFamily="34" charset="-122"/>
+                <a:cs typeface="Arial" pitchFamily="34" charset="-120"/>
+              </a:rPr>
+              <a:t>Top-line engine; all else flows from it</a:t>
+            </a:r>
+            <a:endParaRPr lang="en-US" sz="1000" dirty="0"/>
+          </a:p>
+        </p:txBody>
+      </p:sp>
+      <p:sp>
+        <p:nvSpPr>
+          <p:cNvPr id="9" name="Shape 7"/>
+          <p:cNvSpPr/>
+          <p:nvPr/>
+        </p:nvSpPr>
+        <p:spPr>
+          <a:xfrm flipV="1">
+            <a:off x="1700784" y="1984248"/>
+            <a:ext cx="2816352" cy="658368"/>
+          </a:xfrm>
+          <a:prstGeom prst="trapezoid">
+            <a:avLst/>
+          </a:prstGeom>
+          <a:solidFill>
+            <a:srgbClr val="B45309">
+              <a:alpha val="54000"/>
+            </a:srgbClr>
+          </a:solidFill>
+          <a:ln/>
+        </p:spPr>
+      </p:sp>
+      <p:sp>
+        <p:nvSpPr>
+          <p:cNvPr id="10" name="Text 8"/>
+          <p:cNvSpPr/>
+          <p:nvPr/>
+        </p:nvSpPr>
+        <p:spPr>
+          <a:xfrm>
+            <a:off x="1700784" y="2039112"/>
+            <a:ext cx="2816352" cy="566928"/>
+          </a:xfrm>
+          <a:prstGeom prst="rect">
+            <a:avLst/>
+          </a:prstGeom>
+          <a:noFill/>
+          <a:ln/>
+        </p:spPr>
+        <p:txBody>
+          <a:bodyPr wrap="square" rtlCol="0" anchor="ctr"/>
+          <a:lstStyle/>
+          <a:p>
+            <a:pPr algn="ctr" indent="0" marL="0">
+              <a:buNone/>
+            </a:pPr>
+            <a:r>
+              <a:rPr lang="en-US" sz="1200" b="1" dirty="0">
+                <a:solidFill>
+                  <a:srgbClr val="FFFFFF"/>
+                </a:solidFill>
+                <a:latin typeface="Arial" pitchFamily="34" charset="0"/>
+                <a:ea typeface="Arial" pitchFamily="34" charset="-122"/>
+                <a:cs typeface="Arial" pitchFamily="34" charset="-120"/>
+              </a:rPr>
+              <a:t>Gross Margin</a:t>
+            </a:r>
+            <a:endParaRPr lang="en-US" sz="1200" dirty="0"/>
+          </a:p>
+        </p:txBody>
+      </p:sp>
+      <p:sp>
+        <p:nvSpPr>
+          <p:cNvPr id="11" name="Text 9"/>
+          <p:cNvSpPr/>
+          <p:nvPr/>
+        </p:nvSpPr>
+        <p:spPr>
+          <a:xfrm>
+            <a:off x="5760720" y="2167128"/>
+            <a:ext cx="2926080" cy="310896"/>
+          </a:xfrm>
+          <a:prstGeom prst="rect">
+            <a:avLst/>
+          </a:prstGeom>
+          <a:noFill/>
+          <a:ln/>
+        </p:spPr>
+        <p:txBody>
+          <a:bodyPr wrap="square" rtlCol="0" anchor="ctr"/>
+          <a:lstStyle/>
+          <a:p>
+            <a:pPr indent="0" marL="0">
+              <a:buNone/>
+            </a:pPr>
+            <a:r>
+              <a:rPr lang="en-US" sz="1000" dirty="0">
+                <a:solidFill>
+                  <a:srgbClr val="78716C"/>
+                </a:solidFill>
+                <a:latin typeface="Arial" pitchFamily="34" charset="0"/>
+                <a:ea typeface="Arial" pitchFamily="34" charset="-122"/>
+                <a:cs typeface="Arial" pitchFamily="34" charset="-120"/>
+              </a:rPr>
+              <a:t>Sets COGS and profitability ceiling</a:t>
+            </a:r>
+            <a:endParaRPr lang="en-US" sz="1000" dirty="0"/>
+          </a:p>
+        </p:txBody>
+      </p:sp>
+      <p:sp>
+        <p:nvSpPr>
+          <p:cNvPr id="12" name="Shape 10"/>
+          <p:cNvSpPr/>
+          <p:nvPr/>
+        </p:nvSpPr>
+        <p:spPr>
+          <a:xfrm flipV="1">
+            <a:off x="1316736" y="2734056"/>
+            <a:ext cx="3584448" cy="658368"/>
+          </a:xfrm>
+          <a:prstGeom prst="trapezoid">
+            <a:avLst/>
+          </a:prstGeom>
+          <a:solidFill>
+            <a:srgbClr val="B45309">
+              <a:alpha val="67000"/>
+            </a:srgbClr>
+          </a:solidFill>
+          <a:ln/>
+        </p:spPr>
+      </p:sp>
+      <p:sp>
+        <p:nvSpPr>
+          <p:cNvPr id="13" name="Text 11"/>
+          <p:cNvSpPr/>
+          <p:nvPr/>
+        </p:nvSpPr>
+        <p:spPr>
+          <a:xfrm>
+            <a:off x="1316736" y="2788920"/>
+            <a:ext cx="3584448" cy="566928"/>
+          </a:xfrm>
+          <a:prstGeom prst="rect">
+            <a:avLst/>
+          </a:prstGeom>
+          <a:noFill/>
+          <a:ln/>
+        </p:spPr>
+        <p:txBody>
+          <a:bodyPr wrap="square" rtlCol="0" anchor="ctr"/>
+          <a:lstStyle/>
+          <a:p>
+            <a:pPr algn="ctr" indent="0" marL="0">
+              <a:buNone/>
+            </a:pPr>
+            <a:r>
+              <a:rPr lang="en-US" sz="1200" b="1" dirty="0">
+                <a:solidFill>
+                  <a:srgbClr val="FFFFFF"/>
+                </a:solidFill>
+                <a:latin typeface="Arial" pitchFamily="34" charset="0"/>
+                <a:ea typeface="Arial" pitchFamily="34" charset="-122"/>
+                <a:cs typeface="Arial" pitchFamily="34" charset="-120"/>
+              </a:rPr>
+              <a:t>Operating Expense %</a:t>
+            </a:r>
+            <a:endParaRPr lang="en-US" sz="1200" dirty="0"/>
+          </a:p>
+        </p:txBody>
+      </p:sp>
+      <p:sp>
+        <p:nvSpPr>
+          <p:cNvPr id="14" name="Text 12"/>
+          <p:cNvSpPr/>
+          <p:nvPr/>
+        </p:nvSpPr>
+        <p:spPr>
+          <a:xfrm>
+            <a:off x="5760720" y="2916936"/>
+            <a:ext cx="2926080" cy="310896"/>
+          </a:xfrm>
+          <a:prstGeom prst="rect">
+            <a:avLst/>
+          </a:prstGeom>
+          <a:noFill/>
+          <a:ln/>
+        </p:spPr>
+        <p:txBody>
+          <a:bodyPr wrap="square" rtlCol="0" anchor="ctr"/>
+          <a:lstStyle/>
+          <a:p>
+            <a:pPr indent="0" marL="0">
+              <a:buNone/>
+            </a:pPr>
+            <a:r>
+              <a:rPr lang="en-US" sz="1000" dirty="0">
+                <a:solidFill>
+                  <a:srgbClr val="78716C"/>
+                </a:solidFill>
+                <a:latin typeface="Arial" pitchFamily="34" charset="0"/>
+                <a:ea typeface="Arial" pitchFamily="34" charset="-122"/>
+                <a:cs typeface="Arial" pitchFamily="34" charset="-120"/>
+              </a:rPr>
+              <a:t>Fixed or % of revenue; drives EBIT</a:t>
+            </a:r>
+            <a:endParaRPr lang="en-US" sz="1000" dirty="0"/>
+          </a:p>
+        </p:txBody>
+      </p:sp>
+      <p:sp>
+        <p:nvSpPr>
+          <p:cNvPr id="15" name="Shape 13"/>
+          <p:cNvSpPr/>
+          <p:nvPr/>
+        </p:nvSpPr>
+        <p:spPr>
+          <a:xfrm flipV="1">
+            <a:off x="932688" y="3483864"/>
+            <a:ext cx="4352544" cy="658368"/>
+          </a:xfrm>
+          <a:prstGeom prst="trapezoid">
+            <a:avLst/>
+          </a:prstGeom>
+          <a:solidFill>
+            <a:srgbClr val="B45309">
+              <a:alpha val="81000"/>
+            </a:srgbClr>
+          </a:solidFill>
+          <a:ln/>
+        </p:spPr>
+      </p:sp>
+      <p:sp>
+        <p:nvSpPr>
+          <p:cNvPr id="16" name="Text 14"/>
+          <p:cNvSpPr/>
+          <p:nvPr/>
+        </p:nvSpPr>
+        <p:spPr>
+          <a:xfrm>
+            <a:off x="932688" y="3538728"/>
+            <a:ext cx="4352544" cy="566928"/>
+          </a:xfrm>
+          <a:prstGeom prst="rect">
+            <a:avLst/>
+          </a:prstGeom>
+          <a:noFill/>
+          <a:ln/>
+        </p:spPr>
+        <p:txBody>
+          <a:bodyPr wrap="square" rtlCol="0" anchor="ctr"/>
+          <a:lstStyle/>
+          <a:p>
+            <a:pPr algn="ctr" indent="0" marL="0">
+              <a:buNone/>
+            </a:pPr>
+            <a:r>
+              <a:rPr lang="en-US" sz="1200" b="1" dirty="0">
+                <a:solidFill>
+                  <a:srgbClr val="FFFFFF"/>
+                </a:solidFill>
+                <a:latin typeface="Arial" pitchFamily="34" charset="0"/>
+                <a:ea typeface="Arial" pitchFamily="34" charset="-122"/>
+                <a:cs typeface="Arial" pitchFamily="34" charset="-120"/>
+              </a:rPr>
+              <a:t>Working Capital Days</a:t>
+            </a:r>
+            <a:endParaRPr lang="en-US" sz="1200" dirty="0"/>
+          </a:p>
+        </p:txBody>
+      </p:sp>
+      <p:sp>
+        <p:nvSpPr>
+          <p:cNvPr id="17" name="Text 15"/>
+          <p:cNvSpPr/>
+          <p:nvPr/>
+        </p:nvSpPr>
+        <p:spPr>
+          <a:xfrm>
+            <a:off x="5760720" y="3666744"/>
+            <a:ext cx="2926080" cy="310896"/>
+          </a:xfrm>
+          <a:prstGeom prst="rect">
+            <a:avLst/>
+          </a:prstGeom>
+          <a:noFill/>
+          <a:ln/>
+        </p:spPr>
+        <p:txBody>
+          <a:bodyPr wrap="square" rtlCol="0" anchor="ctr"/>
+          <a:lstStyle/>
+          <a:p>
+            <a:pPr indent="0" marL="0">
+              <a:buNone/>
+            </a:pPr>
+            <a:r>
+              <a:rPr lang="en-US" sz="1000" dirty="0">
+                <a:solidFill>
+                  <a:srgbClr val="78716C"/>
+                </a:solidFill>
+                <a:latin typeface="Arial" pitchFamily="34" charset="0"/>
+                <a:ea typeface="Arial" pitchFamily="34" charset="-122"/>
+                <a:cs typeface="Arial" pitchFamily="34" charset="-120"/>
+              </a:rPr>
+              <a:t>DSO, DIO, DPO shape cash conversion</a:t>
+            </a:r>
+            <a:endParaRPr lang="en-US" sz="1000" dirty="0"/>
+          </a:p>
+        </p:txBody>
+      </p:sp>
+      <p:sp>
+        <p:nvSpPr>
+          <p:cNvPr id="18" name="Shape 16"/>
+          <p:cNvSpPr/>
+          <p:nvPr/>
+        </p:nvSpPr>
+        <p:spPr>
+          <a:xfrm flipV="1">
+            <a:off x="548640" y="4233672"/>
+            <a:ext cx="5120640" cy="658368"/>
+          </a:xfrm>
+          <a:prstGeom prst="trapezoid">
+            <a:avLst/>
+          </a:prstGeom>
+          <a:solidFill>
+            <a:srgbClr val="B45309">
+              <a:alpha val="95000"/>
+            </a:srgbClr>
+          </a:solidFill>
+          <a:ln/>
+        </p:spPr>
+      </p:sp>
+      <p:sp>
+        <p:nvSpPr>
+          <p:cNvPr id="19" name="Text 17"/>
+          <p:cNvSpPr/>
+          <p:nvPr/>
+        </p:nvSpPr>
+        <p:spPr>
+          <a:xfrm>
+            <a:off x="548640" y="4288536"/>
+            <a:ext cx="5120640" cy="566928"/>
+          </a:xfrm>
+          <a:prstGeom prst="rect">
+            <a:avLst/>
+          </a:prstGeom>
+          <a:noFill/>
+          <a:ln/>
+        </p:spPr>
+        <p:txBody>
+          <a:bodyPr wrap="square" rtlCol="0" anchor="ctr"/>
+          <a:lstStyle/>
+          <a:p>
+            <a:pPr algn="ctr" indent="0" marL="0">
+              <a:buNone/>
+            </a:pPr>
+            <a:r>
+              <a:rPr lang="en-US" sz="1200" b="1" dirty="0">
+                <a:solidFill>
+                  <a:srgbClr val="FFFFFF"/>
+                </a:solidFill>
+                <a:latin typeface="Arial" pitchFamily="34" charset="0"/>
+                <a:ea typeface="Arial" pitchFamily="34" charset="-122"/>
+                <a:cs typeface="Arial" pitchFamily="34" charset="-120"/>
+              </a:rPr>
+              <a:t>CapEx &amp; Depreciation</a:t>
+            </a:r>
+            <a:endParaRPr lang="en-US" sz="1200" dirty="0"/>
+          </a:p>
+        </p:txBody>
+      </p:sp>
+      <p:sp>
+        <p:nvSpPr>
+          <p:cNvPr id="20" name="Text 18"/>
+          <p:cNvSpPr/>
+          <p:nvPr/>
+        </p:nvSpPr>
+        <p:spPr>
+          <a:xfrm>
+            <a:off x="5760720" y="4416552"/>
+            <a:ext cx="2926080" cy="310896"/>
+          </a:xfrm>
+          <a:prstGeom prst="rect">
+            <a:avLst/>
+          </a:prstGeom>
+          <a:noFill/>
+          <a:ln/>
+        </p:spPr>
+        <p:txBody>
+          <a:bodyPr wrap="square" rtlCol="0" anchor="ctr"/>
+          <a:lstStyle/>
+          <a:p>
+            <a:pPr indent="0" marL="0">
+              <a:buNone/>
+            </a:pPr>
+            <a:r>
+              <a:rPr lang="en-US" sz="1000" dirty="0">
+                <a:solidFill>
+                  <a:srgbClr val="78716C"/>
+                </a:solidFill>
+                <a:latin typeface="Arial" pitchFamily="34" charset="0"/>
+                <a:ea typeface="Arial" pitchFamily="34" charset="-122"/>
+                <a:cs typeface="Arial" pitchFamily="34" charset="-120"/>
+              </a:rPr>
+              <a:t>Drives PP&amp;E roll and FCF calculation</a:t>
+            </a:r>
+            <a:endParaRPr lang="en-US" sz="1000" dirty="0"/>
           </a:p>
         </p:txBody>
       </p:sp>
@@ -2910,9 +5521,16 @@
 </p:sld>
 </file>
 
-<file path=ppt/slides/slide5.xml><?xml version="1.0" encoding="utf-8"?>
+<file path=ppt/slides/slide16.xml><?xml version="1.0" encoding="utf-8"?>
 <p:sld xmlns:a="http://schemas.openxmlformats.org/drawingml/2006/main" xmlns:r="http://schemas.openxmlformats.org/officeDocument/2006/relationships" xmlns:p="http://schemas.openxmlformats.org/presentationml/2006/main">
-  <p:cSld name="Slide 5">
+  <p:cSld name="Slide 16">
+    <p:bg>
+      <p:bgPr>
+        <a:solidFill>
+          <a:srgbClr val="FFFFFF"/>
+        </a:solidFill>
+      </p:bgPr>
+    </p:bg>
     <p:spTree>
       <p:nvGrpSpPr>
         <p:cNvPr id="1" name=""/>
@@ -2929,14 +5547,34 @@
       </p:grpSpPr>
       <p:sp>
         <p:nvSpPr>
-          <p:cNvPr id="2" name="Text 0"/>
-          <p:cNvSpPr/>
-          <p:nvPr/>
-        </p:nvSpPr>
-        <p:spPr>
-          <a:xfrm>
-            <a:off x="457200" y="320040"/>
-            <a:ext cx="8229600" cy="731520"/>
+          <p:cNvPr id="2" name="Shape 0"/>
+          <p:cNvSpPr/>
+          <p:nvPr/>
+        </p:nvSpPr>
+        <p:spPr>
+          <a:xfrm>
+            <a:off x="411480" y="402336"/>
+            <a:ext cx="82296" cy="329184"/>
+          </a:xfrm>
+          <a:prstGeom prst="rect">
+            <a:avLst/>
+          </a:prstGeom>
+          <a:solidFill>
+            <a:srgbClr val="B45309"/>
+          </a:solidFill>
+          <a:ln/>
+        </p:spPr>
+      </p:sp>
+      <p:sp>
+        <p:nvSpPr>
+          <p:cNvPr id="3" name="Text 1"/>
+          <p:cNvSpPr/>
+          <p:nvPr/>
+        </p:nvSpPr>
+        <p:spPr>
+          <a:xfrm>
+            <a:off x="566928" y="292608"/>
+            <a:ext cx="8138160" cy="548640"/>
           </a:xfrm>
           <a:prstGeom prst="rect">
             <a:avLst/>
@@ -2952,27 +5590,92 @@
               <a:buNone/>
             </a:pPr>
             <a:r>
-              <a:rPr lang="en-US" sz="2400" b="1" dirty="0">
-                <a:solidFill>
-                  <a:srgbClr val="B45309"/>
-                </a:solidFill>
-              </a:rPr>
-              <a:t>Introduction and Energizer (0:00 - 0:05)</a:t>
-            </a:r>
-            <a:endParaRPr lang="en-US" sz="2400" dirty="0"/>
-          </a:p>
-        </p:txBody>
-      </p:sp>
-      <p:sp>
-        <p:nvSpPr>
-          <p:cNvPr id="3" name="Text 1"/>
-          <p:cNvSpPr/>
-          <p:nvPr/>
-        </p:nvSpPr>
-        <p:spPr>
-          <a:xfrm>
-            <a:off x="640080" y="1188720"/>
-            <a:ext cx="7863840" cy="3291840"/>
+              <a:rPr lang="en-US" sz="2100" b="1" dirty="0">
+                <a:solidFill>
+                  <a:srgbClr val="1C1917"/>
+                </a:solidFill>
+                <a:latin typeface="Arial" pitchFamily="34" charset="0"/>
+                <a:ea typeface="Arial" pitchFamily="34" charset="-122"/>
+                <a:cs typeface="Arial" pitchFamily="34" charset="-120"/>
+              </a:rPr>
+              <a:t>Common Forecasting Mistakes</a:t>
+            </a:r>
+            <a:endParaRPr lang="en-US" sz="2100" dirty="0"/>
+          </a:p>
+        </p:txBody>
+      </p:sp>
+      <p:sp>
+        <p:nvSpPr>
+          <p:cNvPr id="4" name="Shape 2"/>
+          <p:cNvSpPr/>
+          <p:nvPr/>
+        </p:nvSpPr>
+        <p:spPr>
+          <a:xfrm>
+            <a:off x="411480" y="960120"/>
+            <a:ext cx="8321040" cy="0"/>
+          </a:xfrm>
+          <a:prstGeom prst="line">
+            <a:avLst/>
+          </a:prstGeom>
+          <a:noFill/>
+          <a:ln w="12700">
+            <a:solidFill>
+              <a:srgbClr val="E7E5E4"/>
+            </a:solidFill>
+            <a:prstDash val="solid"/>
+          </a:ln>
+        </p:spPr>
+      </p:sp>
+      <p:sp>
+        <p:nvSpPr>
+          <p:cNvPr id="5" name="Text 3"/>
+          <p:cNvSpPr/>
+          <p:nvPr/>
+        </p:nvSpPr>
+        <p:spPr>
+          <a:xfrm>
+            <a:off x="411480" y="4864608"/>
+            <a:ext cx="8321040" cy="237744"/>
+          </a:xfrm>
+          <a:prstGeom prst="rect">
+            <a:avLst/>
+          </a:prstGeom>
+          <a:noFill/>
+          <a:ln/>
+        </p:spPr>
+        <p:txBody>
+          <a:bodyPr wrap="square" rtlCol="0" anchor="ctr"/>
+          <a:lstStyle/>
+          <a:p>
+            <a:pPr indent="0" marL="0">
+              <a:buNone/>
+            </a:pPr>
+            <a:r>
+              <a:rPr lang="en-US" sz="750" dirty="0">
+                <a:solidFill>
+                  <a:srgbClr val="AAAAAA"/>
+                </a:solidFill>
+                <a:latin typeface="Arial" pitchFamily="34" charset="0"/>
+                <a:ea typeface="Arial" pitchFamily="34" charset="-122"/>
+                <a:cs typeface="Arial" pitchFamily="34" charset="-120"/>
+              </a:rPr>
+              <a:t>Lesson Forge Pro (owner) — This content is educational material only and does not constitute financial, investment, or trading advice.</a:t>
+            </a:r>
+            <a:endParaRPr lang="en-US" sz="750" dirty="0"/>
+          </a:p>
+        </p:txBody>
+      </p:sp>
+      <p:sp>
+        <p:nvSpPr>
+          <p:cNvPr id="6" name="Text 4"/>
+          <p:cNvSpPr/>
+          <p:nvPr/>
+        </p:nvSpPr>
+        <p:spPr>
+          <a:xfrm>
+            <a:off x="731520" y="1188720"/>
+            <a:ext cx="7680960" cy="2743200"/>
           </a:xfrm>
           <a:prstGeom prst="rect">
             <a:avLst/>
@@ -2984,32 +5687,151 @@
           <a:bodyPr wrap="square" rtlCol="0" anchor="t"/>
           <a:lstStyle/>
           <a:p>
-            <a:pPr marL="342900" indent="-342900">
+            <a:pPr marL="152400" indent="-152400">
+              <a:spcAft>
+                <a:spcPts val="800"/>
+              </a:spcAft>
               <a:buSzPct val="100000"/>
               <a:buChar char="•"/>
             </a:pPr>
             <a:r>
-              <a:rPr lang="en-US" sz="1600" dirty="0">
-                <a:solidFill>
-                  <a:srgbClr val="333333"/>
-                </a:solidFill>
-              </a:rPr>
-              <a:t>Let's start with a quick energizer to get everyone engaged. Imagine you are a financial analyst, and you need to forecast the financial performance of a company</a:t>
-            </a:r>
-            <a:endParaRPr lang="en-US" sz="1600" dirty="0"/>
-          </a:p>
-        </p:txBody>
-      </p:sp>
-      <p:sp>
-        <p:nvSpPr>
-          <p:cNvPr id="4" name="Text 2"/>
-          <p:cNvSpPr/>
-          <p:nvPr/>
-        </p:nvSpPr>
-        <p:spPr>
-          <a:xfrm>
-            <a:off x="457200" y="4709160"/>
-            <a:ext cx="8229600" cy="320040"/>
+              <a:rPr lang="en-US" sz="1500" dirty="0">
+                <a:solidFill>
+                  <a:srgbClr val="1C1917"/>
+                </a:solidFill>
+                <a:latin typeface="Arial" pitchFamily="34" charset="0"/>
+                <a:ea typeface="Arial" pitchFamily="34" charset="-122"/>
+                <a:cs typeface="Arial" pitchFamily="34" charset="-120"/>
+              </a:rPr>
+              <a:t>Circular logic: interest expense loops require iterative calculation enabled in the spreadsheet.</a:t>
+            </a:r>
+            <a:endParaRPr lang="en-US" sz="1500" dirty="0"/>
+          </a:p>
+          <a:p>
+            <a:pPr marL="152400" indent="-152400">
+              <a:spcAft>
+                <a:spcPts val="800"/>
+              </a:spcAft>
+              <a:buSzPct val="100000"/>
+              <a:buChar char="•"/>
+            </a:pPr>
+            <a:r>
+              <a:rPr lang="en-US" sz="1500" dirty="0">
+                <a:solidFill>
+                  <a:srgbClr val="1C1917"/>
+                </a:solidFill>
+                <a:latin typeface="Arial" pitchFamily="34" charset="0"/>
+                <a:ea typeface="Arial" pitchFamily="34" charset="-122"/>
+                <a:cs typeface="Arial" pitchFamily="34" charset="-120"/>
+              </a:rPr>
+              <a:t>Inconsistent drivers: COGS as a fixed dollar amount breaks its link to revenue.</a:t>
+            </a:r>
+            <a:endParaRPr lang="en-US" sz="1500" dirty="0"/>
+          </a:p>
+          <a:p>
+            <a:pPr marL="152400" indent="-152400">
+              <a:spcAft>
+                <a:spcPts val="800"/>
+              </a:spcAft>
+              <a:buSzPct val="100000"/>
+              <a:buChar char="•"/>
+            </a:pPr>
+            <a:r>
+              <a:rPr lang="en-US" sz="1500" dirty="0">
+                <a:solidFill>
+                  <a:srgbClr val="1C1917"/>
+                </a:solidFill>
+                <a:latin typeface="Arial" pitchFamily="34" charset="0"/>
+                <a:ea typeface="Arial" pitchFamily="34" charset="-122"/>
+                <a:cs typeface="Arial" pitchFamily="34" charset="-120"/>
+              </a:rPr>
+              <a:t>Ignoring working capital: growing revenue consumes cash through receivables and inventory.</a:t>
+            </a:r>
+            <a:endParaRPr lang="en-US" sz="1500" dirty="0"/>
+          </a:p>
+          <a:p>
+            <a:pPr marL="152400" indent="-152400">
+              <a:spcAft>
+                <a:spcPts val="800"/>
+              </a:spcAft>
+              <a:buSzPct val="100000"/>
+              <a:buChar char="•"/>
+            </a:pPr>
+            <a:r>
+              <a:rPr lang="en-US" sz="1500" dirty="0">
+                <a:solidFill>
+                  <a:srgbClr val="1C1917"/>
+                </a:solidFill>
+                <a:latin typeface="Arial" pitchFamily="34" charset="0"/>
+                <a:ea typeface="Arial" pitchFamily="34" charset="-122"/>
+                <a:cs typeface="Arial" pitchFamily="34" charset="-120"/>
+              </a:rPr>
+              <a:t>Straight-lining margins without justification ignores competitive and cost pressures.</a:t>
+            </a:r>
+            <a:endParaRPr lang="en-US" sz="1500" dirty="0"/>
+          </a:p>
+          <a:p>
+            <a:pPr marL="152400" indent="-152400">
+              <a:spcAft>
+                <a:spcPts val="800"/>
+              </a:spcAft>
+              <a:buSzPct val="100000"/>
+              <a:buChar char="•"/>
+            </a:pPr>
+            <a:r>
+              <a:rPr lang="en-US" sz="1500" dirty="0">
+                <a:solidFill>
+                  <a:srgbClr val="1C1917"/>
+                </a:solidFill>
+                <a:latin typeface="Arial" pitchFamily="34" charset="0"/>
+                <a:ea typeface="Arial" pitchFamily="34" charset="-122"/>
+                <a:cs typeface="Arial" pitchFamily="34" charset="-120"/>
+              </a:rPr>
+              <a:t>Forgetting to update retained earnings causes unexplained balance sheet imbalances.</a:t>
+            </a:r>
+            <a:endParaRPr lang="en-US" sz="1500" dirty="0"/>
+          </a:p>
+        </p:txBody>
+      </p:sp>
+      <p:sp>
+        <p:nvSpPr>
+          <p:cNvPr id="7" name="Shape 5"/>
+          <p:cNvSpPr/>
+          <p:nvPr/>
+        </p:nvSpPr>
+        <p:spPr>
+          <a:xfrm>
+            <a:off x="731520" y="4041648"/>
+            <a:ext cx="7680960" cy="566928"/>
+          </a:xfrm>
+          <a:prstGeom prst="roundRect">
+            <a:avLst>
+              <a:gd name="adj" fmla="val 12903"/>
+            </a:avLst>
+          </a:prstGeom>
+          <a:solidFill>
+            <a:srgbClr val="B45309">
+              <a:alpha val="12000"/>
+            </a:srgbClr>
+          </a:solidFill>
+          <a:ln w="12700">
+            <a:solidFill>
+              <a:srgbClr val="B45309"/>
+            </a:solidFill>
+            <a:prstDash val="solid"/>
+          </a:ln>
+        </p:spPr>
+      </p:sp>
+      <p:sp>
+        <p:nvSpPr>
+          <p:cNvPr id="8" name="Text 6"/>
+          <p:cNvSpPr/>
+          <p:nvPr/>
+        </p:nvSpPr>
+        <p:spPr>
+          <a:xfrm>
+            <a:off x="868680" y="4087368"/>
+            <a:ext cx="7406640" cy="475488"/>
           </a:xfrm>
           <a:prstGeom prst="rect">
             <a:avLst/>
@@ -3025,14 +5847,31 @@
               <a:buNone/>
             </a:pPr>
             <a:r>
-              <a:rPr lang="en-US" sz="800" dirty="0">
-                <a:solidFill>
-                  <a:srgbClr val="AAAAAA"/>
-                </a:solidFill>
-              </a:rPr>
-              <a:t>Lesson Forge Pro (owner) — This content is educational material only and does not constitute financial, investment, or trading advice.</a:t>
-            </a:r>
-            <a:endParaRPr lang="en-US" sz="800" dirty="0"/>
+              <a:rPr lang="en-US" sz="1100" b="1" dirty="0">
+                <a:solidFill>
+                  <a:srgbClr val="B45309"/>
+                </a:solidFill>
+                <a:latin typeface="Arial" pitchFamily="34" charset="0"/>
+                <a:ea typeface="Arial" pitchFamily="34" charset="-122"/>
+                <a:cs typeface="Arial" pitchFamily="34" charset="-120"/>
+              </a:rPr>
+              <a:t>Takeaway  </a:t>
+            </a:r>
+            <a:pPr indent="0" marL="0">
+              <a:buNone/>
+            </a:pPr>
+            <a:r>
+              <a:rPr lang="en-US" sz="1150" dirty="0">
+                <a:solidFill>
+                  <a:srgbClr val="1C1917"/>
+                </a:solidFill>
+                <a:latin typeface="Arial" pitchFamily="34" charset="0"/>
+                <a:ea typeface="Arial" pitchFamily="34" charset="-122"/>
+                <a:cs typeface="Arial" pitchFamily="34" charset="-120"/>
+              </a:rPr>
+              <a:t>The four most damaging modeling errors all share one root cause: breaking the logical link between drivers and outputs.</a:t>
+            </a:r>
+            <a:endParaRPr lang="en-US" sz="1100" dirty="0"/>
           </a:p>
         </p:txBody>
       </p:sp>
@@ -3044,9 +5883,16 @@
 </p:sld>
 </file>
 
-<file path=ppt/slides/slide6.xml><?xml version="1.0" encoding="utf-8"?>
+<file path=ppt/slides/slide17.xml><?xml version="1.0" encoding="utf-8"?>
 <p:sld xmlns:a="http://schemas.openxmlformats.org/drawingml/2006/main" xmlns:r="http://schemas.openxmlformats.org/officeDocument/2006/relationships" xmlns:p="http://schemas.openxmlformats.org/presentationml/2006/main">
-  <p:cSld name="Slide 6">
+  <p:cSld name="Slide 17">
+    <p:bg>
+      <p:bgPr>
+        <a:solidFill>
+          <a:srgbClr val="FFFFFF"/>
+        </a:solidFill>
+      </p:bgPr>
+    </p:bg>
     <p:spTree>
       <p:nvGrpSpPr>
         <p:cNvPr id="1" name=""/>
@@ -3063,14 +5909,34 @@
       </p:grpSpPr>
       <p:sp>
         <p:nvSpPr>
-          <p:cNvPr id="2" name="Text 0"/>
-          <p:cNvSpPr/>
-          <p:nvPr/>
-        </p:nvSpPr>
-        <p:spPr>
-          <a:xfrm>
-            <a:off x="457200" y="320040"/>
-            <a:ext cx="8229600" cy="731520"/>
+          <p:cNvPr id="2" name="Shape 0"/>
+          <p:cNvSpPr/>
+          <p:nvPr/>
+        </p:nvSpPr>
+        <p:spPr>
+          <a:xfrm>
+            <a:off x="411480" y="402336"/>
+            <a:ext cx="82296" cy="329184"/>
+          </a:xfrm>
+          <a:prstGeom prst="rect">
+            <a:avLst/>
+          </a:prstGeom>
+          <a:solidFill>
+            <a:srgbClr val="B45309"/>
+          </a:solidFill>
+          <a:ln/>
+        </p:spPr>
+      </p:sp>
+      <p:sp>
+        <p:nvSpPr>
+          <p:cNvPr id="3" name="Text 1"/>
+          <p:cNvSpPr/>
+          <p:nvPr/>
+        </p:nvSpPr>
+        <p:spPr>
+          <a:xfrm>
+            <a:off x="566928" y="292608"/>
+            <a:ext cx="8138160" cy="548640"/>
           </a:xfrm>
           <a:prstGeom prst="rect">
             <a:avLst/>
@@ -3086,27 +5952,92 @@
               <a:buNone/>
             </a:pPr>
             <a:r>
-              <a:rPr lang="en-US" sz="2400" b="1" dirty="0">
-                <a:solidFill>
-                  <a:srgbClr val="B45309"/>
-                </a:solidFill>
-              </a:rPr>
-              <a:t>Financial Modeling Overview (0:05 - 0:20)</a:t>
-            </a:r>
-            <a:endParaRPr lang="en-US" sz="2400" dirty="0"/>
-          </a:p>
-        </p:txBody>
-      </p:sp>
-      <p:sp>
-        <p:nvSpPr>
-          <p:cNvPr id="3" name="Text 1"/>
-          <p:cNvSpPr/>
-          <p:nvPr/>
-        </p:nvSpPr>
-        <p:spPr>
-          <a:xfrm>
-            <a:off x="640080" y="1188720"/>
-            <a:ext cx="7863840" cy="3291840"/>
+              <a:rPr lang="en-US" sz="2100" b="1" dirty="0">
+                <a:solidFill>
+                  <a:srgbClr val="1C1917"/>
+                </a:solidFill>
+                <a:latin typeface="Arial" pitchFamily="34" charset="0"/>
+                <a:ea typeface="Arial" pitchFamily="34" charset="-122"/>
+                <a:cs typeface="Arial" pitchFamily="34" charset="-120"/>
+              </a:rPr>
+              <a:t>Worked Example: Flawed Forecast Corrected</a:t>
+            </a:r>
+            <a:endParaRPr lang="en-US" sz="2100" dirty="0"/>
+          </a:p>
+        </p:txBody>
+      </p:sp>
+      <p:sp>
+        <p:nvSpPr>
+          <p:cNvPr id="4" name="Shape 2"/>
+          <p:cNvSpPr/>
+          <p:nvPr/>
+        </p:nvSpPr>
+        <p:spPr>
+          <a:xfrm>
+            <a:off x="411480" y="960120"/>
+            <a:ext cx="8321040" cy="0"/>
+          </a:xfrm>
+          <a:prstGeom prst="line">
+            <a:avLst/>
+          </a:prstGeom>
+          <a:noFill/>
+          <a:ln w="12700">
+            <a:solidFill>
+              <a:srgbClr val="E7E5E4"/>
+            </a:solidFill>
+            <a:prstDash val="solid"/>
+          </a:ln>
+        </p:spPr>
+      </p:sp>
+      <p:sp>
+        <p:nvSpPr>
+          <p:cNvPr id="5" name="Text 3"/>
+          <p:cNvSpPr/>
+          <p:nvPr/>
+        </p:nvSpPr>
+        <p:spPr>
+          <a:xfrm>
+            <a:off x="411480" y="4864608"/>
+            <a:ext cx="8321040" cy="237744"/>
+          </a:xfrm>
+          <a:prstGeom prst="rect">
+            <a:avLst/>
+          </a:prstGeom>
+          <a:noFill/>
+          <a:ln/>
+        </p:spPr>
+        <p:txBody>
+          <a:bodyPr wrap="square" rtlCol="0" anchor="ctr"/>
+          <a:lstStyle/>
+          <a:p>
+            <a:pPr indent="0" marL="0">
+              <a:buNone/>
+            </a:pPr>
+            <a:r>
+              <a:rPr lang="en-US" sz="750" dirty="0">
+                <a:solidFill>
+                  <a:srgbClr val="AAAAAA"/>
+                </a:solidFill>
+                <a:latin typeface="Arial" pitchFamily="34" charset="0"/>
+                <a:ea typeface="Arial" pitchFamily="34" charset="-122"/>
+                <a:cs typeface="Arial" pitchFamily="34" charset="-120"/>
+              </a:rPr>
+              <a:t>Lesson Forge Pro (owner) — This content is educational material only and does not constitute financial, investment, or trading advice.</a:t>
+            </a:r>
+            <a:endParaRPr lang="en-US" sz="750" dirty="0"/>
+          </a:p>
+        </p:txBody>
+      </p:sp>
+      <p:sp>
+        <p:nvSpPr>
+          <p:cNvPr id="6" name="Text 4"/>
+          <p:cNvSpPr/>
+          <p:nvPr/>
+        </p:nvSpPr>
+        <p:spPr>
+          <a:xfrm>
+            <a:off x="731520" y="1188720"/>
+            <a:ext cx="7680960" cy="2743200"/>
           </a:xfrm>
           <a:prstGeom prst="rect">
             <a:avLst/>
@@ -3118,92 +6049,151 @@
           <a:bodyPr wrap="square" rtlCol="0" anchor="t"/>
           <a:lstStyle/>
           <a:p>
-            <a:pPr marL="342900" indent="-342900">
+            <a:pPr marL="152400" indent="-152400">
+              <a:spcAft>
+                <a:spcPts val="800"/>
+              </a:spcAft>
               <a:buSzPct val="100000"/>
               <a:buChar char="•"/>
             </a:pPr>
             <a:r>
-              <a:rPr lang="en-US" sz="1600" dirty="0">
-                <a:solidFill>
-                  <a:srgbClr val="333333"/>
-                </a:solidFill>
-              </a:rPr>
-              <a:t>Financial modeling is like building a house. You need a strong foundation, a clear plan, and the right tools to get the job done. In financial modeling, our fou</a:t>
-            </a:r>
-            <a:endParaRPr lang="en-US" sz="1600" dirty="0"/>
-          </a:p>
-          <a:p>
-            <a:pPr marL="342900" indent="-342900">
+              <a:rPr lang="en-US" sz="1500" dirty="0">
+                <a:solidFill>
+                  <a:srgbClr val="1C1917"/>
+                </a:solidFill>
+                <a:latin typeface="Arial" pitchFamily="34" charset="0"/>
+                <a:ea typeface="Arial" pitchFamily="34" charset="-122"/>
+                <a:cs typeface="Arial" pitchFamily="34" charset="-120"/>
+              </a:rPr>
+              <a:t>Year 0: revenue $10M, COGS 60%, SG&amp;A $1.5M; Year 1 growth = 12%.</a:t>
+            </a:r>
+            <a:endParaRPr lang="en-US" sz="1500" dirty="0"/>
+          </a:p>
+          <a:p>
+            <a:pPr marL="152400" indent="-152400">
+              <a:spcAft>
+                <a:spcPts val="800"/>
+              </a:spcAft>
               <a:buSzPct val="100000"/>
               <a:buChar char="•"/>
             </a:pPr>
             <a:r>
-              <a:rPr lang="en-US" sz="1600" dirty="0">
-                <a:solidFill>
-                  <a:srgbClr val="333333"/>
-                </a:solidFill>
-              </a:rPr>
-              <a:t>Business valuation, stock valuation, and project valuation</a:t>
-            </a:r>
-            <a:endParaRPr lang="en-US" sz="1600" dirty="0"/>
-          </a:p>
-          <a:p>
-            <a:pPr marL="342900" indent="-342900">
+              <a:rPr lang="en-US" sz="1500" dirty="0">
+                <a:solidFill>
+                  <a:srgbClr val="1C1917"/>
+                </a:solidFill>
+                <a:latin typeface="Arial" pitchFamily="34" charset="0"/>
+                <a:ea typeface="Arial" pitchFamily="34" charset="-122"/>
+                <a:cs typeface="Arial" pitchFamily="34" charset="-120"/>
+              </a:rPr>
+              <a:t>Projected revenue: $10M × 1.12 = $11.2M.</a:t>
+            </a:r>
+            <a:endParaRPr lang="en-US" sz="1500" dirty="0"/>
+          </a:p>
+          <a:p>
+            <a:pPr marL="152400" indent="-152400">
+              <a:spcAft>
+                <a:spcPts val="800"/>
+              </a:spcAft>
               <a:buSzPct val="100000"/>
               <a:buChar char="•"/>
             </a:pPr>
             <a:r>
-              <a:rPr lang="en-US" sz="1600" dirty="0">
-                <a:solidFill>
-                  <a:srgbClr val="333333"/>
-                </a:solidFill>
-              </a:rPr>
-              <a:t>Scenario planning, FP&amp;A, and management decision making</a:t>
-            </a:r>
-            <a:endParaRPr lang="en-US" sz="1600" dirty="0"/>
-          </a:p>
-          <a:p>
-            <a:pPr marL="342900" indent="-342900">
+              <a:rPr lang="en-US" sz="1500" dirty="0">
+                <a:solidFill>
+                  <a:srgbClr val="1C1917"/>
+                </a:solidFill>
+                <a:latin typeface="Arial" pitchFamily="34" charset="0"/>
+                <a:ea typeface="Arial" pitchFamily="34" charset="-122"/>
+                <a:cs typeface="Arial" pitchFamily="34" charset="-120"/>
+              </a:rPr>
+              <a:t>Error: analyst left COGS fixed at $6M, overstating gross profit by $720,000.</a:t>
+            </a:r>
+            <a:endParaRPr lang="en-US" sz="1500" dirty="0"/>
+          </a:p>
+          <a:p>
+            <a:pPr marL="152400" indent="-152400">
+              <a:spcAft>
+                <a:spcPts val="800"/>
+              </a:spcAft>
               <a:buSzPct val="100000"/>
               <a:buChar char="•"/>
             </a:pPr>
             <a:r>
-              <a:rPr lang="en-US" sz="1600" dirty="0">
-                <a:solidFill>
-                  <a:srgbClr val="333333"/>
-                </a:solidFill>
-              </a:rPr>
-              <a:t>Budgeting, capital budgeting, and cash flow forecasting</a:t>
-            </a:r>
-            <a:endParaRPr lang="en-US" sz="1600" dirty="0"/>
-          </a:p>
-          <a:p>
-            <a:pPr marL="342900" indent="-342900">
+              <a:rPr lang="en-US" sz="1500" dirty="0">
+                <a:solidFill>
+                  <a:srgbClr val="1C1917"/>
+                </a:solidFill>
+                <a:latin typeface="Arial" pitchFamily="34" charset="0"/>
+                <a:ea typeface="Arial" pitchFamily="34" charset="-122"/>
+                <a:cs typeface="Arial" pitchFamily="34" charset="-120"/>
+              </a:rPr>
+              <a:t>Correct COGS: $11.2M × 60% = $6.72M—always use a percentage-of-revenue driver.</a:t>
+            </a:r>
+            <a:endParaRPr lang="en-US" sz="1500" dirty="0"/>
+          </a:p>
+          <a:p>
+            <a:pPr marL="152400" indent="-152400">
+              <a:spcAft>
+                <a:spcPts val="800"/>
+              </a:spcAft>
               <a:buSzPct val="100000"/>
               <a:buChar char="•"/>
             </a:pPr>
             <a:r>
-              <a:rPr lang="en-US" sz="1600" dirty="0">
-                <a:solidFill>
-                  <a:srgbClr val="333333"/>
-                </a:solidFill>
-              </a:rPr>
-              <a:t>Think of financial modeling like a recipe. You need to combine the right ingredients (data) in the right proportions (assumptions) to get the desired outcome (f</a:t>
-            </a:r>
-            <a:endParaRPr lang="en-US" sz="1600" dirty="0"/>
-          </a:p>
-        </p:txBody>
-      </p:sp>
-      <p:sp>
-        <p:nvSpPr>
-          <p:cNvPr id="4" name="Text 2"/>
-          <p:cNvSpPr/>
-          <p:nvPr/>
-        </p:nvSpPr>
-        <p:spPr>
-          <a:xfrm>
-            <a:off x="457200" y="4709160"/>
-            <a:ext cx="8229600" cy="320040"/>
+              <a:rPr lang="en-US" sz="1500" dirty="0">
+                <a:solidFill>
+                  <a:srgbClr val="1C1917"/>
+                </a:solidFill>
+                <a:latin typeface="Arial" pitchFamily="34" charset="0"/>
+                <a:ea typeface="Arial" pitchFamily="34" charset="-122"/>
+                <a:cs typeface="Arial" pitchFamily="34" charset="-120"/>
+              </a:rPr>
+              <a:t>Every line item must trace to an explicit, defensible, revenue-linked assumption.</a:t>
+            </a:r>
+            <a:endParaRPr lang="en-US" sz="1500" dirty="0"/>
+          </a:p>
+        </p:txBody>
+      </p:sp>
+      <p:sp>
+        <p:nvSpPr>
+          <p:cNvPr id="7" name="Shape 5"/>
+          <p:cNvSpPr/>
+          <p:nvPr/>
+        </p:nvSpPr>
+        <p:spPr>
+          <a:xfrm>
+            <a:off x="731520" y="4041648"/>
+            <a:ext cx="7680960" cy="566928"/>
+          </a:xfrm>
+          <a:prstGeom prst="roundRect">
+            <a:avLst>
+              <a:gd name="adj" fmla="val 12903"/>
+            </a:avLst>
+          </a:prstGeom>
+          <a:solidFill>
+            <a:srgbClr val="B45309">
+              <a:alpha val="12000"/>
+            </a:srgbClr>
+          </a:solidFill>
+          <a:ln w="12700">
+            <a:solidFill>
+              <a:srgbClr val="B45309"/>
+            </a:solidFill>
+            <a:prstDash val="solid"/>
+          </a:ln>
+        </p:spPr>
+      </p:sp>
+      <p:sp>
+        <p:nvSpPr>
+          <p:cNvPr id="8" name="Text 6"/>
+          <p:cNvSpPr/>
+          <p:nvPr/>
+        </p:nvSpPr>
+        <p:spPr>
+          <a:xfrm>
+            <a:off x="868680" y="4087368"/>
+            <a:ext cx="7406640" cy="475488"/>
           </a:xfrm>
           <a:prstGeom prst="rect">
             <a:avLst/>
@@ -3219,14 +6209,31 @@
               <a:buNone/>
             </a:pPr>
             <a:r>
-              <a:rPr lang="en-US" sz="800" dirty="0">
-                <a:solidFill>
-                  <a:srgbClr val="AAAAAA"/>
-                </a:solidFill>
-              </a:rPr>
-              <a:t>Lesson Forge Pro (owner) — This content is educational material only and does not constitute financial, investment, or trading advice.</a:t>
-            </a:r>
-            <a:endParaRPr lang="en-US" sz="800" dirty="0"/>
+              <a:rPr lang="en-US" sz="1100" b="1" dirty="0">
+                <a:solidFill>
+                  <a:srgbClr val="B45309"/>
+                </a:solidFill>
+                <a:latin typeface="Arial" pitchFamily="34" charset="0"/>
+                <a:ea typeface="Arial" pitchFamily="34" charset="-122"/>
+                <a:cs typeface="Arial" pitchFamily="34" charset="-120"/>
+              </a:rPr>
+              <a:t>Takeaway  </a:t>
+            </a:r>
+            <a:pPr indent="0" marL="0">
+              <a:buNone/>
+            </a:pPr>
+            <a:r>
+              <a:rPr lang="en-US" sz="1150" dirty="0">
+                <a:solidFill>
+                  <a:srgbClr val="1C1917"/>
+                </a:solidFill>
+                <a:latin typeface="Arial" pitchFamily="34" charset="0"/>
+                <a:ea typeface="Arial" pitchFamily="34" charset="-122"/>
+                <a:cs typeface="Arial" pitchFamily="34" charset="-120"/>
+              </a:rPr>
+              <a:t>A single fixed-dollar COGS entry can overstate gross profit by hundreds of thousands—always use driver-based forecasting.</a:t>
+            </a:r>
+            <a:endParaRPr lang="en-US" sz="1100" dirty="0"/>
           </a:p>
         </p:txBody>
       </p:sp>
@@ -3238,9 +6245,16 @@
 </p:sld>
 </file>
 
-<file path=ppt/slides/slide7.xml><?xml version="1.0" encoding="utf-8"?>
+<file path=ppt/slides/slide18.xml><?xml version="1.0" encoding="utf-8"?>
 <p:sld xmlns:a="http://schemas.openxmlformats.org/drawingml/2006/main" xmlns:r="http://schemas.openxmlformats.org/officeDocument/2006/relationships" xmlns:p="http://schemas.openxmlformats.org/presentationml/2006/main">
-  <p:cSld name="Slide 7">
+  <p:cSld name="Slide 18">
+    <p:bg>
+      <p:bgPr>
+        <a:solidFill>
+          <a:srgbClr val="FFFFFF"/>
+        </a:solidFill>
+      </p:bgPr>
+    </p:bg>
     <p:spTree>
       <p:nvGrpSpPr>
         <p:cNvPr id="1" name=""/>
@@ -3257,14 +6271,34 @@
       </p:grpSpPr>
       <p:sp>
         <p:nvSpPr>
-          <p:cNvPr id="2" name="Text 0"/>
-          <p:cNvSpPr/>
-          <p:nvPr/>
-        </p:nvSpPr>
-        <p:spPr>
-          <a:xfrm>
-            <a:off x="457200" y="320040"/>
-            <a:ext cx="8229600" cy="731520"/>
+          <p:cNvPr id="2" name="Shape 0"/>
+          <p:cNvSpPr/>
+          <p:nvPr/>
+        </p:nvSpPr>
+        <p:spPr>
+          <a:xfrm>
+            <a:off x="411480" y="402336"/>
+            <a:ext cx="82296" cy="329184"/>
+          </a:xfrm>
+          <a:prstGeom prst="rect">
+            <a:avLst/>
+          </a:prstGeom>
+          <a:solidFill>
+            <a:srgbClr val="B45309"/>
+          </a:solidFill>
+          <a:ln/>
+        </p:spPr>
+      </p:sp>
+      <p:sp>
+        <p:nvSpPr>
+          <p:cNvPr id="3" name="Text 1"/>
+          <p:cNvSpPr/>
+          <p:nvPr/>
+        </p:nvSpPr>
+        <p:spPr>
+          <a:xfrm>
+            <a:off x="566928" y="292608"/>
+            <a:ext cx="8138160" cy="548640"/>
           </a:xfrm>
           <a:prstGeom prst="rect">
             <a:avLst/>
@@ -3280,27 +6314,92 @@
               <a:buNone/>
             </a:pPr>
             <a:r>
-              <a:rPr lang="en-US" sz="2400" b="1" dirty="0">
-                <a:solidFill>
-                  <a:srgbClr val="B45309"/>
-                </a:solidFill>
-              </a:rPr>
-              <a:t>Financial Statement Analysis (0:20 - 0:40)</a:t>
-            </a:r>
-            <a:endParaRPr lang="en-US" sz="2400" dirty="0"/>
-          </a:p>
-        </p:txBody>
-      </p:sp>
-      <p:sp>
-        <p:nvSpPr>
-          <p:cNvPr id="3" name="Text 1"/>
-          <p:cNvSpPr/>
-          <p:nvPr/>
-        </p:nvSpPr>
-        <p:spPr>
-          <a:xfrm>
-            <a:off x="640080" y="1188720"/>
-            <a:ext cx="7863840" cy="3291840"/>
+              <a:rPr lang="en-US" sz="2100" b="1" dirty="0">
+                <a:solidFill>
+                  <a:srgbClr val="1C1917"/>
+                </a:solidFill>
+                <a:latin typeface="Arial" pitchFamily="34" charset="0"/>
+                <a:ea typeface="Arial" pitchFamily="34" charset="-122"/>
+                <a:cs typeface="Arial" pitchFamily="34" charset="-120"/>
+              </a:rPr>
+              <a:t>Sanity Checks Before Finalizing Any Forecast</a:t>
+            </a:r>
+            <a:endParaRPr lang="en-US" sz="2100" dirty="0"/>
+          </a:p>
+        </p:txBody>
+      </p:sp>
+      <p:sp>
+        <p:nvSpPr>
+          <p:cNvPr id="4" name="Shape 2"/>
+          <p:cNvSpPr/>
+          <p:nvPr/>
+        </p:nvSpPr>
+        <p:spPr>
+          <a:xfrm>
+            <a:off x="411480" y="960120"/>
+            <a:ext cx="8321040" cy="0"/>
+          </a:xfrm>
+          <a:prstGeom prst="line">
+            <a:avLst/>
+          </a:prstGeom>
+          <a:noFill/>
+          <a:ln w="12700">
+            <a:solidFill>
+              <a:srgbClr val="E7E5E4"/>
+            </a:solidFill>
+            <a:prstDash val="solid"/>
+          </a:ln>
+        </p:spPr>
+      </p:sp>
+      <p:sp>
+        <p:nvSpPr>
+          <p:cNvPr id="5" name="Text 3"/>
+          <p:cNvSpPr/>
+          <p:nvPr/>
+        </p:nvSpPr>
+        <p:spPr>
+          <a:xfrm>
+            <a:off x="411480" y="4864608"/>
+            <a:ext cx="8321040" cy="237744"/>
+          </a:xfrm>
+          <a:prstGeom prst="rect">
+            <a:avLst/>
+          </a:prstGeom>
+          <a:noFill/>
+          <a:ln/>
+        </p:spPr>
+        <p:txBody>
+          <a:bodyPr wrap="square" rtlCol="0" anchor="ctr"/>
+          <a:lstStyle/>
+          <a:p>
+            <a:pPr indent="0" marL="0">
+              <a:buNone/>
+            </a:pPr>
+            <a:r>
+              <a:rPr lang="en-US" sz="750" dirty="0">
+                <a:solidFill>
+                  <a:srgbClr val="AAAAAA"/>
+                </a:solidFill>
+                <a:latin typeface="Arial" pitchFamily="34" charset="0"/>
+                <a:ea typeface="Arial" pitchFamily="34" charset="-122"/>
+                <a:cs typeface="Arial" pitchFamily="34" charset="-120"/>
+              </a:rPr>
+              <a:t>Lesson Forge Pro (owner) — This content is educational material only and does not constitute financial, investment, or trading advice.</a:t>
+            </a:r>
+            <a:endParaRPr lang="en-US" sz="750" dirty="0"/>
+          </a:p>
+        </p:txBody>
+      </p:sp>
+      <p:sp>
+        <p:nvSpPr>
+          <p:cNvPr id="6" name="Text 4"/>
+          <p:cNvSpPr/>
+          <p:nvPr/>
+        </p:nvSpPr>
+        <p:spPr>
+          <a:xfrm>
+            <a:off x="731520" y="1188720"/>
+            <a:ext cx="7680960" cy="2743200"/>
           </a:xfrm>
           <a:prstGeom prst="rect">
             <a:avLst/>
@@ -3312,107 +6411,151 @@
           <a:bodyPr wrap="square" rtlCol="0" anchor="t"/>
           <a:lstStyle/>
           <a:p>
-            <a:pPr marL="342900" indent="-342900">
+            <a:pPr marL="152400" indent="-152400">
+              <a:spcAft>
+                <a:spcPts val="800"/>
+              </a:spcAft>
               <a:buSzPct val="100000"/>
               <a:buChar char="•"/>
             </a:pPr>
             <a:r>
-              <a:rPr lang="en-US" sz="1600" dirty="0">
-                <a:solidFill>
-                  <a:srgbClr val="333333"/>
-                </a:solidFill>
-              </a:rPr>
-              <a:t>Financial statement analysis is like being a detective. You need to examine the clues (financial statements) to solve the mystery (evaluate business performance</a:t>
-            </a:r>
-            <a:endParaRPr lang="en-US" sz="1600" dirty="0"/>
-          </a:p>
-          <a:p>
-            <a:pPr marL="342900" indent="-342900">
+              <a:rPr lang="en-US" sz="1500" dirty="0">
+                <a:solidFill>
+                  <a:srgbClr val="1C1917"/>
+                </a:solidFill>
+                <a:latin typeface="Arial" pitchFamily="34" charset="0"/>
+                <a:ea typeface="Arial" pitchFamily="34" charset="-122"/>
+                <a:cs typeface="Arial" pitchFamily="34" charset="-120"/>
+              </a:rPr>
+              <a:t>Margin trend test: sudden 500 bps expansion with no explanation is a red flag.</a:t>
+            </a:r>
+            <a:endParaRPr lang="en-US" sz="1500" dirty="0"/>
+          </a:p>
+          <a:p>
+            <a:pPr marL="152400" indent="-152400">
+              <a:spcAft>
+                <a:spcPts val="800"/>
+              </a:spcAft>
               <a:buSzPct val="100000"/>
               <a:buChar char="•"/>
             </a:pPr>
             <a:r>
-              <a:rPr lang="en-US" sz="1600" dirty="0">
-                <a:solidFill>
-                  <a:srgbClr val="333333"/>
-                </a:solidFill>
-              </a:rPr>
-              <a:t>Balance sheet</a:t>
-            </a:r>
-            <a:endParaRPr lang="en-US" sz="1600" dirty="0"/>
-          </a:p>
-          <a:p>
-            <a:pPr marL="342900" indent="-342900">
+              <a:rPr lang="en-US" sz="1500" dirty="0">
+                <a:solidFill>
+                  <a:srgbClr val="1C1917"/>
+                </a:solidFill>
+                <a:latin typeface="Arial" pitchFamily="34" charset="0"/>
+                <a:ea typeface="Arial" pitchFamily="34" charset="-122"/>
+                <a:cs typeface="Arial" pitchFamily="34" charset="-120"/>
+              </a:rPr>
+              <a:t>Balance sheet must balance in every projected period without exception.</a:t>
+            </a:r>
+            <a:endParaRPr lang="en-US" sz="1500" dirty="0"/>
+          </a:p>
+          <a:p>
+            <a:pPr marL="152400" indent="-152400">
+              <a:spcAft>
+                <a:spcPts val="800"/>
+              </a:spcAft>
               <a:buSzPct val="100000"/>
               <a:buChar char="•"/>
             </a:pPr>
             <a:r>
-              <a:rPr lang="en-US" sz="1600" dirty="0">
-                <a:solidFill>
-                  <a:srgbClr val="333333"/>
-                </a:solidFill>
-              </a:rPr>
-              <a:t>Income statement</a:t>
-            </a:r>
-            <a:endParaRPr lang="en-US" sz="1600" dirty="0"/>
-          </a:p>
-          <a:p>
-            <a:pPr marL="342900" indent="-342900">
+              <a:rPr lang="en-US" sz="1500" dirty="0">
+                <a:solidFill>
+                  <a:srgbClr val="1C1917"/>
+                </a:solidFill>
+                <a:latin typeface="Arial" pitchFamily="34" charset="0"/>
+                <a:ea typeface="Arial" pitchFamily="34" charset="-122"/>
+                <a:cs typeface="Arial" pitchFamily="34" charset="-120"/>
+              </a:rPr>
+              <a:t>Reconcile net income through working capital and CapEx to confirm ending cash.</a:t>
+            </a:r>
+            <a:endParaRPr lang="en-US" sz="1500" dirty="0"/>
+          </a:p>
+          <a:p>
+            <a:pPr marL="152400" indent="-152400">
+              <a:spcAft>
+                <a:spcPts val="800"/>
+              </a:spcAft>
               <a:buSzPct val="100000"/>
               <a:buChar char="•"/>
             </a:pPr>
             <a:r>
-              <a:rPr lang="en-US" sz="1600" dirty="0">
-                <a:solidFill>
-                  <a:srgbClr val="333333"/>
-                </a:solidFill>
-              </a:rPr>
-              <a:t>Cash flow statement</a:t>
-            </a:r>
-            <a:endParaRPr lang="en-US" sz="1600" dirty="0"/>
-          </a:p>
-          <a:p>
-            <a:pPr marL="342900" indent="-342900">
+              <a:rPr lang="en-US" sz="1500" dirty="0">
+                <a:solidFill>
+                  <a:srgbClr val="1C1917"/>
+                </a:solidFill>
+                <a:latin typeface="Arial" pitchFamily="34" charset="0"/>
+                <a:ea typeface="Arial" pitchFamily="34" charset="-122"/>
+                <a:cs typeface="Arial" pitchFamily="34" charset="-120"/>
+              </a:rPr>
+              <a:t>Benchmark projected ratios against industry peers and the company's own history.</a:t>
+            </a:r>
+            <a:endParaRPr lang="en-US" sz="1500" dirty="0"/>
+          </a:p>
+          <a:p>
+            <a:pPr marL="152400" indent="-152400">
+              <a:spcAft>
+                <a:spcPts val="800"/>
+              </a:spcAft>
               <a:buSzPct val="100000"/>
               <a:buChar char="•"/>
             </a:pPr>
             <a:r>
-              <a:rPr lang="en-US" sz="1600" dirty="0">
-                <a:solidFill>
-                  <a:srgbClr val="333333"/>
-                </a:solidFill>
-              </a:rPr>
-              <a:t>Statement of changes in equity</a:t>
-            </a:r>
-            <a:endParaRPr lang="en-US" sz="1600" dirty="0"/>
-          </a:p>
-          <a:p>
-            <a:pPr marL="342900" indent="-342900">
-              <a:buSzPct val="100000"/>
-              <a:buChar char="•"/>
-            </a:pPr>
-            <a:r>
-              <a:rPr lang="en-US" sz="1600" dirty="0">
-                <a:solidFill>
-                  <a:srgbClr val="333333"/>
-                </a:solidFill>
-              </a:rPr>
-              <a:t>We will also discuss the management discussion and analysis (MD&amp;A) section, which provides a description of the company's performance and future prospects.</a:t>
-            </a:r>
-            <a:endParaRPr lang="en-US" sz="1600" dirty="0"/>
-          </a:p>
-        </p:txBody>
-      </p:sp>
-      <p:sp>
-        <p:nvSpPr>
-          <p:cNvPr id="4" name="Text 2"/>
-          <p:cNvSpPr/>
-          <p:nvPr/>
-        </p:nvSpPr>
-        <p:spPr>
-          <a:xfrm>
-            <a:off x="457200" y="4709160"/>
-            <a:ext cx="8229600" cy="320040"/>
+              <a:rPr lang="en-US" sz="1500" dirty="0">
+                <a:solidFill>
+                  <a:srgbClr val="1C1917"/>
+                </a:solidFill>
+                <a:latin typeface="Arial" pitchFamily="34" charset="0"/>
+                <a:ea typeface="Arial" pitchFamily="34" charset="-122"/>
+                <a:cs typeface="Arial" pitchFamily="34" charset="-120"/>
+              </a:rPr>
+              <a:t>Reverse-engineer implied assumptions behind any margin that exceeds historical highs.</a:t>
+            </a:r>
+            <a:endParaRPr lang="en-US" sz="1500" dirty="0"/>
+          </a:p>
+        </p:txBody>
+      </p:sp>
+      <p:sp>
+        <p:nvSpPr>
+          <p:cNvPr id="7" name="Shape 5"/>
+          <p:cNvSpPr/>
+          <p:nvPr/>
+        </p:nvSpPr>
+        <p:spPr>
+          <a:xfrm>
+            <a:off x="731520" y="4041648"/>
+            <a:ext cx="7680960" cy="566928"/>
+          </a:xfrm>
+          <a:prstGeom prst="roundRect">
+            <a:avLst>
+              <a:gd name="adj" fmla="val 12903"/>
+            </a:avLst>
+          </a:prstGeom>
+          <a:solidFill>
+            <a:srgbClr val="B45309">
+              <a:alpha val="12000"/>
+            </a:srgbClr>
+          </a:solidFill>
+          <a:ln w="12700">
+            <a:solidFill>
+              <a:srgbClr val="B45309"/>
+            </a:solidFill>
+            <a:prstDash val="solid"/>
+          </a:ln>
+        </p:spPr>
+      </p:sp>
+      <p:sp>
+        <p:nvSpPr>
+          <p:cNvPr id="8" name="Text 6"/>
+          <p:cNvSpPr/>
+          <p:nvPr/>
+        </p:nvSpPr>
+        <p:spPr>
+          <a:xfrm>
+            <a:off x="868680" y="4087368"/>
+            <a:ext cx="7406640" cy="475488"/>
           </a:xfrm>
           <a:prstGeom prst="rect">
             <a:avLst/>
@@ -3428,14 +6571,31 @@
               <a:buNone/>
             </a:pPr>
             <a:r>
-              <a:rPr lang="en-US" sz="800" dirty="0">
-                <a:solidFill>
-                  <a:srgbClr val="AAAAAA"/>
-                </a:solidFill>
-              </a:rPr>
-              <a:t>Lesson Forge Pro (owner) — This content is educational material only and does not constitute financial, investment, or trading advice.</a:t>
-            </a:r>
-            <a:endParaRPr lang="en-US" sz="800" dirty="0"/>
+              <a:rPr lang="en-US" sz="1100" b="1" dirty="0">
+                <a:solidFill>
+                  <a:srgbClr val="B45309"/>
+                </a:solidFill>
+                <a:latin typeface="Arial" pitchFamily="34" charset="0"/>
+                <a:ea typeface="Arial" pitchFamily="34" charset="-122"/>
+                <a:cs typeface="Arial" pitchFamily="34" charset="-120"/>
+              </a:rPr>
+              <a:t>Takeaway  </a:t>
+            </a:r>
+            <a:pPr indent="0" marL="0">
+              <a:buNone/>
+            </a:pPr>
+            <a:r>
+              <a:rPr lang="en-US" sz="1150" dirty="0">
+                <a:solidFill>
+                  <a:srgbClr val="1C1917"/>
+                </a:solidFill>
+                <a:latin typeface="Arial" pitchFamily="34" charset="0"/>
+                <a:ea typeface="Arial" pitchFamily="34" charset="-122"/>
+                <a:cs typeface="Arial" pitchFamily="34" charset="-120"/>
+              </a:rPr>
+              <a:t>Rigorous sanity checks—not just mechanical accuracy—separate a trustworthy forecast from a dangerous one.</a:t>
+            </a:r>
+            <a:endParaRPr lang="en-US" sz="1100" dirty="0"/>
           </a:p>
         </p:txBody>
       </p:sp>
@@ -3447,9 +6607,16 @@
 </p:sld>
 </file>
 
-<file path=ppt/slides/slide8.xml><?xml version="1.0" encoding="utf-8"?>
+<file path=ppt/slides/slide19.xml><?xml version="1.0" encoding="utf-8"?>
 <p:sld xmlns:a="http://schemas.openxmlformats.org/drawingml/2006/main" xmlns:r="http://schemas.openxmlformats.org/officeDocument/2006/relationships" xmlns:p="http://schemas.openxmlformats.org/presentationml/2006/main">
-  <p:cSld name="Slide 8">
+  <p:cSld name="Slide 19">
+    <p:bg>
+      <p:bgPr>
+        <a:solidFill>
+          <a:srgbClr val="FFFFFF"/>
+        </a:solidFill>
+      </p:bgPr>
+    </p:bg>
     <p:spTree>
       <p:nvGrpSpPr>
         <p:cNvPr id="1" name=""/>
@@ -3466,14 +6633,34 @@
       </p:grpSpPr>
       <p:sp>
         <p:nvSpPr>
-          <p:cNvPr id="2" name="Text 0"/>
-          <p:cNvSpPr/>
-          <p:nvPr/>
-        </p:nvSpPr>
-        <p:spPr>
-          <a:xfrm>
-            <a:off x="457200" y="320040"/>
-            <a:ext cx="8229600" cy="731520"/>
+          <p:cNvPr id="2" name="Shape 0"/>
+          <p:cNvSpPr/>
+          <p:nvPr/>
+        </p:nvSpPr>
+        <p:spPr>
+          <a:xfrm>
+            <a:off x="0" y="4480560"/>
+            <a:ext cx="9144000" cy="667512"/>
+          </a:xfrm>
+          <a:prstGeom prst="rect">
+            <a:avLst/>
+          </a:prstGeom>
+          <a:solidFill>
+            <a:srgbClr val="B45309"/>
+          </a:solidFill>
+          <a:ln/>
+        </p:spPr>
+      </p:sp>
+      <p:sp>
+        <p:nvSpPr>
+          <p:cNvPr id="3" name="Text 1"/>
+          <p:cNvSpPr/>
+          <p:nvPr/>
+        </p:nvSpPr>
+        <p:spPr>
+          <a:xfrm>
+            <a:off x="685800" y="2148840"/>
+            <a:ext cx="7863840" cy="548640"/>
           </a:xfrm>
           <a:prstGeom prst="rect">
             <a:avLst/>
@@ -3489,51 +6676,17 @@
               <a:buNone/>
             </a:pPr>
             <a:r>
-              <a:rPr lang="en-US" sz="2400" b="1" dirty="0">
-                <a:solidFill>
-                  <a:srgbClr val="B45309"/>
-                </a:solidFill>
-              </a:rPr>
-              <a:t>Break (0:40 - 0:50)</a:t>
-            </a:r>
-            <a:endParaRPr lang="en-US" sz="2400" dirty="0"/>
-          </a:p>
-        </p:txBody>
-      </p:sp>
-      <p:sp>
-        <p:nvSpPr>
-          <p:cNvPr id="3" name="Text 1"/>
-          <p:cNvSpPr/>
-          <p:nvPr/>
-        </p:nvSpPr>
-        <p:spPr>
-          <a:xfrm>
-            <a:off x="640080" y="1188720"/>
-            <a:ext cx="7863840" cy="3291840"/>
-          </a:xfrm>
-          <a:prstGeom prst="rect">
-            <a:avLst/>
-          </a:prstGeom>
-          <a:noFill/>
-          <a:ln/>
-        </p:spPr>
-        <p:txBody>
-          <a:bodyPr wrap="square" rtlCol="0" anchor="t"/>
-          <a:lstStyle/>
-          <a:p>
-            <a:pPr marL="342900" indent="-342900">
-              <a:buSzPct val="100000"/>
-              <a:buChar char="•"/>
-            </a:pPr>
-            <a:r>
-              <a:rPr lang="en-US" sz="1600" dirty="0">
-                <a:solidFill>
-                  <a:srgbClr val="333333"/>
-                </a:solidFill>
-              </a:rPr>
-              <a:t>Take a 10-minute break to stretch, grab a snack, and refresh your minds.</a:t>
-            </a:r>
-            <a:endParaRPr lang="en-US" sz="1600" dirty="0"/>
+              <a:rPr lang="en-US" sz="2000" b="1" dirty="0">
+                <a:solidFill>
+                  <a:srgbClr val="1C1917"/>
+                </a:solidFill>
+                <a:latin typeface="Arial" pitchFamily="34" charset="0"/>
+                <a:ea typeface="Arial" pitchFamily="34" charset="-122"/>
+                <a:cs typeface="Arial" pitchFamily="34" charset="-120"/>
+              </a:rPr>
+              <a:t>Next: practice problems in your textbook chapter</a:t>
+            </a:r>
+            <a:endParaRPr lang="en-US" sz="2000" dirty="0"/>
           </a:p>
         </p:txBody>
       </p:sp>
@@ -3545,8 +6698,8 @@
         </p:nvSpPr>
         <p:spPr>
           <a:xfrm>
-            <a:off x="457200" y="4709160"/>
-            <a:ext cx="8229600" cy="320040"/>
+            <a:off x="685800" y="4599432"/>
+            <a:ext cx="7863840" cy="411480"/>
           </a:xfrm>
           <a:prstGeom prst="rect">
             <a:avLst/>
@@ -3562,14 +6715,17 @@
               <a:buNone/>
             </a:pPr>
             <a:r>
-              <a:rPr lang="en-US" sz="800" dirty="0">
-                <a:solidFill>
-                  <a:srgbClr val="AAAAAA"/>
-                </a:solidFill>
+              <a:rPr lang="en-US" sz="1100" dirty="0">
+                <a:solidFill>
+                  <a:srgbClr val="FFFFFF"/>
+                </a:solidFill>
+                <a:latin typeface="Arial" pitchFamily="34" charset="0"/>
+                <a:ea typeface="Arial" pitchFamily="34" charset="-122"/>
+                <a:cs typeface="Arial" pitchFamily="34" charset="-120"/>
               </a:rPr>
               <a:t>Lesson Forge Pro (owner) — This content is educational material only and does not constitute financial, investment, or trading advice.</a:t>
             </a:r>
-            <a:endParaRPr lang="en-US" sz="800" dirty="0"/>
+            <a:endParaRPr lang="en-US" sz="1100" dirty="0"/>
           </a:p>
         </p:txBody>
       </p:sp>
@@ -3581,9 +6737,16 @@
 </p:sld>
 </file>
 
-<file path=ppt/slides/slide9.xml><?xml version="1.0" encoding="utf-8"?>
+<file path=ppt/slides/slide2.xml><?xml version="1.0" encoding="utf-8"?>
 <p:sld xmlns:a="http://schemas.openxmlformats.org/drawingml/2006/main" xmlns:r="http://schemas.openxmlformats.org/officeDocument/2006/relationships" xmlns:p="http://schemas.openxmlformats.org/presentationml/2006/main">
-  <p:cSld name="Slide 9">
+  <p:cSld name="Slide 2">
+    <p:bg>
+      <p:bgPr>
+        <a:solidFill>
+          <a:srgbClr val="FFFFFF"/>
+        </a:solidFill>
+      </p:bgPr>
+    </p:bg>
     <p:spTree>
       <p:nvGrpSpPr>
         <p:cNvPr id="1" name=""/>
@@ -3600,14 +6763,34 @@
       </p:grpSpPr>
       <p:sp>
         <p:nvSpPr>
-          <p:cNvPr id="2" name="Text 0"/>
-          <p:cNvSpPr/>
-          <p:nvPr/>
-        </p:nvSpPr>
-        <p:spPr>
-          <a:xfrm>
-            <a:off x="457200" y="320040"/>
-            <a:ext cx="8229600" cy="731520"/>
+          <p:cNvPr id="2" name="Shape 0"/>
+          <p:cNvSpPr/>
+          <p:nvPr/>
+        </p:nvSpPr>
+        <p:spPr>
+          <a:xfrm>
+            <a:off x="411480" y="402336"/>
+            <a:ext cx="82296" cy="329184"/>
+          </a:xfrm>
+          <a:prstGeom prst="rect">
+            <a:avLst/>
+          </a:prstGeom>
+          <a:solidFill>
+            <a:srgbClr val="B45309"/>
+          </a:solidFill>
+          <a:ln/>
+        </p:spPr>
+      </p:sp>
+      <p:sp>
+        <p:nvSpPr>
+          <p:cNvPr id="3" name="Text 1"/>
+          <p:cNvSpPr/>
+          <p:nvPr/>
+        </p:nvSpPr>
+        <p:spPr>
+          <a:xfrm>
+            <a:off x="566928" y="292608"/>
+            <a:ext cx="8138160" cy="548640"/>
           </a:xfrm>
           <a:prstGeom prst="rect">
             <a:avLst/>
@@ -3623,16 +6806,428 @@
               <a:buNone/>
             </a:pPr>
             <a:r>
-              <a:rPr lang="en-US" sz="2400" b="1" dirty="0">
-                <a:solidFill>
-                  <a:srgbClr val="B45309"/>
-                </a:solidFill>
-              </a:rPr>
-              <a:t>Key Financial Ratios and Metrics (0:50 - 1:10)</a:t>
-            </a:r>
-            <a:endParaRPr lang="en-US" sz="2400" dirty="0"/>
-          </a:p>
-        </p:txBody>
+              <a:rPr lang="en-US" sz="2100" b="1" dirty="0">
+                <a:solidFill>
+                  <a:srgbClr val="1C1917"/>
+                </a:solidFill>
+                <a:latin typeface="Arial" pitchFamily="34" charset="0"/>
+                <a:ea typeface="Arial" pitchFamily="34" charset="-122"/>
+                <a:cs typeface="Arial" pitchFamily="34" charset="-120"/>
+              </a:rPr>
+              <a:t>Today's agenda</a:t>
+            </a:r>
+            <a:endParaRPr lang="en-US" sz="2100" dirty="0"/>
+          </a:p>
+        </p:txBody>
+      </p:sp>
+      <p:sp>
+        <p:nvSpPr>
+          <p:cNvPr id="4" name="Shape 2"/>
+          <p:cNvSpPr/>
+          <p:nvPr/>
+        </p:nvSpPr>
+        <p:spPr>
+          <a:xfrm>
+            <a:off x="411480" y="960120"/>
+            <a:ext cx="8321040" cy="0"/>
+          </a:xfrm>
+          <a:prstGeom prst="line">
+            <a:avLst/>
+          </a:prstGeom>
+          <a:noFill/>
+          <a:ln w="12700">
+            <a:solidFill>
+              <a:srgbClr val="E7E5E4"/>
+            </a:solidFill>
+            <a:prstDash val="solid"/>
+          </a:ln>
+        </p:spPr>
+      </p:sp>
+      <p:sp>
+        <p:nvSpPr>
+          <p:cNvPr id="5" name="Text 3"/>
+          <p:cNvSpPr/>
+          <p:nvPr/>
+        </p:nvSpPr>
+        <p:spPr>
+          <a:xfrm>
+            <a:off x="411480" y="4864608"/>
+            <a:ext cx="8321040" cy="237744"/>
+          </a:xfrm>
+          <a:prstGeom prst="rect">
+            <a:avLst/>
+          </a:prstGeom>
+          <a:noFill/>
+          <a:ln/>
+        </p:spPr>
+        <p:txBody>
+          <a:bodyPr wrap="square" rtlCol="0" anchor="ctr"/>
+          <a:lstStyle/>
+          <a:p>
+            <a:pPr indent="0" marL="0">
+              <a:buNone/>
+            </a:pPr>
+            <a:r>
+              <a:rPr lang="en-US" sz="750" dirty="0">
+                <a:solidFill>
+                  <a:srgbClr val="AAAAAA"/>
+                </a:solidFill>
+                <a:latin typeface="Arial" pitchFamily="34" charset="0"/>
+                <a:ea typeface="Arial" pitchFamily="34" charset="-122"/>
+                <a:cs typeface="Arial" pitchFamily="34" charset="-120"/>
+              </a:rPr>
+              <a:t>Lesson Forge Pro (owner) — This content is educational material only and does not constitute financial, investment, or trading advice.</a:t>
+            </a:r>
+            <a:endParaRPr lang="en-US" sz="750" dirty="0"/>
+          </a:p>
+        </p:txBody>
+      </p:sp>
+      <p:sp>
+        <p:nvSpPr>
+          <p:cNvPr id="6" name="Text 4"/>
+          <p:cNvSpPr/>
+          <p:nvPr/>
+        </p:nvSpPr>
+        <p:spPr>
+          <a:xfrm>
+            <a:off x="731520" y="1234440"/>
+            <a:ext cx="7680960" cy="3383280"/>
+          </a:xfrm>
+          <a:prstGeom prst="rect">
+            <a:avLst/>
+          </a:prstGeom>
+          <a:noFill/>
+          <a:ln/>
+        </p:spPr>
+        <p:txBody>
+          <a:bodyPr wrap="square" rtlCol="0" anchor="t"/>
+          <a:lstStyle/>
+          <a:p>
+            <a:pPr marL="177800" indent="-177800">
+              <a:spcAft>
+                <a:spcPts val="1000"/>
+              </a:spcAft>
+              <a:buSzPct val="100000"/>
+              <a:buChar char="▪"/>
+            </a:pPr>
+            <a:r>
+              <a:rPr lang="en-US" sz="1600" dirty="0">
+                <a:solidFill>
+                  <a:srgbClr val="1C1917"/>
+                </a:solidFill>
+                <a:latin typeface="Arial" pitchFamily="34" charset="0"/>
+                <a:ea typeface="Arial" pitchFamily="34" charset="-122"/>
+                <a:cs typeface="Arial" pitchFamily="34" charset="-120"/>
+              </a:rPr>
+              <a:t>Concepts and Vocabulary</a:t>
+            </a:r>
+            <a:endParaRPr lang="en-US" sz="1600" dirty="0"/>
+          </a:p>
+          <a:p>
+            <a:pPr marL="177800" indent="-177800">
+              <a:spcAft>
+                <a:spcPts val="1000"/>
+              </a:spcAft>
+              <a:buSzPct val="100000"/>
+              <a:buChar char="▪"/>
+            </a:pPr>
+            <a:r>
+              <a:rPr lang="en-US" sz="1600" dirty="0">
+                <a:solidFill>
+                  <a:srgbClr val="1C1917"/>
+                </a:solidFill>
+                <a:latin typeface="Arial" pitchFamily="34" charset="0"/>
+                <a:ea typeface="Arial" pitchFamily="34" charset="-122"/>
+                <a:cs typeface="Arial" pitchFamily="34" charset="-120"/>
+              </a:rPr>
+              <a:t>Core Definitions</a:t>
+            </a:r>
+            <a:endParaRPr lang="en-US" sz="1600" dirty="0"/>
+          </a:p>
+          <a:p>
+            <a:pPr marL="177800" indent="-177800">
+              <a:spcAft>
+                <a:spcPts val="1000"/>
+              </a:spcAft>
+              <a:buSzPct val="100000"/>
+              <a:buChar char="▪"/>
+            </a:pPr>
+            <a:r>
+              <a:rPr lang="en-US" sz="1600" dirty="0">
+                <a:solidFill>
+                  <a:srgbClr val="1C1917"/>
+                </a:solidFill>
+                <a:latin typeface="Arial" pitchFamily="34" charset="0"/>
+                <a:ea typeface="Arial" pitchFamily="34" charset="-122"/>
+                <a:cs typeface="Arial" pitchFamily="34" charset="-120"/>
+              </a:rPr>
+              <a:t>Where Financial Forecasting Fits in Practice</a:t>
+            </a:r>
+            <a:endParaRPr lang="en-US" sz="1600" dirty="0"/>
+          </a:p>
+          <a:p>
+            <a:pPr marL="177800" indent="-177800">
+              <a:spcAft>
+                <a:spcPts val="1000"/>
+              </a:spcAft>
+              <a:buSzPct val="100000"/>
+              <a:buChar char="▪"/>
+            </a:pPr>
+            <a:r>
+              <a:rPr lang="en-US" sz="1600" dirty="0">
+                <a:solidFill>
+                  <a:srgbClr val="1C1917"/>
+                </a:solidFill>
+                <a:latin typeface="Arial" pitchFamily="34" charset="0"/>
+                <a:ea typeface="Arial" pitchFamily="34" charset="-122"/>
+                <a:cs typeface="Arial" pitchFamily="34" charset="-120"/>
+              </a:rPr>
+              <a:t>Notation and Core Linkage Formula</a:t>
+            </a:r>
+            <a:endParaRPr lang="en-US" sz="1600" dirty="0"/>
+          </a:p>
+          <a:p>
+            <a:pPr marL="177800" indent="-177800">
+              <a:spcAft>
+                <a:spcPts val="1000"/>
+              </a:spcAft>
+              <a:buSzPct val="100000"/>
+              <a:buChar char="▪"/>
+            </a:pPr>
+            <a:r>
+              <a:rPr lang="en-US" sz="1600" dirty="0">
+                <a:solidFill>
+                  <a:srgbClr val="1C1917"/>
+                </a:solidFill>
+                <a:latin typeface="Arial" pitchFamily="34" charset="0"/>
+                <a:ea typeface="Arial" pitchFamily="34" charset="-122"/>
+                <a:cs typeface="Arial" pitchFamily="34" charset="-120"/>
+              </a:rPr>
+              <a:t>Worked Example: Terminology Applied</a:t>
+            </a:r>
+            <a:endParaRPr lang="en-US" sz="1600" dirty="0"/>
+          </a:p>
+          <a:p>
+            <a:pPr marL="177800" indent="-177800">
+              <a:spcAft>
+                <a:spcPts val="1000"/>
+              </a:spcAft>
+              <a:buSzPct val="100000"/>
+              <a:buChar char="▪"/>
+            </a:pPr>
+            <a:r>
+              <a:rPr lang="en-US" sz="1600" dirty="0">
+                <a:solidFill>
+                  <a:srgbClr val="1C1917"/>
+                </a:solidFill>
+                <a:latin typeface="Arial" pitchFamily="34" charset="0"/>
+                <a:ea typeface="Arial" pitchFamily="34" charset="-122"/>
+                <a:cs typeface="Arial" pitchFamily="34" charset="-120"/>
+              </a:rPr>
+              <a:t>Inputs: What You Need Before Modeling</a:t>
+            </a:r>
+            <a:endParaRPr lang="en-US" sz="1600" dirty="0"/>
+          </a:p>
+          <a:p>
+            <a:pPr marL="177800" indent="-177800">
+              <a:spcAft>
+                <a:spcPts val="1000"/>
+              </a:spcAft>
+              <a:buSzPct val="100000"/>
+              <a:buChar char="▪"/>
+            </a:pPr>
+            <a:r>
+              <a:rPr lang="en-US" sz="1600" dirty="0">
+                <a:solidFill>
+                  <a:srgbClr val="1C1917"/>
+                </a:solidFill>
+                <a:latin typeface="Arial" pitchFamily="34" charset="0"/>
+                <a:ea typeface="Arial" pitchFamily="34" charset="-122"/>
+                <a:cs typeface="Arial" pitchFamily="34" charset="-120"/>
+              </a:rPr>
+              <a:t>The Standard Forecasting Steps</a:t>
+            </a:r>
+            <a:endParaRPr lang="en-US" sz="1600" dirty="0"/>
+          </a:p>
+          <a:p>
+            <a:pPr marL="177800" indent="-177800">
+              <a:spcAft>
+                <a:spcPts val="1000"/>
+              </a:spcAft>
+              <a:buSzPct val="100000"/>
+              <a:buChar char="▪"/>
+            </a:pPr>
+            <a:r>
+              <a:rPr lang="en-US" sz="1600" dirty="0">
+                <a:solidFill>
+                  <a:srgbClr val="1C1917"/>
+                </a:solidFill>
+                <a:latin typeface="Arial" pitchFamily="34" charset="0"/>
+                <a:ea typeface="Arial" pitchFamily="34" charset="-122"/>
+                <a:cs typeface="Arial" pitchFamily="34" charset="-120"/>
+              </a:rPr>
+              <a:t>Worked Example: Ridgeline Manufacturing Year 1</a:t>
+            </a:r>
+            <a:endParaRPr lang="en-US" sz="1600" dirty="0"/>
+          </a:p>
+          <a:p>
+            <a:pPr marL="177800" indent="-177800">
+              <a:spcAft>
+                <a:spcPts val="1000"/>
+              </a:spcAft>
+              <a:buSzPct val="100000"/>
+              <a:buChar char="▪"/>
+            </a:pPr>
+            <a:r>
+              <a:rPr lang="en-US" sz="1600" dirty="0">
+                <a:solidFill>
+                  <a:srgbClr val="1C1917"/>
+                </a:solidFill>
+                <a:latin typeface="Arial" pitchFamily="34" charset="0"/>
+                <a:ea typeface="Arial" pitchFamily="34" charset="-122"/>
+                <a:cs typeface="Arial" pitchFamily="34" charset="-120"/>
+              </a:rPr>
+              <a:t>Outputs and Integrity Checks</a:t>
+            </a:r>
+            <a:endParaRPr lang="en-US" sz="1600" dirty="0"/>
+          </a:p>
+          <a:p>
+            <a:pPr marL="177800" indent="-177800">
+              <a:spcAft>
+                <a:spcPts val="1000"/>
+              </a:spcAft>
+              <a:buSzPct val="100000"/>
+              <a:buChar char="▪"/>
+            </a:pPr>
+            <a:r>
+              <a:rPr lang="en-US" sz="1600" dirty="0">
+                <a:solidFill>
+                  <a:srgbClr val="1C1917"/>
+                </a:solidFill>
+                <a:latin typeface="Arial" pitchFamily="34" charset="0"/>
+                <a:ea typeface="Arial" pitchFamily="34" charset="-122"/>
+                <a:cs typeface="Arial" pitchFamily="34" charset="-120"/>
+              </a:rPr>
+              <a:t>Typical Use Cases for Forecasted Statements</a:t>
+            </a:r>
+            <a:endParaRPr lang="en-US" sz="1600" dirty="0"/>
+          </a:p>
+          <a:p>
+            <a:pPr marL="177800" indent="-177800">
+              <a:spcAft>
+                <a:spcPts val="1000"/>
+              </a:spcAft>
+              <a:buSzPct val="100000"/>
+              <a:buChar char="▪"/>
+            </a:pPr>
+            <a:r>
+              <a:rPr lang="en-US" sz="1600" dirty="0">
+                <a:solidFill>
+                  <a:srgbClr val="1C1917"/>
+                </a:solidFill>
+                <a:latin typeface="Arial" pitchFamily="34" charset="0"/>
+                <a:ea typeface="Arial" pitchFamily="34" charset="-122"/>
+                <a:cs typeface="Arial" pitchFamily="34" charset="-120"/>
+              </a:rPr>
+              <a:t>Common Forecasting Mistakes</a:t>
+            </a:r>
+            <a:endParaRPr lang="en-US" sz="1600" dirty="0"/>
+          </a:p>
+          <a:p>
+            <a:pPr marL="177800" indent="-177800">
+              <a:spcAft>
+                <a:spcPts val="1000"/>
+              </a:spcAft>
+              <a:buSzPct val="100000"/>
+              <a:buChar char="▪"/>
+            </a:pPr>
+            <a:r>
+              <a:rPr lang="en-US" sz="1600" dirty="0">
+                <a:solidFill>
+                  <a:srgbClr val="1C1917"/>
+                </a:solidFill>
+                <a:latin typeface="Arial" pitchFamily="34" charset="0"/>
+                <a:ea typeface="Arial" pitchFamily="34" charset="-122"/>
+                <a:cs typeface="Arial" pitchFamily="34" charset="-120"/>
+              </a:rPr>
+              <a:t>Worked Example: Flawed Forecast Corrected</a:t>
+            </a:r>
+            <a:endParaRPr lang="en-US" sz="1600" dirty="0"/>
+          </a:p>
+          <a:p>
+            <a:pPr marL="177800" indent="-177800">
+              <a:spcAft>
+                <a:spcPts val="1000"/>
+              </a:spcAft>
+              <a:buSzPct val="100000"/>
+              <a:buChar char="▪"/>
+            </a:pPr>
+            <a:r>
+              <a:rPr lang="en-US" sz="1600" dirty="0">
+                <a:solidFill>
+                  <a:srgbClr val="1C1917"/>
+                </a:solidFill>
+                <a:latin typeface="Arial" pitchFamily="34" charset="0"/>
+                <a:ea typeface="Arial" pitchFamily="34" charset="-122"/>
+                <a:cs typeface="Arial" pitchFamily="34" charset="-120"/>
+              </a:rPr>
+              <a:t>Sanity Checks Before Finalizing Any Forecast</a:t>
+            </a:r>
+            <a:endParaRPr lang="en-US" sz="1600" dirty="0"/>
+          </a:p>
+        </p:txBody>
+      </p:sp>
+    </p:spTree>
+  </p:cSld>
+  <p:clrMapOvr>
+    <a:masterClrMapping/>
+  </p:clrMapOvr>
+</p:sld>
+</file>
+
+<file path=ppt/slides/slide3.xml><?xml version="1.0" encoding="utf-8"?>
+<p:sld xmlns:a="http://schemas.openxmlformats.org/drawingml/2006/main" xmlns:r="http://schemas.openxmlformats.org/officeDocument/2006/relationships" xmlns:p="http://schemas.openxmlformats.org/presentationml/2006/main">
+  <p:cSld name="Slide 3">
+    <p:bg>
+      <p:bgPr>
+        <a:solidFill>
+          <a:srgbClr val="FFFFFF"/>
+        </a:solidFill>
+      </p:bgPr>
+    </p:bg>
+    <p:spTree>
+      <p:nvGrpSpPr>
+        <p:cNvPr id="1" name=""/>
+        <p:cNvGrpSpPr/>
+        <p:nvPr/>
+      </p:nvGrpSpPr>
+      <p:grpSpPr>
+        <a:xfrm>
+          <a:off x="0" y="0"/>
+          <a:ext cx="0" cy="0"/>
+          <a:chOff x="0" y="0"/>
+          <a:chExt cx="0" cy="0"/>
+        </a:xfrm>
+      </p:grpSpPr>
+      <p:sp>
+        <p:nvSpPr>
+          <p:cNvPr id="2" name="Shape 0"/>
+          <p:cNvSpPr/>
+          <p:nvPr/>
+        </p:nvSpPr>
+        <p:spPr>
+          <a:xfrm>
+            <a:off x="411480" y="402336"/>
+            <a:ext cx="82296" cy="329184"/>
+          </a:xfrm>
+          <a:prstGeom prst="rect">
+            <a:avLst/>
+          </a:prstGeom>
+          <a:solidFill>
+            <a:srgbClr val="B45309"/>
+          </a:solidFill>
+          <a:ln/>
+        </p:spPr>
       </p:sp>
       <p:sp>
         <p:nvSpPr>
@@ -3642,8 +7237,109 @@
         </p:nvSpPr>
         <p:spPr>
           <a:xfrm>
-            <a:off x="640080" y="1188720"/>
-            <a:ext cx="7863840" cy="3291840"/>
+            <a:off x="566928" y="292608"/>
+            <a:ext cx="8138160" cy="548640"/>
+          </a:xfrm>
+          <a:prstGeom prst="rect">
+            <a:avLst/>
+          </a:prstGeom>
+          <a:noFill/>
+          <a:ln/>
+        </p:spPr>
+        <p:txBody>
+          <a:bodyPr wrap="square" rtlCol="0" anchor="ctr"/>
+          <a:lstStyle/>
+          <a:p>
+            <a:pPr indent="0" marL="0">
+              <a:buNone/>
+            </a:pPr>
+            <a:r>
+              <a:rPr lang="en-US" sz="2100" b="1" dirty="0">
+                <a:solidFill>
+                  <a:srgbClr val="1C1917"/>
+                </a:solidFill>
+                <a:latin typeface="Arial" pitchFamily="34" charset="0"/>
+                <a:ea typeface="Arial" pitchFamily="34" charset="-122"/>
+                <a:cs typeface="Arial" pitchFamily="34" charset="-120"/>
+              </a:rPr>
+              <a:t>Concepts and Vocabulary</a:t>
+            </a:r>
+            <a:endParaRPr lang="en-US" sz="2100" dirty="0"/>
+          </a:p>
+        </p:txBody>
+      </p:sp>
+      <p:sp>
+        <p:nvSpPr>
+          <p:cNvPr id="4" name="Shape 2"/>
+          <p:cNvSpPr/>
+          <p:nvPr/>
+        </p:nvSpPr>
+        <p:spPr>
+          <a:xfrm>
+            <a:off x="411480" y="960120"/>
+            <a:ext cx="8321040" cy="0"/>
+          </a:xfrm>
+          <a:prstGeom prst="line">
+            <a:avLst/>
+          </a:prstGeom>
+          <a:noFill/>
+          <a:ln w="12700">
+            <a:solidFill>
+              <a:srgbClr val="E7E5E4"/>
+            </a:solidFill>
+            <a:prstDash val="solid"/>
+          </a:ln>
+        </p:spPr>
+      </p:sp>
+      <p:sp>
+        <p:nvSpPr>
+          <p:cNvPr id="5" name="Text 3"/>
+          <p:cNvSpPr/>
+          <p:nvPr/>
+        </p:nvSpPr>
+        <p:spPr>
+          <a:xfrm>
+            <a:off x="411480" y="4864608"/>
+            <a:ext cx="8321040" cy="237744"/>
+          </a:xfrm>
+          <a:prstGeom prst="rect">
+            <a:avLst/>
+          </a:prstGeom>
+          <a:noFill/>
+          <a:ln/>
+        </p:spPr>
+        <p:txBody>
+          <a:bodyPr wrap="square" rtlCol="0" anchor="ctr"/>
+          <a:lstStyle/>
+          <a:p>
+            <a:pPr indent="0" marL="0">
+              <a:buNone/>
+            </a:pPr>
+            <a:r>
+              <a:rPr lang="en-US" sz="750" dirty="0">
+                <a:solidFill>
+                  <a:srgbClr val="AAAAAA"/>
+                </a:solidFill>
+                <a:latin typeface="Arial" pitchFamily="34" charset="0"/>
+                <a:ea typeface="Arial" pitchFamily="34" charset="-122"/>
+                <a:cs typeface="Arial" pitchFamily="34" charset="-120"/>
+              </a:rPr>
+              <a:t>Lesson Forge Pro (owner) — This content is educational material only and does not constitute financial, investment, or trading advice.</a:t>
+            </a:r>
+            <a:endParaRPr lang="en-US" sz="750" dirty="0"/>
+          </a:p>
+        </p:txBody>
+      </p:sp>
+      <p:sp>
+        <p:nvSpPr>
+          <p:cNvPr id="6" name="Text 4"/>
+          <p:cNvSpPr/>
+          <p:nvPr/>
+        </p:nvSpPr>
+        <p:spPr>
+          <a:xfrm>
+            <a:off x="731520" y="1188720"/>
+            <a:ext cx="7680960" cy="2743200"/>
           </a:xfrm>
           <a:prstGeom prst="rect">
             <a:avLst/>
@@ -3655,107 +7351,492 @@
           <a:bodyPr wrap="square" rtlCol="0" anchor="t"/>
           <a:lstStyle/>
           <a:p>
-            <a:pPr marL="342900" indent="-342900">
+            <a:pPr marL="152400" indent="-152400">
+              <a:spcAft>
+                <a:spcPts val="800"/>
+              </a:spcAft>
               <a:buSzPct val="100000"/>
               <a:buChar char="•"/>
             </a:pPr>
             <a:r>
-              <a:rPr lang="en-US" sz="1600" dirty="0">
-                <a:solidFill>
-                  <a:srgbClr val="333333"/>
-                </a:solidFill>
-              </a:rPr>
-              <a:t>Financial ratios and metrics are like a dashboard in a car. They provide a quick snapshot of the company's performance and help you navigate the road ahead. Let</a:t>
-            </a:r>
-            <a:endParaRPr lang="en-US" sz="1600" dirty="0"/>
-          </a:p>
-          <a:p>
-            <a:pPr marL="342900" indent="-342900">
+              <a:rPr lang="en-US" sz="1500" dirty="0">
+                <a:solidFill>
+                  <a:srgbClr val="1C1917"/>
+                </a:solidFill>
+                <a:latin typeface="Arial" pitchFamily="34" charset="0"/>
+                <a:ea typeface="Arial" pitchFamily="34" charset="-122"/>
+                <a:cs typeface="Arial" pitchFamily="34" charset="-120"/>
+              </a:rPr>
+              <a:t>Financial forecasting bridges accounting, corporate finance, and strategic planning.</a:t>
+            </a:r>
+            <a:endParaRPr lang="en-US" sz="1500" dirty="0"/>
+          </a:p>
+          <a:p>
+            <a:pPr marL="152400" indent="-152400">
+              <a:spcAft>
+                <a:spcPts val="800"/>
+              </a:spcAft>
               <a:buSzPct val="100000"/>
               <a:buChar char="•"/>
             </a:pPr>
             <a:r>
-              <a:rPr lang="en-US" sz="1600" dirty="0">
-                <a:solidFill>
-                  <a:srgbClr val="333333"/>
-                </a:solidFill>
-              </a:rPr>
-              <a:t>Liquidity ratios (current ratio, quick ratio)</a:t>
-            </a:r>
-            <a:endParaRPr lang="en-US" sz="1600" dirty="0"/>
-          </a:p>
-          <a:p>
-            <a:pPr marL="342900" indent="-342900">
+              <a:rPr lang="en-US" sz="1500" dirty="0">
+                <a:solidFill>
+                  <a:srgbClr val="1C1917"/>
+                </a:solidFill>
+                <a:latin typeface="Arial" pitchFamily="34" charset="0"/>
+                <a:ea typeface="Arial" pitchFamily="34" charset="-122"/>
+                <a:cs typeface="Arial" pitchFamily="34" charset="-120"/>
+              </a:rPr>
+              <a:t>Shared terminology transforms raw data into actionable decisions.</a:t>
+            </a:r>
+            <a:endParaRPr lang="en-US" sz="1500" dirty="0"/>
+          </a:p>
+          <a:p>
+            <a:pPr marL="152400" indent="-152400">
+              <a:spcAft>
+                <a:spcPts val="800"/>
+              </a:spcAft>
               <a:buSzPct val="100000"/>
               <a:buChar char="•"/>
             </a:pPr>
             <a:r>
-              <a:rPr lang="en-US" sz="1600" dirty="0">
-                <a:solidFill>
-                  <a:srgbClr val="333333"/>
-                </a:solidFill>
-              </a:rPr>
-              <a:t>Profitability ratios (gross margin, net profit margin)</a:t>
-            </a:r>
-            <a:endParaRPr lang="en-US" sz="1600" dirty="0"/>
-          </a:p>
-          <a:p>
-            <a:pPr marL="342900" indent="-342900">
+              <a:rPr lang="en-US" sz="1500" dirty="0">
+                <a:solidFill>
+                  <a:srgbClr val="1C1917"/>
+                </a:solidFill>
+                <a:latin typeface="Arial" pitchFamily="34" charset="0"/>
+                <a:ea typeface="Arial" pitchFamily="34" charset="-122"/>
+                <a:cs typeface="Arial" pitchFamily="34" charset="-120"/>
+              </a:rPr>
+              <a:t>Precision in language prevents costly misinterpretation of financial outputs.</a:t>
+            </a:r>
+            <a:endParaRPr lang="en-US" sz="1500" dirty="0"/>
+          </a:p>
+          <a:p>
+            <a:pPr marL="152400" indent="-152400">
+              <a:spcAft>
+                <a:spcPts val="800"/>
+              </a:spcAft>
               <a:buSzPct val="100000"/>
               <a:buChar char="•"/>
             </a:pPr>
             <a:r>
-              <a:rPr lang="en-US" sz="1600" dirty="0">
-                <a:solidFill>
-                  <a:srgbClr val="333333"/>
-                </a:solidFill>
-              </a:rPr>
-              <a:t>Efficiency ratios (asset turnover, inventory turnover)</a:t>
-            </a:r>
-            <a:endParaRPr lang="en-US" sz="1600" dirty="0"/>
-          </a:p>
-          <a:p>
-            <a:pPr marL="342900" indent="-342900">
+              <a:rPr lang="en-US" sz="1500" dirty="0">
+                <a:solidFill>
+                  <a:srgbClr val="1C1917"/>
+                </a:solidFill>
+                <a:latin typeface="Arial" pitchFamily="34" charset="0"/>
+                <a:ea typeface="Arial" pitchFamily="34" charset="-122"/>
+                <a:cs typeface="Arial" pitchFamily="34" charset="-120"/>
+              </a:rPr>
+              <a:t>Common vocabulary enables collaboration across finance, accounting, and strategy teams.</a:t>
+            </a:r>
+            <a:endParaRPr lang="en-US" sz="1500" dirty="0"/>
+          </a:p>
+        </p:txBody>
+      </p:sp>
+      <p:sp>
+        <p:nvSpPr>
+          <p:cNvPr id="7" name="Shape 5"/>
+          <p:cNvSpPr/>
+          <p:nvPr/>
+        </p:nvSpPr>
+        <p:spPr>
+          <a:xfrm>
+            <a:off x="731520" y="4041648"/>
+            <a:ext cx="7680960" cy="566928"/>
+          </a:xfrm>
+          <a:prstGeom prst="roundRect">
+            <a:avLst>
+              <a:gd name="adj" fmla="val 12903"/>
+            </a:avLst>
+          </a:prstGeom>
+          <a:solidFill>
+            <a:srgbClr val="B45309">
+              <a:alpha val="12000"/>
+            </a:srgbClr>
+          </a:solidFill>
+          <a:ln w="12700">
+            <a:solidFill>
+              <a:srgbClr val="B45309"/>
+            </a:solidFill>
+            <a:prstDash val="solid"/>
+          </a:ln>
+        </p:spPr>
+      </p:sp>
+      <p:sp>
+        <p:nvSpPr>
+          <p:cNvPr id="8" name="Text 6"/>
+          <p:cNvSpPr/>
+          <p:nvPr/>
+        </p:nvSpPr>
+        <p:spPr>
+          <a:xfrm>
+            <a:off x="868680" y="4087368"/>
+            <a:ext cx="7406640" cy="475488"/>
+          </a:xfrm>
+          <a:prstGeom prst="rect">
+            <a:avLst/>
+          </a:prstGeom>
+          <a:noFill/>
+          <a:ln/>
+        </p:spPr>
+        <p:txBody>
+          <a:bodyPr wrap="square" rtlCol="0" anchor="ctr"/>
+          <a:lstStyle/>
+          <a:p>
+            <a:pPr indent="0" marL="0">
+              <a:buNone/>
+            </a:pPr>
+            <a:r>
+              <a:rPr lang="en-US" sz="1100" b="1" dirty="0">
+                <a:solidFill>
+                  <a:srgbClr val="B45309"/>
+                </a:solidFill>
+                <a:latin typeface="Arial" pitchFamily="34" charset="0"/>
+                <a:ea typeface="Arial" pitchFamily="34" charset="-122"/>
+                <a:cs typeface="Arial" pitchFamily="34" charset="-120"/>
+              </a:rPr>
+              <a:t>Takeaway  </a:t>
+            </a:r>
+            <a:pPr indent="0" marL="0">
+              <a:buNone/>
+            </a:pPr>
+            <a:r>
+              <a:rPr lang="en-US" sz="1150" dirty="0">
+                <a:solidFill>
+                  <a:srgbClr val="1C1917"/>
+                </a:solidFill>
+                <a:latin typeface="Arial" pitchFamily="34" charset="0"/>
+                <a:ea typeface="Arial" pitchFamily="34" charset="-122"/>
+                <a:cs typeface="Arial" pitchFamily="34" charset="-120"/>
+              </a:rPr>
+              <a:t>A shared, precise vocabulary is the foundation of any credible financial forecasting effort.</a:t>
+            </a:r>
+            <a:endParaRPr lang="en-US" sz="1100" dirty="0"/>
+          </a:p>
+        </p:txBody>
+      </p:sp>
+    </p:spTree>
+  </p:cSld>
+  <p:clrMapOvr>
+    <a:masterClrMapping/>
+  </p:clrMapOvr>
+</p:sld>
+</file>
+
+<file path=ppt/slides/slide4.xml><?xml version="1.0" encoding="utf-8"?>
+<p:sld xmlns:a="http://schemas.openxmlformats.org/drawingml/2006/main" xmlns:r="http://schemas.openxmlformats.org/officeDocument/2006/relationships" xmlns:p="http://schemas.openxmlformats.org/presentationml/2006/main">
+  <p:cSld name="Slide 4">
+    <p:bg>
+      <p:bgPr>
+        <a:solidFill>
+          <a:srgbClr val="FFFFFF"/>
+        </a:solidFill>
+      </p:bgPr>
+    </p:bg>
+    <p:spTree>
+      <p:nvGrpSpPr>
+        <p:cNvPr id="1" name=""/>
+        <p:cNvGrpSpPr/>
+        <p:nvPr/>
+      </p:nvGrpSpPr>
+      <p:grpSpPr>
+        <a:xfrm>
+          <a:off x="0" y="0"/>
+          <a:ext cx="0" cy="0"/>
+          <a:chOff x="0" y="0"/>
+          <a:chExt cx="0" cy="0"/>
+        </a:xfrm>
+      </p:grpSpPr>
+      <p:sp>
+        <p:nvSpPr>
+          <p:cNvPr id="2" name="Shape 0"/>
+          <p:cNvSpPr/>
+          <p:nvPr/>
+        </p:nvSpPr>
+        <p:spPr>
+          <a:xfrm>
+            <a:off x="411480" y="402336"/>
+            <a:ext cx="82296" cy="329184"/>
+          </a:xfrm>
+          <a:prstGeom prst="rect">
+            <a:avLst/>
+          </a:prstGeom>
+          <a:solidFill>
+            <a:srgbClr val="B45309"/>
+          </a:solidFill>
+          <a:ln/>
+        </p:spPr>
+      </p:sp>
+      <p:sp>
+        <p:nvSpPr>
+          <p:cNvPr id="3" name="Text 1"/>
+          <p:cNvSpPr/>
+          <p:nvPr/>
+        </p:nvSpPr>
+        <p:spPr>
+          <a:xfrm>
+            <a:off x="566928" y="292608"/>
+            <a:ext cx="8138160" cy="548640"/>
+          </a:xfrm>
+          <a:prstGeom prst="rect">
+            <a:avLst/>
+          </a:prstGeom>
+          <a:noFill/>
+          <a:ln/>
+        </p:spPr>
+        <p:txBody>
+          <a:bodyPr wrap="square" rtlCol="0" anchor="ctr"/>
+          <a:lstStyle/>
+          <a:p>
+            <a:pPr indent="0" marL="0">
+              <a:buNone/>
+            </a:pPr>
+            <a:r>
+              <a:rPr lang="en-US" sz="2100" b="1" dirty="0">
+                <a:solidFill>
+                  <a:srgbClr val="1C1917"/>
+                </a:solidFill>
+                <a:latin typeface="Arial" pitchFamily="34" charset="0"/>
+                <a:ea typeface="Arial" pitchFamily="34" charset="-122"/>
+                <a:cs typeface="Arial" pitchFamily="34" charset="-120"/>
+              </a:rPr>
+              <a:t>Core Definitions</a:t>
+            </a:r>
+            <a:endParaRPr lang="en-US" sz="2100" dirty="0"/>
+          </a:p>
+        </p:txBody>
+      </p:sp>
+      <p:sp>
+        <p:nvSpPr>
+          <p:cNvPr id="4" name="Shape 2"/>
+          <p:cNvSpPr/>
+          <p:nvPr/>
+        </p:nvSpPr>
+        <p:spPr>
+          <a:xfrm>
+            <a:off x="411480" y="960120"/>
+            <a:ext cx="8321040" cy="0"/>
+          </a:xfrm>
+          <a:prstGeom prst="line">
+            <a:avLst/>
+          </a:prstGeom>
+          <a:noFill/>
+          <a:ln w="12700">
+            <a:solidFill>
+              <a:srgbClr val="E7E5E4"/>
+            </a:solidFill>
+            <a:prstDash val="solid"/>
+          </a:ln>
+        </p:spPr>
+      </p:sp>
+      <p:sp>
+        <p:nvSpPr>
+          <p:cNvPr id="5" name="Text 3"/>
+          <p:cNvSpPr/>
+          <p:nvPr/>
+        </p:nvSpPr>
+        <p:spPr>
+          <a:xfrm>
+            <a:off x="411480" y="4864608"/>
+            <a:ext cx="8321040" cy="237744"/>
+          </a:xfrm>
+          <a:prstGeom prst="rect">
+            <a:avLst/>
+          </a:prstGeom>
+          <a:noFill/>
+          <a:ln/>
+        </p:spPr>
+        <p:txBody>
+          <a:bodyPr wrap="square" rtlCol="0" anchor="ctr"/>
+          <a:lstStyle/>
+          <a:p>
+            <a:pPr indent="0" marL="0">
+              <a:buNone/>
+            </a:pPr>
+            <a:r>
+              <a:rPr lang="en-US" sz="750" dirty="0">
+                <a:solidFill>
+                  <a:srgbClr val="AAAAAA"/>
+                </a:solidFill>
+                <a:latin typeface="Arial" pitchFamily="34" charset="0"/>
+                <a:ea typeface="Arial" pitchFamily="34" charset="-122"/>
+                <a:cs typeface="Arial" pitchFamily="34" charset="-120"/>
+              </a:rPr>
+              <a:t>Lesson Forge Pro (owner) — This content is educational material only and does not constitute financial, investment, or trading advice.</a:t>
+            </a:r>
+            <a:endParaRPr lang="en-US" sz="750" dirty="0"/>
+          </a:p>
+        </p:txBody>
+      </p:sp>
+      <p:sp>
+        <p:nvSpPr>
+          <p:cNvPr id="6" name="Text 4"/>
+          <p:cNvSpPr/>
+          <p:nvPr/>
+        </p:nvSpPr>
+        <p:spPr>
+          <a:xfrm>
+            <a:off x="731520" y="1188720"/>
+            <a:ext cx="7680960" cy="2743200"/>
+          </a:xfrm>
+          <a:prstGeom prst="rect">
+            <a:avLst/>
+          </a:prstGeom>
+          <a:noFill/>
+          <a:ln/>
+        </p:spPr>
+        <p:txBody>
+          <a:bodyPr wrap="square" rtlCol="0" anchor="t"/>
+          <a:lstStyle/>
+          <a:p>
+            <a:pPr marL="152400" indent="-152400">
+              <a:spcAft>
+                <a:spcPts val="800"/>
+              </a:spcAft>
               <a:buSzPct val="100000"/>
               <a:buChar char="•"/>
             </a:pPr>
             <a:r>
-              <a:rPr lang="en-US" sz="1600" dirty="0">
-                <a:solidFill>
-                  <a:srgbClr val="333333"/>
-                </a:solidFill>
-              </a:rPr>
-              <a:t>Solvency ratios (debt-to-equity, interest coverage)</a:t>
-            </a:r>
-            <a:endParaRPr lang="en-US" sz="1600" dirty="0"/>
-          </a:p>
-          <a:p>
-            <a:pPr marL="342900" indent="-342900">
+              <a:rPr lang="en-US" sz="1500" dirty="0">
+                <a:solidFill>
+                  <a:srgbClr val="1C1917"/>
+                </a:solidFill>
+                <a:latin typeface="Arial" pitchFamily="34" charset="0"/>
+                <a:ea typeface="Arial" pitchFamily="34" charset="-122"/>
+                <a:cs typeface="Arial" pitchFamily="34" charset="-120"/>
+              </a:rPr>
+              <a:t>Four primary statements: income statement, balance sheet, cash flow, equity changes.</a:t>
+            </a:r>
+            <a:endParaRPr lang="en-US" sz="1500" dirty="0"/>
+          </a:p>
+          <a:p>
+            <a:pPr marL="152400" indent="-152400">
+              <a:spcAft>
+                <a:spcPts val="800"/>
+              </a:spcAft>
               <a:buSzPct val="100000"/>
               <a:buChar char="•"/>
             </a:pPr>
             <a:r>
-              <a:rPr lang="en-US" sz="1600" dirty="0">
-                <a:solidFill>
-                  <a:srgbClr val="333333"/>
-                </a:solidFill>
-              </a:rPr>
-              <a:t>Think of these ratios like a puzzle. Each piece provides a unique insight, and when combined, they form a complete picture of the company's financial health.</a:t>
-            </a:r>
-            <a:endParaRPr lang="en-US" sz="1600" dirty="0"/>
-          </a:p>
-        </p:txBody>
-      </p:sp>
-      <p:sp>
-        <p:nvSpPr>
-          <p:cNvPr id="4" name="Text 2"/>
-          <p:cNvSpPr/>
-          <p:nvPr/>
-        </p:nvSpPr>
-        <p:spPr>
-          <a:xfrm>
-            <a:off x="457200" y="4709160"/>
-            <a:ext cx="8229600" cy="320040"/>
+              <a:rPr lang="en-US" sz="1500" dirty="0">
+                <a:solidFill>
+                  <a:srgbClr val="1C1917"/>
+                </a:solidFill>
+                <a:latin typeface="Arial" pitchFamily="34" charset="0"/>
+                <a:ea typeface="Arial" pitchFamily="34" charset="-122"/>
+                <a:cs typeface="Arial" pitchFamily="34" charset="-120"/>
+              </a:rPr>
+              <a:t>Pro forma statements project historical reports into future periods.</a:t>
+            </a:r>
+            <a:endParaRPr lang="en-US" sz="1500" dirty="0"/>
+          </a:p>
+          <a:p>
+            <a:pPr marL="152400" indent="-152400">
+              <a:spcAft>
+                <a:spcPts val="800"/>
+              </a:spcAft>
+              <a:buSzPct val="100000"/>
+              <a:buChar char="•"/>
+            </a:pPr>
+            <a:r>
+              <a:rPr lang="en-US" sz="1500" dirty="0">
+                <a:solidFill>
+                  <a:srgbClr val="1C1917"/>
+                </a:solidFill>
+                <a:latin typeface="Arial" pitchFamily="34" charset="0"/>
+                <a:ea typeface="Arial" pitchFamily="34" charset="-122"/>
+                <a:cs typeface="Arial" pitchFamily="34" charset="-120"/>
+              </a:rPr>
+              <a:t>A financial model links assumptions to outputs through connected formulas.</a:t>
+            </a:r>
+            <a:endParaRPr lang="en-US" sz="1500" dirty="0"/>
+          </a:p>
+          <a:p>
+            <a:pPr marL="152400" indent="-152400">
+              <a:spcAft>
+                <a:spcPts val="800"/>
+              </a:spcAft>
+              <a:buSzPct val="100000"/>
+              <a:buChar char="•"/>
+            </a:pPr>
+            <a:r>
+              <a:rPr lang="en-US" sz="1500" dirty="0">
+                <a:solidFill>
+                  <a:srgbClr val="1C1917"/>
+                </a:solidFill>
+                <a:latin typeface="Arial" pitchFamily="34" charset="0"/>
+                <a:ea typeface="Arial" pitchFamily="34" charset="-122"/>
+                <a:cs typeface="Arial" pitchFamily="34" charset="-120"/>
+              </a:rPr>
+              <a:t>Changing one input—like revenue growth—cascades through the entire model.</a:t>
+            </a:r>
+            <a:endParaRPr lang="en-US" sz="1500" dirty="0"/>
+          </a:p>
+          <a:p>
+            <a:pPr marL="152400" indent="-152400">
+              <a:spcAft>
+                <a:spcPts val="800"/>
+              </a:spcAft>
+              <a:buSzPct val="100000"/>
+              <a:buChar char="•"/>
+            </a:pPr>
+            <a:r>
+              <a:rPr lang="en-US" sz="1500" dirty="0">
+                <a:solidFill>
+                  <a:srgbClr val="1C1917"/>
+                </a:solidFill>
+                <a:latin typeface="Arial" pitchFamily="34" charset="0"/>
+                <a:ea typeface="Arial" pitchFamily="34" charset="-122"/>
+                <a:cs typeface="Arial" pitchFamily="34" charset="-120"/>
+              </a:rPr>
+              <a:t>Key drivers: growth rate, margins, working capital behavior, and capital expenditure.</a:t>
+            </a:r>
+            <a:endParaRPr lang="en-US" sz="1500" dirty="0"/>
+          </a:p>
+        </p:txBody>
+      </p:sp>
+      <p:sp>
+        <p:nvSpPr>
+          <p:cNvPr id="7" name="Shape 5"/>
+          <p:cNvSpPr/>
+          <p:nvPr/>
+        </p:nvSpPr>
+        <p:spPr>
+          <a:xfrm>
+            <a:off x="731520" y="4041648"/>
+            <a:ext cx="7680960" cy="566928"/>
+          </a:xfrm>
+          <a:prstGeom prst="roundRect">
+            <a:avLst>
+              <a:gd name="adj" fmla="val 12903"/>
+            </a:avLst>
+          </a:prstGeom>
+          <a:solidFill>
+            <a:srgbClr val="B45309">
+              <a:alpha val="12000"/>
+            </a:srgbClr>
+          </a:solidFill>
+          <a:ln w="12700">
+            <a:solidFill>
+              <a:srgbClr val="B45309"/>
+            </a:solidFill>
+            <a:prstDash val="solid"/>
+          </a:ln>
+        </p:spPr>
+      </p:sp>
+      <p:sp>
+        <p:nvSpPr>
+          <p:cNvPr id="8" name="Text 6"/>
+          <p:cNvSpPr/>
+          <p:nvPr/>
+        </p:nvSpPr>
+        <p:spPr>
+          <a:xfrm>
+            <a:off x="868680" y="4087368"/>
+            <a:ext cx="7406640" cy="475488"/>
           </a:xfrm>
           <a:prstGeom prst="rect">
             <a:avLst/>
@@ -3771,14 +7852,2624 @@
               <a:buNone/>
             </a:pPr>
             <a:r>
-              <a:rPr lang="en-US" sz="800" dirty="0">
+              <a:rPr lang="en-US" sz="1100" b="1" dirty="0">
+                <a:solidFill>
+                  <a:srgbClr val="B45309"/>
+                </a:solidFill>
+                <a:latin typeface="Arial" pitchFamily="34" charset="0"/>
+                <a:ea typeface="Arial" pitchFamily="34" charset="-122"/>
+                <a:cs typeface="Arial" pitchFamily="34" charset="-120"/>
+              </a:rPr>
+              <a:t>Takeaway  </a:t>
+            </a:r>
+            <a:pPr indent="0" marL="0">
+              <a:buNone/>
+            </a:pPr>
+            <a:r>
+              <a:rPr lang="en-US" sz="1150" dirty="0">
+                <a:solidFill>
+                  <a:srgbClr val="1C1917"/>
+                </a:solidFill>
+                <a:latin typeface="Arial" pitchFamily="34" charset="0"/>
+                <a:ea typeface="Arial" pitchFamily="34" charset="-122"/>
+                <a:cs typeface="Arial" pitchFamily="34" charset="-120"/>
+              </a:rPr>
+              <a:t>Pro forma statements are driver-based projections where every output traces to an explicit assumption.</a:t>
+            </a:r>
+            <a:endParaRPr lang="en-US" sz="1100" dirty="0"/>
+          </a:p>
+        </p:txBody>
+      </p:sp>
+    </p:spTree>
+  </p:cSld>
+  <p:clrMapOvr>
+    <a:masterClrMapping/>
+  </p:clrMapOvr>
+</p:sld>
+</file>
+
+<file path=ppt/slides/slide5.xml><?xml version="1.0" encoding="utf-8"?>
+<p:sld xmlns:a="http://schemas.openxmlformats.org/drawingml/2006/main" xmlns:r="http://schemas.openxmlformats.org/officeDocument/2006/relationships" xmlns:p="http://schemas.openxmlformats.org/presentationml/2006/main">
+  <p:cSld name="Slide 5">
+    <p:bg>
+      <p:bgPr>
+        <a:solidFill>
+          <a:srgbClr val="FFFFFF"/>
+        </a:solidFill>
+      </p:bgPr>
+    </p:bg>
+    <p:spTree>
+      <p:nvGrpSpPr>
+        <p:cNvPr id="1" name=""/>
+        <p:cNvGrpSpPr/>
+        <p:nvPr/>
+      </p:nvGrpSpPr>
+      <p:grpSpPr>
+        <a:xfrm>
+          <a:off x="0" y="0"/>
+          <a:ext cx="0" cy="0"/>
+          <a:chOff x="0" y="0"/>
+          <a:chExt cx="0" cy="0"/>
+        </a:xfrm>
+      </p:grpSpPr>
+      <p:sp>
+        <p:nvSpPr>
+          <p:cNvPr id="2" name="Shape 0"/>
+          <p:cNvSpPr/>
+          <p:nvPr/>
+        </p:nvSpPr>
+        <p:spPr>
+          <a:xfrm>
+            <a:off x="411480" y="402336"/>
+            <a:ext cx="82296" cy="329184"/>
+          </a:xfrm>
+          <a:prstGeom prst="rect">
+            <a:avLst/>
+          </a:prstGeom>
+          <a:solidFill>
+            <a:srgbClr val="B45309"/>
+          </a:solidFill>
+          <a:ln/>
+        </p:spPr>
+      </p:sp>
+      <p:sp>
+        <p:nvSpPr>
+          <p:cNvPr id="3" name="Text 1"/>
+          <p:cNvSpPr/>
+          <p:nvPr/>
+        </p:nvSpPr>
+        <p:spPr>
+          <a:xfrm>
+            <a:off x="566928" y="292608"/>
+            <a:ext cx="8138160" cy="548640"/>
+          </a:xfrm>
+          <a:prstGeom prst="rect">
+            <a:avLst/>
+          </a:prstGeom>
+          <a:noFill/>
+          <a:ln/>
+        </p:spPr>
+        <p:txBody>
+          <a:bodyPr wrap="square" rtlCol="0" anchor="ctr"/>
+          <a:lstStyle/>
+          <a:p>
+            <a:pPr indent="0" marL="0">
+              <a:buNone/>
+            </a:pPr>
+            <a:r>
+              <a:rPr lang="en-US" sz="2100" b="1" dirty="0">
+                <a:solidFill>
+                  <a:srgbClr val="1C1917"/>
+                </a:solidFill>
+                <a:latin typeface="Arial" pitchFamily="34" charset="0"/>
+                <a:ea typeface="Arial" pitchFamily="34" charset="-122"/>
+                <a:cs typeface="Arial" pitchFamily="34" charset="-120"/>
+              </a:rPr>
+              <a:t>Where Financial Forecasting Fits in Practice</a:t>
+            </a:r>
+            <a:endParaRPr lang="en-US" sz="2100" dirty="0"/>
+          </a:p>
+        </p:txBody>
+      </p:sp>
+      <p:sp>
+        <p:nvSpPr>
+          <p:cNvPr id="4" name="Shape 2"/>
+          <p:cNvSpPr/>
+          <p:nvPr/>
+        </p:nvSpPr>
+        <p:spPr>
+          <a:xfrm>
+            <a:off x="411480" y="960120"/>
+            <a:ext cx="8321040" cy="0"/>
+          </a:xfrm>
+          <a:prstGeom prst="line">
+            <a:avLst/>
+          </a:prstGeom>
+          <a:noFill/>
+          <a:ln w="12700">
+            <a:solidFill>
+              <a:srgbClr val="E7E5E4"/>
+            </a:solidFill>
+            <a:prstDash val="solid"/>
+          </a:ln>
+        </p:spPr>
+      </p:sp>
+      <p:sp>
+        <p:nvSpPr>
+          <p:cNvPr id="5" name="Text 3"/>
+          <p:cNvSpPr/>
+          <p:nvPr/>
+        </p:nvSpPr>
+        <p:spPr>
+          <a:xfrm>
+            <a:off x="411480" y="4864608"/>
+            <a:ext cx="8321040" cy="237744"/>
+          </a:xfrm>
+          <a:prstGeom prst="rect">
+            <a:avLst/>
+          </a:prstGeom>
+          <a:noFill/>
+          <a:ln/>
+        </p:spPr>
+        <p:txBody>
+          <a:bodyPr wrap="square" rtlCol="0" anchor="ctr"/>
+          <a:lstStyle/>
+          <a:p>
+            <a:pPr indent="0" marL="0">
+              <a:buNone/>
+            </a:pPr>
+            <a:r>
+              <a:rPr lang="en-US" sz="750" dirty="0">
                 <a:solidFill>
                   <a:srgbClr val="AAAAAA"/>
                 </a:solidFill>
+                <a:latin typeface="Arial" pitchFamily="34" charset="0"/>
+                <a:ea typeface="Arial" pitchFamily="34" charset="-122"/>
+                <a:cs typeface="Arial" pitchFamily="34" charset="-120"/>
               </a:rPr>
               <a:t>Lesson Forge Pro (owner) — This content is educational material only and does not constitute financial, investment, or trading advice.</a:t>
             </a:r>
-            <a:endParaRPr lang="en-US" sz="800" dirty="0"/>
+            <a:endParaRPr lang="en-US" sz="750" dirty="0"/>
+          </a:p>
+        </p:txBody>
+      </p:sp>
+      <p:sp>
+        <p:nvSpPr>
+          <p:cNvPr id="6" name="Text 4"/>
+          <p:cNvSpPr/>
+          <p:nvPr/>
+        </p:nvSpPr>
+        <p:spPr>
+          <a:xfrm>
+            <a:off x="731520" y="1188720"/>
+            <a:ext cx="7680960" cy="2743200"/>
+          </a:xfrm>
+          <a:prstGeom prst="rect">
+            <a:avLst/>
+          </a:prstGeom>
+          <a:noFill/>
+          <a:ln/>
+        </p:spPr>
+        <p:txBody>
+          <a:bodyPr wrap="square" rtlCol="0" anchor="t"/>
+          <a:lstStyle/>
+          <a:p>
+            <a:pPr marL="152400" indent="-152400">
+              <a:spcAft>
+                <a:spcPts val="800"/>
+              </a:spcAft>
+              <a:buSzPct val="100000"/>
+              <a:buChar char="•"/>
+            </a:pPr>
+            <a:r>
+              <a:rPr lang="en-US" sz="1500" dirty="0">
+                <a:solidFill>
+                  <a:srgbClr val="1C1917"/>
+                </a:solidFill>
+                <a:latin typeface="Arial" pitchFamily="34" charset="0"/>
+                <a:ea typeface="Arial" pitchFamily="34" charset="-122"/>
+                <a:cs typeface="Arial" pitchFamily="34" charset="-120"/>
+              </a:rPr>
+              <a:t>Forecasts underpin DCF valuation, M&amp;A due diligence, and LBO modeling.</a:t>
+            </a:r>
+            <a:endParaRPr lang="en-US" sz="1500" dirty="0"/>
+          </a:p>
+          <a:p>
+            <a:pPr marL="152400" indent="-152400">
+              <a:spcAft>
+                <a:spcPts val="800"/>
+              </a:spcAft>
+              <a:buSzPct val="100000"/>
+              <a:buChar char="•"/>
+            </a:pPr>
+            <a:r>
+              <a:rPr lang="en-US" sz="1500" dirty="0">
+                <a:solidFill>
+                  <a:srgbClr val="1C1917"/>
+                </a:solidFill>
+                <a:latin typeface="Arial" pitchFamily="34" charset="0"/>
+                <a:ea typeface="Arial" pitchFamily="34" charset="-122"/>
+                <a:cs typeface="Arial" pitchFamily="34" charset="-120"/>
+              </a:rPr>
+              <a:t>Credit analysts use projections to assess repayment capacity and leverage.</a:t>
+            </a:r>
+            <a:endParaRPr lang="en-US" sz="1500" dirty="0"/>
+          </a:p>
+          <a:p>
+            <a:pPr marL="152400" indent="-152400">
+              <a:spcAft>
+                <a:spcPts val="800"/>
+              </a:spcAft>
+              <a:buSzPct val="100000"/>
+              <a:buChar char="•"/>
+            </a:pPr>
+            <a:r>
+              <a:rPr lang="en-US" sz="1500" dirty="0">
+                <a:solidFill>
+                  <a:srgbClr val="1C1917"/>
+                </a:solidFill>
+                <a:latin typeface="Arial" pitchFamily="34" charset="0"/>
+                <a:ea typeface="Arial" pitchFamily="34" charset="-122"/>
+                <a:cs typeface="Arial" pitchFamily="34" charset="-120"/>
+              </a:rPr>
+              <a:t>FP&amp;A teams translate forecasts into budgets and capital allocation plans.</a:t>
+            </a:r>
+            <a:endParaRPr lang="en-US" sz="1500" dirty="0"/>
+          </a:p>
+          <a:p>
+            <a:pPr marL="152400" indent="-152400">
+              <a:spcAft>
+                <a:spcPts val="800"/>
+              </a:spcAft>
+              <a:buSzPct val="100000"/>
+              <a:buChar char="•"/>
+            </a:pPr>
+            <a:r>
+              <a:rPr lang="en-US" sz="1500" dirty="0">
+                <a:solidFill>
+                  <a:srgbClr val="1C1917"/>
+                </a:solidFill>
+                <a:latin typeface="Arial" pitchFamily="34" charset="0"/>
+                <a:ea typeface="Arial" pitchFamily="34" charset="-122"/>
+                <a:cs typeface="Arial" pitchFamily="34" charset="-120"/>
+              </a:rPr>
+              <a:t>Entrepreneurs use pro formas to demonstrate viability to investors and lenders.</a:t>
+            </a:r>
+            <a:endParaRPr lang="en-US" sz="1500" dirty="0"/>
+          </a:p>
+          <a:p>
+            <a:pPr marL="152400" indent="-152400">
+              <a:spcAft>
+                <a:spcPts val="800"/>
+              </a:spcAft>
+              <a:buSzPct val="100000"/>
+              <a:buChar char="•"/>
+            </a:pPr>
+            <a:r>
+              <a:rPr lang="en-US" sz="1500" dirty="0">
+                <a:solidFill>
+                  <a:srgbClr val="1C1917"/>
+                </a:solidFill>
+                <a:latin typeface="Arial" pitchFamily="34" charset="0"/>
+                <a:ea typeface="Arial" pitchFamily="34" charset="-122"/>
+                <a:cs typeface="Arial" pitchFamily="34" charset="-120"/>
+              </a:rPr>
+              <a:t>MD&amp;A sections provide narrative context for calibrating forecast assumptions.</a:t>
+            </a:r>
+            <a:endParaRPr lang="en-US" sz="1500" dirty="0"/>
+          </a:p>
+        </p:txBody>
+      </p:sp>
+      <p:sp>
+        <p:nvSpPr>
+          <p:cNvPr id="7" name="Shape 5"/>
+          <p:cNvSpPr/>
+          <p:nvPr/>
+        </p:nvSpPr>
+        <p:spPr>
+          <a:xfrm>
+            <a:off x="731520" y="4041648"/>
+            <a:ext cx="7680960" cy="566928"/>
+          </a:xfrm>
+          <a:prstGeom prst="roundRect">
+            <a:avLst>
+              <a:gd name="adj" fmla="val 12903"/>
+            </a:avLst>
+          </a:prstGeom>
+          <a:solidFill>
+            <a:srgbClr val="B45309">
+              <a:alpha val="12000"/>
+            </a:srgbClr>
+          </a:solidFill>
+          <a:ln w="12700">
+            <a:solidFill>
+              <a:srgbClr val="B45309"/>
+            </a:solidFill>
+            <a:prstDash val="solid"/>
+          </a:ln>
+        </p:spPr>
+      </p:sp>
+      <p:sp>
+        <p:nvSpPr>
+          <p:cNvPr id="8" name="Text 6"/>
+          <p:cNvSpPr/>
+          <p:nvPr/>
+        </p:nvSpPr>
+        <p:spPr>
+          <a:xfrm>
+            <a:off x="868680" y="4087368"/>
+            <a:ext cx="7406640" cy="475488"/>
+          </a:xfrm>
+          <a:prstGeom prst="rect">
+            <a:avLst/>
+          </a:prstGeom>
+          <a:noFill/>
+          <a:ln/>
+        </p:spPr>
+        <p:txBody>
+          <a:bodyPr wrap="square" rtlCol="0" anchor="ctr"/>
+          <a:lstStyle/>
+          <a:p>
+            <a:pPr indent="0" marL="0">
+              <a:buNone/>
+            </a:pPr>
+            <a:r>
+              <a:rPr lang="en-US" sz="1100" b="1" dirty="0">
+                <a:solidFill>
+                  <a:srgbClr val="B45309"/>
+                </a:solidFill>
+                <a:latin typeface="Arial" pitchFamily="34" charset="0"/>
+                <a:ea typeface="Arial" pitchFamily="34" charset="-122"/>
+                <a:cs typeface="Arial" pitchFamily="34" charset="-120"/>
+              </a:rPr>
+              <a:t>Takeaway  </a:t>
+            </a:r>
+            <a:pPr indent="0" marL="0">
+              <a:buNone/>
+            </a:pPr>
+            <a:r>
+              <a:rPr lang="en-US" sz="1150" dirty="0">
+                <a:solidFill>
+                  <a:srgbClr val="1C1917"/>
+                </a:solidFill>
+                <a:latin typeface="Arial" pitchFamily="34" charset="0"/>
+                <a:ea typeface="Arial" pitchFamily="34" charset="-122"/>
+                <a:cs typeface="Arial" pitchFamily="34" charset="-120"/>
+              </a:rPr>
+              <a:t>Financial statement forecasting is the common engine behind virtually every high-stakes financial decision.</a:t>
+            </a:r>
+            <a:endParaRPr lang="en-US" sz="1100" dirty="0"/>
+          </a:p>
+        </p:txBody>
+      </p:sp>
+    </p:spTree>
+  </p:cSld>
+  <p:clrMapOvr>
+    <a:masterClrMapping/>
+  </p:clrMapOvr>
+</p:sld>
+</file>
+
+<file path=ppt/slides/slide6.xml><?xml version="1.0" encoding="utf-8"?>
+<p:sld xmlns:a="http://schemas.openxmlformats.org/drawingml/2006/main" xmlns:r="http://schemas.openxmlformats.org/officeDocument/2006/relationships" xmlns:p="http://schemas.openxmlformats.org/presentationml/2006/main">
+  <p:cSld name="Slide 6">
+    <p:bg>
+      <p:bgPr>
+        <a:solidFill>
+          <a:srgbClr val="FFFFFF"/>
+        </a:solidFill>
+      </p:bgPr>
+    </p:bg>
+    <p:spTree>
+      <p:nvGrpSpPr>
+        <p:cNvPr id="1" name=""/>
+        <p:cNvGrpSpPr/>
+        <p:nvPr/>
+      </p:nvGrpSpPr>
+      <p:grpSpPr>
+        <a:xfrm>
+          <a:off x="0" y="0"/>
+          <a:ext cx="0" cy="0"/>
+          <a:chOff x="0" y="0"/>
+          <a:chExt cx="0" cy="0"/>
+        </a:xfrm>
+      </p:grpSpPr>
+      <p:sp>
+        <p:nvSpPr>
+          <p:cNvPr id="2" name="Shape 0"/>
+          <p:cNvSpPr/>
+          <p:nvPr/>
+        </p:nvSpPr>
+        <p:spPr>
+          <a:xfrm>
+            <a:off x="411480" y="402336"/>
+            <a:ext cx="82296" cy="329184"/>
+          </a:xfrm>
+          <a:prstGeom prst="rect">
+            <a:avLst/>
+          </a:prstGeom>
+          <a:solidFill>
+            <a:srgbClr val="B45309"/>
+          </a:solidFill>
+          <a:ln/>
+        </p:spPr>
+      </p:sp>
+      <p:sp>
+        <p:nvSpPr>
+          <p:cNvPr id="3" name="Text 1"/>
+          <p:cNvSpPr/>
+          <p:nvPr/>
+        </p:nvSpPr>
+        <p:spPr>
+          <a:xfrm>
+            <a:off x="566928" y="292608"/>
+            <a:ext cx="8138160" cy="548640"/>
+          </a:xfrm>
+          <a:prstGeom prst="rect">
+            <a:avLst/>
+          </a:prstGeom>
+          <a:noFill/>
+          <a:ln/>
+        </p:spPr>
+        <p:txBody>
+          <a:bodyPr wrap="square" rtlCol="0" anchor="ctr"/>
+          <a:lstStyle/>
+          <a:p>
+            <a:pPr indent="0" marL="0">
+              <a:buNone/>
+            </a:pPr>
+            <a:r>
+              <a:rPr lang="en-US" sz="2100" b="1" dirty="0">
+                <a:solidFill>
+                  <a:srgbClr val="1C1917"/>
+                </a:solidFill>
+                <a:latin typeface="Arial" pitchFamily="34" charset="0"/>
+                <a:ea typeface="Arial" pitchFamily="34" charset="-122"/>
+                <a:cs typeface="Arial" pitchFamily="34" charset="-120"/>
+              </a:rPr>
+              <a:t>Notation and Core Linkage Formula</a:t>
+            </a:r>
+            <a:endParaRPr lang="en-US" sz="2100" dirty="0"/>
+          </a:p>
+        </p:txBody>
+      </p:sp>
+      <p:sp>
+        <p:nvSpPr>
+          <p:cNvPr id="4" name="Shape 2"/>
+          <p:cNvSpPr/>
+          <p:nvPr/>
+        </p:nvSpPr>
+        <p:spPr>
+          <a:xfrm>
+            <a:off x="411480" y="960120"/>
+            <a:ext cx="8321040" cy="0"/>
+          </a:xfrm>
+          <a:prstGeom prst="line">
+            <a:avLst/>
+          </a:prstGeom>
+          <a:noFill/>
+          <a:ln w="12700">
+            <a:solidFill>
+              <a:srgbClr val="E7E5E4"/>
+            </a:solidFill>
+            <a:prstDash val="solid"/>
+          </a:ln>
+        </p:spPr>
+      </p:sp>
+      <p:sp>
+        <p:nvSpPr>
+          <p:cNvPr id="5" name="Text 3"/>
+          <p:cNvSpPr/>
+          <p:nvPr/>
+        </p:nvSpPr>
+        <p:spPr>
+          <a:xfrm>
+            <a:off x="411480" y="4864608"/>
+            <a:ext cx="8321040" cy="237744"/>
+          </a:xfrm>
+          <a:prstGeom prst="rect">
+            <a:avLst/>
+          </a:prstGeom>
+          <a:noFill/>
+          <a:ln/>
+        </p:spPr>
+        <p:txBody>
+          <a:bodyPr wrap="square" rtlCol="0" anchor="ctr"/>
+          <a:lstStyle/>
+          <a:p>
+            <a:pPr indent="0" marL="0">
+              <a:buNone/>
+            </a:pPr>
+            <a:r>
+              <a:rPr lang="en-US" sz="750" dirty="0">
+                <a:solidFill>
+                  <a:srgbClr val="AAAAAA"/>
+                </a:solidFill>
+                <a:latin typeface="Arial" pitchFamily="34" charset="0"/>
+                <a:ea typeface="Arial" pitchFamily="34" charset="-122"/>
+                <a:cs typeface="Arial" pitchFamily="34" charset="-120"/>
+              </a:rPr>
+              <a:t>Lesson Forge Pro (owner) — This content is educational material only and does not constitute financial, investment, or trading advice.</a:t>
+            </a:r>
+            <a:endParaRPr lang="en-US" sz="750" dirty="0"/>
+          </a:p>
+        </p:txBody>
+      </p:sp>
+      <p:sp>
+        <p:nvSpPr>
+          <p:cNvPr id="6" name="Text 4"/>
+          <p:cNvSpPr/>
+          <p:nvPr/>
+        </p:nvSpPr>
+        <p:spPr>
+          <a:xfrm>
+            <a:off x="731520" y="1188720"/>
+            <a:ext cx="7680960" cy="2743200"/>
+          </a:xfrm>
+          <a:prstGeom prst="rect">
+            <a:avLst/>
+          </a:prstGeom>
+          <a:noFill/>
+          <a:ln/>
+        </p:spPr>
+        <p:txBody>
+          <a:bodyPr wrap="square" rtlCol="0" anchor="t"/>
+          <a:lstStyle/>
+          <a:p>
+            <a:pPr marL="152400" indent="-152400">
+              <a:spcAft>
+                <a:spcPts val="800"/>
+              </a:spcAft>
+              <a:buSzPct val="100000"/>
+              <a:buChar char="•"/>
+            </a:pPr>
+            <a:r>
+              <a:rPr lang="en-US" sz="1500" dirty="0">
+                <a:solidFill>
+                  <a:srgbClr val="1C1917"/>
+                </a:solidFill>
+                <a:latin typeface="Arial" pitchFamily="34" charset="0"/>
+                <a:ea typeface="Arial" pitchFamily="34" charset="-122"/>
+                <a:cs typeface="Arial" pitchFamily="34" charset="-120"/>
+              </a:rPr>
+              <a:t>t = current period; t-1 = prior historical anchor period.</a:t>
+            </a:r>
+            <a:endParaRPr lang="en-US" sz="1500" dirty="0"/>
+          </a:p>
+          <a:p>
+            <a:pPr marL="152400" indent="-152400">
+              <a:spcAft>
+                <a:spcPts val="800"/>
+              </a:spcAft>
+              <a:buSzPct val="100000"/>
+              <a:buChar char="•"/>
+            </a:pPr>
+            <a:r>
+              <a:rPr lang="en-US" sz="1500" dirty="0">
+                <a:solidFill>
+                  <a:srgbClr val="1C1917"/>
+                </a:solidFill>
+                <a:latin typeface="Arial" pitchFamily="34" charset="0"/>
+                <a:ea typeface="Arial" pitchFamily="34" charset="-122"/>
+                <a:cs typeface="Arial" pitchFamily="34" charset="-120"/>
+              </a:rPr>
+              <a:t>g = growth rate; EBIT, EBITDA, NWC, and FCF are standard abbreviations.</a:t>
+            </a:r>
+            <a:endParaRPr lang="en-US" sz="1500" dirty="0"/>
+          </a:p>
+          <a:p>
+            <a:pPr marL="152400" indent="-152400">
+              <a:spcAft>
+                <a:spcPts val="800"/>
+              </a:spcAft>
+              <a:buSzPct val="100000"/>
+              <a:buChar char="•"/>
+            </a:pPr>
+            <a:r>
+              <a:rPr lang="en-US" sz="1500" dirty="0">
+                <a:solidFill>
+                  <a:srgbClr val="1C1917"/>
+                </a:solidFill>
+                <a:latin typeface="Arial" pitchFamily="34" charset="0"/>
+                <a:ea typeface="Arial" pitchFamily="34" charset="-122"/>
+                <a:cs typeface="Arial" pitchFamily="34" charset="-120"/>
+              </a:rPr>
+              <a:t>Ending Cash = Beginning Cash + CFO + CFI + CFF links all three statements.</a:t>
+            </a:r>
+            <a:endParaRPr lang="en-US" sz="1500" dirty="0"/>
+          </a:p>
+          <a:p>
+            <a:pPr marL="152400" indent="-152400">
+              <a:spcAft>
+                <a:spcPts val="800"/>
+              </a:spcAft>
+              <a:buSzPct val="100000"/>
+              <a:buChar char="•"/>
+            </a:pPr>
+            <a:r>
+              <a:rPr lang="en-US" sz="1500" dirty="0">
+                <a:solidFill>
+                  <a:srgbClr val="1C1917"/>
+                </a:solidFill>
+                <a:latin typeface="Arial" pitchFamily="34" charset="0"/>
+                <a:ea typeface="Arial" pitchFamily="34" charset="-122"/>
+                <a:cs typeface="Arial" pitchFamily="34" charset="-120"/>
+              </a:rPr>
+              <a:t>Consistent notation prevents formula errors and speeds model review.</a:t>
+            </a:r>
+            <a:endParaRPr lang="en-US" sz="1500" dirty="0"/>
+          </a:p>
+          <a:p>
+            <a:pPr marL="152400" indent="-152400">
+              <a:spcAft>
+                <a:spcPts val="800"/>
+              </a:spcAft>
+              <a:buSzPct val="100000"/>
+              <a:buChar char="•"/>
+            </a:pPr>
+            <a:r>
+              <a:rPr lang="en-US" sz="1500" dirty="0">
+                <a:solidFill>
+                  <a:srgbClr val="1C1917"/>
+                </a:solidFill>
+                <a:latin typeface="Arial" pitchFamily="34" charset="0"/>
+                <a:ea typeface="Arial" pitchFamily="34" charset="-122"/>
+                <a:cs typeface="Arial" pitchFamily="34" charset="-120"/>
+              </a:rPr>
+              <a:t>CFO, CFI, and CFF represent operating, investing, and financing cash flows.</a:t>
+            </a:r>
+            <a:endParaRPr lang="en-US" sz="1500" dirty="0"/>
+          </a:p>
+        </p:txBody>
+      </p:sp>
+      <p:sp>
+        <p:nvSpPr>
+          <p:cNvPr id="7" name="Shape 5"/>
+          <p:cNvSpPr/>
+          <p:nvPr/>
+        </p:nvSpPr>
+        <p:spPr>
+          <a:xfrm>
+            <a:off x="731520" y="4041648"/>
+            <a:ext cx="7680960" cy="566928"/>
+          </a:xfrm>
+          <a:prstGeom prst="roundRect">
+            <a:avLst>
+              <a:gd name="adj" fmla="val 12903"/>
+            </a:avLst>
+          </a:prstGeom>
+          <a:solidFill>
+            <a:srgbClr val="B45309">
+              <a:alpha val="12000"/>
+            </a:srgbClr>
+          </a:solidFill>
+          <a:ln w="12700">
+            <a:solidFill>
+              <a:srgbClr val="B45309"/>
+            </a:solidFill>
+            <a:prstDash val="solid"/>
+          </a:ln>
+        </p:spPr>
+      </p:sp>
+      <p:sp>
+        <p:nvSpPr>
+          <p:cNvPr id="8" name="Text 6"/>
+          <p:cNvSpPr/>
+          <p:nvPr/>
+        </p:nvSpPr>
+        <p:spPr>
+          <a:xfrm>
+            <a:off x="868680" y="4087368"/>
+            <a:ext cx="7406640" cy="475488"/>
+          </a:xfrm>
+          <a:prstGeom prst="rect">
+            <a:avLst/>
+          </a:prstGeom>
+          <a:noFill/>
+          <a:ln/>
+        </p:spPr>
+        <p:txBody>
+          <a:bodyPr wrap="square" rtlCol="0" anchor="ctr"/>
+          <a:lstStyle/>
+          <a:p>
+            <a:pPr indent="0" marL="0">
+              <a:buNone/>
+            </a:pPr>
+            <a:r>
+              <a:rPr lang="en-US" sz="1100" b="1" dirty="0">
+                <a:solidFill>
+                  <a:srgbClr val="B45309"/>
+                </a:solidFill>
+                <a:latin typeface="Arial" pitchFamily="34" charset="0"/>
+                <a:ea typeface="Arial" pitchFamily="34" charset="-122"/>
+                <a:cs typeface="Arial" pitchFamily="34" charset="-120"/>
+              </a:rPr>
+              <a:t>Takeaway  </a:t>
+            </a:r>
+            <a:pPr indent="0" marL="0">
+              <a:buNone/>
+            </a:pPr>
+            <a:r>
+              <a:rPr lang="en-US" sz="1150" dirty="0">
+                <a:solidFill>
+                  <a:srgbClr val="1C1917"/>
+                </a:solidFill>
+                <a:latin typeface="Arial" pitchFamily="34" charset="0"/>
+                <a:ea typeface="Arial" pitchFamily="34" charset="-122"/>
+                <a:cs typeface="Arial" pitchFamily="34" charset="-120"/>
+              </a:rPr>
+              <a:t>Standardized notation and the cash linkage formula are the connective tissue of any three-statement model.</a:t>
+            </a:r>
+            <a:endParaRPr lang="en-US" sz="1100" dirty="0"/>
+          </a:p>
+        </p:txBody>
+      </p:sp>
+    </p:spTree>
+  </p:cSld>
+  <p:clrMapOvr>
+    <a:masterClrMapping/>
+  </p:clrMapOvr>
+</p:sld>
+</file>
+
+<file path=ppt/slides/slide7.xml><?xml version="1.0" encoding="utf-8"?>
+<p:sld xmlns:a="http://schemas.openxmlformats.org/drawingml/2006/main" xmlns:r="http://schemas.openxmlformats.org/officeDocument/2006/relationships" xmlns:p="http://schemas.openxmlformats.org/presentationml/2006/main">
+  <p:cSld name="Slide 7">
+    <p:bg>
+      <p:bgPr>
+        <a:solidFill>
+          <a:srgbClr val="FFFFFF"/>
+        </a:solidFill>
+      </p:bgPr>
+    </p:bg>
+    <p:spTree>
+      <p:nvGrpSpPr>
+        <p:cNvPr id="1" name=""/>
+        <p:cNvGrpSpPr/>
+        <p:nvPr/>
+      </p:nvGrpSpPr>
+      <p:grpSpPr>
+        <a:xfrm>
+          <a:off x="0" y="0"/>
+          <a:ext cx="0" cy="0"/>
+          <a:chOff x="0" y="0"/>
+          <a:chExt cx="0" cy="0"/>
+        </a:xfrm>
+      </p:grpSpPr>
+      <p:sp>
+        <p:nvSpPr>
+          <p:cNvPr id="2" name="Shape 0"/>
+          <p:cNvSpPr/>
+          <p:nvPr/>
+        </p:nvSpPr>
+        <p:spPr>
+          <a:xfrm>
+            <a:off x="411480" y="384048"/>
+            <a:ext cx="82296" cy="310896"/>
+          </a:xfrm>
+          <a:prstGeom prst="rect">
+            <a:avLst/>
+          </a:prstGeom>
+          <a:solidFill>
+            <a:srgbClr val="B45309"/>
+          </a:solidFill>
+          <a:ln/>
+        </p:spPr>
+      </p:sp>
+      <p:sp>
+        <p:nvSpPr>
+          <p:cNvPr id="3" name="Text 1"/>
+          <p:cNvSpPr/>
+          <p:nvPr/>
+        </p:nvSpPr>
+        <p:spPr>
+          <a:xfrm>
+            <a:off x="566928" y="292608"/>
+            <a:ext cx="8138160" cy="502920"/>
+          </a:xfrm>
+          <a:prstGeom prst="rect">
+            <a:avLst/>
+          </a:prstGeom>
+          <a:noFill/>
+          <a:ln/>
+        </p:spPr>
+        <p:txBody>
+          <a:bodyPr wrap="square" rtlCol="0" anchor="ctr"/>
+          <a:lstStyle/>
+          <a:p>
+            <a:pPr indent="0" marL="0">
+              <a:buNone/>
+            </a:pPr>
+            <a:r>
+              <a:rPr lang="en-US" sz="2000" b="1" dirty="0">
+                <a:solidFill>
+                  <a:srgbClr val="1C1917"/>
+                </a:solidFill>
+                <a:latin typeface="Arial" pitchFamily="34" charset="0"/>
+                <a:ea typeface="Arial" pitchFamily="34" charset="-122"/>
+                <a:cs typeface="Arial" pitchFamily="34" charset="-120"/>
+              </a:rPr>
+              <a:t>Standard Forecasting Procedure</a:t>
+            </a:r>
+            <a:endParaRPr lang="en-US" sz="2000" dirty="0"/>
+          </a:p>
+        </p:txBody>
+      </p:sp>
+      <p:sp>
+        <p:nvSpPr>
+          <p:cNvPr id="4" name="Text 2"/>
+          <p:cNvSpPr/>
+          <p:nvPr/>
+        </p:nvSpPr>
+        <p:spPr>
+          <a:xfrm>
+            <a:off x="566928" y="4681728"/>
+            <a:ext cx="8138160" cy="320040"/>
+          </a:xfrm>
+          <a:prstGeom prst="rect">
+            <a:avLst/>
+          </a:prstGeom>
+          <a:noFill/>
+          <a:ln/>
+        </p:spPr>
+        <p:txBody>
+          <a:bodyPr wrap="square" rtlCol="0" anchor="ctr"/>
+          <a:lstStyle/>
+          <a:p>
+            <a:pPr indent="0" marL="0">
+              <a:buNone/>
+            </a:pPr>
+            <a:r>
+              <a:rPr lang="en-US" sz="1000" i="1" dirty="0">
+                <a:solidFill>
+                  <a:srgbClr val="78716C"/>
+                </a:solidFill>
+                <a:latin typeface="Arial" pitchFamily="34" charset="0"/>
+                <a:ea typeface="Arial" pitchFamily="34" charset="-122"/>
+                <a:cs typeface="Arial" pitchFamily="34" charset="-120"/>
+              </a:rPr>
+              <a:t>Each step feeds the next; changing one driver flows through all statements.</a:t>
+            </a:r>
+            <a:endParaRPr lang="en-US" sz="1000" dirty="0"/>
+          </a:p>
+        </p:txBody>
+      </p:sp>
+      <p:sp>
+        <p:nvSpPr>
+          <p:cNvPr id="5" name="Text 3"/>
+          <p:cNvSpPr/>
+          <p:nvPr/>
+        </p:nvSpPr>
+        <p:spPr>
+          <a:xfrm>
+            <a:off x="411480" y="4919472"/>
+            <a:ext cx="8321040" cy="219456"/>
+          </a:xfrm>
+          <a:prstGeom prst="rect">
+            <a:avLst/>
+          </a:prstGeom>
+          <a:noFill/>
+          <a:ln/>
+        </p:spPr>
+        <p:txBody>
+          <a:bodyPr wrap="square" rtlCol="0" anchor="ctr"/>
+          <a:lstStyle/>
+          <a:p>
+            <a:pPr indent="0" marL="0">
+              <a:buNone/>
+            </a:pPr>
+            <a:r>
+              <a:rPr lang="en-US" sz="750" dirty="0">
+                <a:solidFill>
+                  <a:srgbClr val="AAAAAA"/>
+                </a:solidFill>
+                <a:latin typeface="Arial" pitchFamily="34" charset="0"/>
+                <a:ea typeface="Arial" pitchFamily="34" charset="-122"/>
+                <a:cs typeface="Arial" pitchFamily="34" charset="-120"/>
+              </a:rPr>
+              <a:t>Lesson Forge Pro (owner) — This content is educational material only and does not constitute financial, investment, or trading advice.</a:t>
+            </a:r>
+            <a:endParaRPr lang="en-US" sz="750" dirty="0"/>
+          </a:p>
+        </p:txBody>
+      </p:sp>
+      <p:sp>
+        <p:nvSpPr>
+          <p:cNvPr id="6" name="Shape 4"/>
+          <p:cNvSpPr/>
+          <p:nvPr/>
+        </p:nvSpPr>
+        <p:spPr>
+          <a:xfrm>
+            <a:off x="411480" y="1463040"/>
+            <a:ext cx="2011680" cy="960120"/>
+          </a:xfrm>
+          <a:prstGeom prst="roundRect">
+            <a:avLst>
+              <a:gd name="adj" fmla="val 7619"/>
+            </a:avLst>
+          </a:prstGeom>
+          <a:solidFill>
+            <a:srgbClr val="F5F5F4"/>
+          </a:solidFill>
+          <a:ln w="15240">
+            <a:solidFill>
+              <a:srgbClr val="B45309"/>
+            </a:solidFill>
+            <a:prstDash val="solid"/>
+          </a:ln>
+        </p:spPr>
+      </p:sp>
+      <p:sp>
+        <p:nvSpPr>
+          <p:cNvPr id="7" name="Text 5"/>
+          <p:cNvSpPr/>
+          <p:nvPr/>
+        </p:nvSpPr>
+        <p:spPr>
+          <a:xfrm>
+            <a:off x="484632" y="1536192"/>
+            <a:ext cx="310896" cy="274320"/>
+          </a:xfrm>
+          <a:prstGeom prst="rect">
+            <a:avLst/>
+          </a:prstGeom>
+          <a:solidFill>
+            <a:srgbClr val="B45309"/>
+          </a:solidFill>
+          <a:ln/>
+        </p:spPr>
+        <p:txBody>
+          <a:bodyPr wrap="square" rtlCol="0" anchor="ctr"/>
+          <a:lstStyle/>
+          <a:p>
+            <a:pPr algn="ctr" indent="0" marL="0">
+              <a:buNone/>
+            </a:pPr>
+            <a:r>
+              <a:rPr lang="en-US" sz="1000" b="1" dirty="0">
+                <a:solidFill>
+                  <a:srgbClr val="FFFFFF"/>
+                </a:solidFill>
+                <a:latin typeface="Arial" pitchFamily="34" charset="0"/>
+                <a:ea typeface="Arial" pitchFamily="34" charset="-122"/>
+                <a:cs typeface="Arial" pitchFamily="34" charset="-120"/>
+              </a:rPr>
+              <a:t>1</a:t>
+            </a:r>
+            <a:endParaRPr lang="en-US" sz="1000" dirty="0"/>
+          </a:p>
+        </p:txBody>
+      </p:sp>
+      <p:sp>
+        <p:nvSpPr>
+          <p:cNvPr id="8" name="Text 6"/>
+          <p:cNvSpPr/>
+          <p:nvPr/>
+        </p:nvSpPr>
+        <p:spPr>
+          <a:xfrm>
+            <a:off x="411480" y="1737360"/>
+            <a:ext cx="2011680" cy="384048"/>
+          </a:xfrm>
+          <a:prstGeom prst="rect">
+            <a:avLst/>
+          </a:prstGeom>
+          <a:noFill/>
+          <a:ln/>
+        </p:spPr>
+        <p:txBody>
+          <a:bodyPr wrap="square" rtlCol="0" anchor="ctr"/>
+          <a:lstStyle/>
+          <a:p>
+            <a:pPr algn="ctr" indent="0" marL="0">
+              <a:buNone/>
+            </a:pPr>
+            <a:r>
+              <a:rPr lang="en-US" sz="1200" b="1" dirty="0">
+                <a:solidFill>
+                  <a:srgbClr val="1C1917"/>
+                </a:solidFill>
+                <a:latin typeface="Arial" pitchFamily="34" charset="0"/>
+                <a:ea typeface="Arial" pitchFamily="34" charset="-122"/>
+                <a:cs typeface="Arial" pitchFamily="34" charset="-120"/>
+              </a:rPr>
+              <a:t>Gather Inputs</a:t>
+            </a:r>
+            <a:endParaRPr lang="en-US" sz="1200" dirty="0"/>
+          </a:p>
+        </p:txBody>
+      </p:sp>
+      <p:sp>
+        <p:nvSpPr>
+          <p:cNvPr id="9" name="Text 7"/>
+          <p:cNvSpPr/>
+          <p:nvPr/>
+        </p:nvSpPr>
+        <p:spPr>
+          <a:xfrm>
+            <a:off x="411480" y="2084832"/>
+            <a:ext cx="2011680" cy="310896"/>
+          </a:xfrm>
+          <a:prstGeom prst="rect">
+            <a:avLst/>
+          </a:prstGeom>
+          <a:noFill/>
+          <a:ln/>
+        </p:spPr>
+        <p:txBody>
+          <a:bodyPr wrap="square" rtlCol="0" anchor="ctr"/>
+          <a:lstStyle/>
+          <a:p>
+            <a:pPr algn="ctr" indent="0" marL="0">
+              <a:buNone/>
+            </a:pPr>
+            <a:r>
+              <a:rPr lang="en-US" sz="900" dirty="0">
+                <a:solidFill>
+                  <a:srgbClr val="78716C"/>
+                </a:solidFill>
+                <a:latin typeface="Arial" pitchFamily="34" charset="0"/>
+                <a:ea typeface="Arial" pitchFamily="34" charset="-122"/>
+                <a:cs typeface="Arial" pitchFamily="34" charset="-120"/>
+              </a:rPr>
+              <a:t>3-5 yrs historical statements, assumptions</a:t>
+            </a:r>
+            <a:endParaRPr lang="en-US" sz="900" dirty="0"/>
+          </a:p>
+        </p:txBody>
+      </p:sp>
+      <p:sp>
+        <p:nvSpPr>
+          <p:cNvPr id="10" name="Shape 8"/>
+          <p:cNvSpPr/>
+          <p:nvPr/>
+        </p:nvSpPr>
+        <p:spPr>
+          <a:xfrm>
+            <a:off x="2478024" y="1842516"/>
+            <a:ext cx="301752" cy="201168"/>
+          </a:xfrm>
+          <a:prstGeom prst="rightArrow">
+            <a:avLst/>
+          </a:prstGeom>
+          <a:solidFill>
+            <a:srgbClr val="B45309"/>
+          </a:solidFill>
+          <a:ln/>
+        </p:spPr>
+      </p:sp>
+      <p:sp>
+        <p:nvSpPr>
+          <p:cNvPr id="11" name="Shape 9"/>
+          <p:cNvSpPr/>
+          <p:nvPr/>
+        </p:nvSpPr>
+        <p:spPr>
+          <a:xfrm>
+            <a:off x="2834640" y="1463040"/>
+            <a:ext cx="2011680" cy="960120"/>
+          </a:xfrm>
+          <a:prstGeom prst="roundRect">
+            <a:avLst>
+              <a:gd name="adj" fmla="val 7619"/>
+            </a:avLst>
+          </a:prstGeom>
+          <a:solidFill>
+            <a:srgbClr val="F5F5F4"/>
+          </a:solidFill>
+          <a:ln w="15240">
+            <a:solidFill>
+              <a:srgbClr val="B45309"/>
+            </a:solidFill>
+            <a:prstDash val="solid"/>
+          </a:ln>
+        </p:spPr>
+      </p:sp>
+      <p:sp>
+        <p:nvSpPr>
+          <p:cNvPr id="12" name="Text 10"/>
+          <p:cNvSpPr/>
+          <p:nvPr/>
+        </p:nvSpPr>
+        <p:spPr>
+          <a:xfrm>
+            <a:off x="2907792" y="1536192"/>
+            <a:ext cx="310896" cy="274320"/>
+          </a:xfrm>
+          <a:prstGeom prst="rect">
+            <a:avLst/>
+          </a:prstGeom>
+          <a:solidFill>
+            <a:srgbClr val="B45309"/>
+          </a:solidFill>
+          <a:ln/>
+        </p:spPr>
+        <p:txBody>
+          <a:bodyPr wrap="square" rtlCol="0" anchor="ctr"/>
+          <a:lstStyle/>
+          <a:p>
+            <a:pPr algn="ctr" indent="0" marL="0">
+              <a:buNone/>
+            </a:pPr>
+            <a:r>
+              <a:rPr lang="en-US" sz="1000" b="1" dirty="0">
+                <a:solidFill>
+                  <a:srgbClr val="FFFFFF"/>
+                </a:solidFill>
+                <a:latin typeface="Arial" pitchFamily="34" charset="0"/>
+                <a:ea typeface="Arial" pitchFamily="34" charset="-122"/>
+                <a:cs typeface="Arial" pitchFamily="34" charset="-120"/>
+              </a:rPr>
+              <a:t>2</a:t>
+            </a:r>
+            <a:endParaRPr lang="en-US" sz="1000" dirty="0"/>
+          </a:p>
+        </p:txBody>
+      </p:sp>
+      <p:sp>
+        <p:nvSpPr>
+          <p:cNvPr id="13" name="Text 11"/>
+          <p:cNvSpPr/>
+          <p:nvPr/>
+        </p:nvSpPr>
+        <p:spPr>
+          <a:xfrm>
+            <a:off x="2834640" y="1737360"/>
+            <a:ext cx="2011680" cy="384048"/>
+          </a:xfrm>
+          <a:prstGeom prst="rect">
+            <a:avLst/>
+          </a:prstGeom>
+          <a:noFill/>
+          <a:ln/>
+        </p:spPr>
+        <p:txBody>
+          <a:bodyPr wrap="square" rtlCol="0" anchor="ctr"/>
+          <a:lstStyle/>
+          <a:p>
+            <a:pPr algn="ctr" indent="0" marL="0">
+              <a:buNone/>
+            </a:pPr>
+            <a:r>
+              <a:rPr lang="en-US" sz="1200" b="1" dirty="0">
+                <a:solidFill>
+                  <a:srgbClr val="1C1917"/>
+                </a:solidFill>
+                <a:latin typeface="Arial" pitchFamily="34" charset="0"/>
+                <a:ea typeface="Arial" pitchFamily="34" charset="-122"/>
+                <a:cs typeface="Arial" pitchFamily="34" charset="-120"/>
+              </a:rPr>
+              <a:t>Forecast Revenue</a:t>
+            </a:r>
+            <a:endParaRPr lang="en-US" sz="1200" dirty="0"/>
+          </a:p>
+        </p:txBody>
+      </p:sp>
+      <p:sp>
+        <p:nvSpPr>
+          <p:cNvPr id="14" name="Text 12"/>
+          <p:cNvSpPr/>
+          <p:nvPr/>
+        </p:nvSpPr>
+        <p:spPr>
+          <a:xfrm>
+            <a:off x="2834640" y="2084832"/>
+            <a:ext cx="2011680" cy="310896"/>
+          </a:xfrm>
+          <a:prstGeom prst="rect">
+            <a:avLst/>
+          </a:prstGeom>
+          <a:noFill/>
+          <a:ln/>
+        </p:spPr>
+        <p:txBody>
+          <a:bodyPr wrap="square" rtlCol="0" anchor="ctr"/>
+          <a:lstStyle/>
+          <a:p>
+            <a:pPr algn="ctr" indent="0" marL="0">
+              <a:buNone/>
+            </a:pPr>
+            <a:r>
+              <a:rPr lang="en-US" sz="900" dirty="0">
+                <a:solidFill>
+                  <a:srgbClr val="78716C"/>
+                </a:solidFill>
+                <a:latin typeface="Arial" pitchFamily="34" charset="0"/>
+                <a:ea typeface="Arial" pitchFamily="34" charset="-122"/>
+                <a:cs typeface="Arial" pitchFamily="34" charset="-120"/>
+              </a:rPr>
+              <a:t>Apply growth rate to prior period revenue</a:t>
+            </a:r>
+            <a:endParaRPr lang="en-US" sz="900" dirty="0"/>
+          </a:p>
+        </p:txBody>
+      </p:sp>
+      <p:sp>
+        <p:nvSpPr>
+          <p:cNvPr id="15" name="Shape 13"/>
+          <p:cNvSpPr/>
+          <p:nvPr/>
+        </p:nvSpPr>
+        <p:spPr>
+          <a:xfrm>
+            <a:off x="4901184" y="1842516"/>
+            <a:ext cx="301752" cy="201168"/>
+          </a:xfrm>
+          <a:prstGeom prst="rightArrow">
+            <a:avLst/>
+          </a:prstGeom>
+          <a:solidFill>
+            <a:srgbClr val="B45309"/>
+          </a:solidFill>
+          <a:ln/>
+        </p:spPr>
+      </p:sp>
+      <p:sp>
+        <p:nvSpPr>
+          <p:cNvPr id="16" name="Shape 14"/>
+          <p:cNvSpPr/>
+          <p:nvPr/>
+        </p:nvSpPr>
+        <p:spPr>
+          <a:xfrm>
+            <a:off x="5257800" y="1463040"/>
+            <a:ext cx="2011680" cy="960120"/>
+          </a:xfrm>
+          <a:prstGeom prst="roundRect">
+            <a:avLst>
+              <a:gd name="adj" fmla="val 7619"/>
+            </a:avLst>
+          </a:prstGeom>
+          <a:solidFill>
+            <a:srgbClr val="F5F5F4"/>
+          </a:solidFill>
+          <a:ln w="15240">
+            <a:solidFill>
+              <a:srgbClr val="B45309"/>
+            </a:solidFill>
+            <a:prstDash val="solid"/>
+          </a:ln>
+        </p:spPr>
+      </p:sp>
+      <p:sp>
+        <p:nvSpPr>
+          <p:cNvPr id="17" name="Text 15"/>
+          <p:cNvSpPr/>
+          <p:nvPr/>
+        </p:nvSpPr>
+        <p:spPr>
+          <a:xfrm>
+            <a:off x="5330952" y="1536192"/>
+            <a:ext cx="310896" cy="274320"/>
+          </a:xfrm>
+          <a:prstGeom prst="rect">
+            <a:avLst/>
+          </a:prstGeom>
+          <a:solidFill>
+            <a:srgbClr val="B45309"/>
+          </a:solidFill>
+          <a:ln/>
+        </p:spPr>
+        <p:txBody>
+          <a:bodyPr wrap="square" rtlCol="0" anchor="ctr"/>
+          <a:lstStyle/>
+          <a:p>
+            <a:pPr algn="ctr" indent="0" marL="0">
+              <a:buNone/>
+            </a:pPr>
+            <a:r>
+              <a:rPr lang="en-US" sz="1000" b="1" dirty="0">
+                <a:solidFill>
+                  <a:srgbClr val="FFFFFF"/>
+                </a:solidFill>
+                <a:latin typeface="Arial" pitchFamily="34" charset="0"/>
+                <a:ea typeface="Arial" pitchFamily="34" charset="-122"/>
+                <a:cs typeface="Arial" pitchFamily="34" charset="-120"/>
+              </a:rPr>
+              <a:t>3</a:t>
+            </a:r>
+            <a:endParaRPr lang="en-US" sz="1000" dirty="0"/>
+          </a:p>
+        </p:txBody>
+      </p:sp>
+      <p:sp>
+        <p:nvSpPr>
+          <p:cNvPr id="18" name="Text 16"/>
+          <p:cNvSpPr/>
+          <p:nvPr/>
+        </p:nvSpPr>
+        <p:spPr>
+          <a:xfrm>
+            <a:off x="5257800" y="1737360"/>
+            <a:ext cx="2011680" cy="384048"/>
+          </a:xfrm>
+          <a:prstGeom prst="rect">
+            <a:avLst/>
+          </a:prstGeom>
+          <a:noFill/>
+          <a:ln/>
+        </p:spPr>
+        <p:txBody>
+          <a:bodyPr wrap="square" rtlCol="0" anchor="ctr"/>
+          <a:lstStyle/>
+          <a:p>
+            <a:pPr algn="ctr" indent="0" marL="0">
+              <a:buNone/>
+            </a:pPr>
+            <a:r>
+              <a:rPr lang="en-US" sz="1200" b="1" dirty="0">
+                <a:solidFill>
+                  <a:srgbClr val="1C1917"/>
+                </a:solidFill>
+                <a:latin typeface="Arial" pitchFamily="34" charset="0"/>
+                <a:ea typeface="Arial" pitchFamily="34" charset="-122"/>
+                <a:cs typeface="Arial" pitchFamily="34" charset="-120"/>
+              </a:rPr>
+              <a:t>Build Income Statement</a:t>
+            </a:r>
+            <a:endParaRPr lang="en-US" sz="1200" dirty="0"/>
+          </a:p>
+        </p:txBody>
+      </p:sp>
+      <p:sp>
+        <p:nvSpPr>
+          <p:cNvPr id="19" name="Text 17"/>
+          <p:cNvSpPr/>
+          <p:nvPr/>
+        </p:nvSpPr>
+        <p:spPr>
+          <a:xfrm>
+            <a:off x="5257800" y="2084832"/>
+            <a:ext cx="2011680" cy="310896"/>
+          </a:xfrm>
+          <a:prstGeom prst="rect">
+            <a:avLst/>
+          </a:prstGeom>
+          <a:noFill/>
+          <a:ln/>
+        </p:spPr>
+        <p:txBody>
+          <a:bodyPr wrap="square" rtlCol="0" anchor="ctr"/>
+          <a:lstStyle/>
+          <a:p>
+            <a:pPr algn="ctr" indent="0" marL="0">
+              <a:buNone/>
+            </a:pPr>
+            <a:r>
+              <a:rPr lang="en-US" sz="900" dirty="0">
+                <a:solidFill>
+                  <a:srgbClr val="78716C"/>
+                </a:solidFill>
+                <a:latin typeface="Arial" pitchFamily="34" charset="0"/>
+                <a:ea typeface="Arial" pitchFamily="34" charset="-122"/>
+                <a:cs typeface="Arial" pitchFamily="34" charset="-120"/>
+              </a:rPr>
+              <a:t>Gross margin drives COGS, EBIT, net income</a:t>
+            </a:r>
+            <a:endParaRPr lang="en-US" sz="900" dirty="0"/>
+          </a:p>
+        </p:txBody>
+      </p:sp>
+      <p:sp>
+        <p:nvSpPr>
+          <p:cNvPr id="20" name="Shape 18"/>
+          <p:cNvSpPr/>
+          <p:nvPr/>
+        </p:nvSpPr>
+        <p:spPr>
+          <a:xfrm>
+            <a:off x="6163056" y="2496312"/>
+            <a:ext cx="201168" cy="548640"/>
+          </a:xfrm>
+          <a:prstGeom prst="downArrow">
+            <a:avLst/>
+          </a:prstGeom>
+          <a:solidFill>
+            <a:srgbClr val="B45309"/>
+          </a:solidFill>
+          <a:ln/>
+        </p:spPr>
+      </p:sp>
+      <p:sp>
+        <p:nvSpPr>
+          <p:cNvPr id="21" name="Shape 19"/>
+          <p:cNvSpPr/>
+          <p:nvPr/>
+        </p:nvSpPr>
+        <p:spPr>
+          <a:xfrm>
+            <a:off x="5257800" y="3108960"/>
+            <a:ext cx="2011680" cy="960120"/>
+          </a:xfrm>
+          <a:prstGeom prst="roundRect">
+            <a:avLst>
+              <a:gd name="adj" fmla="val 7619"/>
+            </a:avLst>
+          </a:prstGeom>
+          <a:solidFill>
+            <a:srgbClr val="F5F5F4"/>
+          </a:solidFill>
+          <a:ln w="15240">
+            <a:solidFill>
+              <a:srgbClr val="B45309"/>
+            </a:solidFill>
+            <a:prstDash val="solid"/>
+          </a:ln>
+        </p:spPr>
+      </p:sp>
+      <p:sp>
+        <p:nvSpPr>
+          <p:cNvPr id="22" name="Text 20"/>
+          <p:cNvSpPr/>
+          <p:nvPr/>
+        </p:nvSpPr>
+        <p:spPr>
+          <a:xfrm>
+            <a:off x="5330952" y="3182112"/>
+            <a:ext cx="310896" cy="274320"/>
+          </a:xfrm>
+          <a:prstGeom prst="rect">
+            <a:avLst/>
+          </a:prstGeom>
+          <a:solidFill>
+            <a:srgbClr val="B45309"/>
+          </a:solidFill>
+          <a:ln/>
+        </p:spPr>
+        <p:txBody>
+          <a:bodyPr wrap="square" rtlCol="0" anchor="ctr"/>
+          <a:lstStyle/>
+          <a:p>
+            <a:pPr algn="ctr" indent="0" marL="0">
+              <a:buNone/>
+            </a:pPr>
+            <a:r>
+              <a:rPr lang="en-US" sz="1000" b="1" dirty="0">
+                <a:solidFill>
+                  <a:srgbClr val="FFFFFF"/>
+                </a:solidFill>
+                <a:latin typeface="Arial" pitchFamily="34" charset="0"/>
+                <a:ea typeface="Arial" pitchFamily="34" charset="-122"/>
+                <a:cs typeface="Arial" pitchFamily="34" charset="-120"/>
+              </a:rPr>
+              <a:t>4</a:t>
+            </a:r>
+            <a:endParaRPr lang="en-US" sz="1000" dirty="0"/>
+          </a:p>
+        </p:txBody>
+      </p:sp>
+      <p:sp>
+        <p:nvSpPr>
+          <p:cNvPr id="23" name="Text 21"/>
+          <p:cNvSpPr/>
+          <p:nvPr/>
+        </p:nvSpPr>
+        <p:spPr>
+          <a:xfrm>
+            <a:off x="5257800" y="3383280"/>
+            <a:ext cx="2011680" cy="384048"/>
+          </a:xfrm>
+          <a:prstGeom prst="rect">
+            <a:avLst/>
+          </a:prstGeom>
+          <a:noFill/>
+          <a:ln/>
+        </p:spPr>
+        <p:txBody>
+          <a:bodyPr wrap="square" rtlCol="0" anchor="ctr"/>
+          <a:lstStyle/>
+          <a:p>
+            <a:pPr algn="ctr" indent="0" marL="0">
+              <a:buNone/>
+            </a:pPr>
+            <a:r>
+              <a:rPr lang="en-US" sz="1200" b="1" dirty="0">
+                <a:solidFill>
+                  <a:srgbClr val="1C1917"/>
+                </a:solidFill>
+                <a:latin typeface="Arial" pitchFamily="34" charset="0"/>
+                <a:ea typeface="Arial" pitchFamily="34" charset="-122"/>
+                <a:cs typeface="Arial" pitchFamily="34" charset="-120"/>
+              </a:rPr>
+              <a:t>Project Balance Sheet</a:t>
+            </a:r>
+            <a:endParaRPr lang="en-US" sz="1200" dirty="0"/>
+          </a:p>
+        </p:txBody>
+      </p:sp>
+      <p:sp>
+        <p:nvSpPr>
+          <p:cNvPr id="24" name="Text 22"/>
+          <p:cNvSpPr/>
+          <p:nvPr/>
+        </p:nvSpPr>
+        <p:spPr>
+          <a:xfrm>
+            <a:off x="5257800" y="3730752"/>
+            <a:ext cx="2011680" cy="310896"/>
+          </a:xfrm>
+          <a:prstGeom prst="rect">
+            <a:avLst/>
+          </a:prstGeom>
+          <a:noFill/>
+          <a:ln/>
+        </p:spPr>
+        <p:txBody>
+          <a:bodyPr wrap="square" rtlCol="0" anchor="ctr"/>
+          <a:lstStyle/>
+          <a:p>
+            <a:pPr algn="ctr" indent="0" marL="0">
+              <a:buNone/>
+            </a:pPr>
+            <a:r>
+              <a:rPr lang="en-US" sz="900" dirty="0">
+                <a:solidFill>
+                  <a:srgbClr val="78716C"/>
+                </a:solidFill>
+                <a:latin typeface="Arial" pitchFamily="34" charset="0"/>
+                <a:ea typeface="Arial" pitchFamily="34" charset="-122"/>
+                <a:cs typeface="Arial" pitchFamily="34" charset="-120"/>
+              </a:rPr>
+              <a:t>DSO, DIO, DPO link to revenue or COGS</a:t>
+            </a:r>
+            <a:endParaRPr lang="en-US" sz="900" dirty="0"/>
+          </a:p>
+        </p:txBody>
+      </p:sp>
+      <p:sp>
+        <p:nvSpPr>
+          <p:cNvPr id="25" name="Shape 23"/>
+          <p:cNvSpPr/>
+          <p:nvPr/>
+        </p:nvSpPr>
+        <p:spPr>
+          <a:xfrm>
+            <a:off x="4901184" y="3488436"/>
+            <a:ext cx="301752" cy="201168"/>
+          </a:xfrm>
+          <a:prstGeom prst="leftArrow">
+            <a:avLst/>
+          </a:prstGeom>
+          <a:solidFill>
+            <a:srgbClr val="B45309"/>
+          </a:solidFill>
+          <a:ln/>
+        </p:spPr>
+      </p:sp>
+      <p:sp>
+        <p:nvSpPr>
+          <p:cNvPr id="26" name="Shape 24"/>
+          <p:cNvSpPr/>
+          <p:nvPr/>
+        </p:nvSpPr>
+        <p:spPr>
+          <a:xfrm>
+            <a:off x="2834640" y="3108960"/>
+            <a:ext cx="2011680" cy="960120"/>
+          </a:xfrm>
+          <a:prstGeom prst="roundRect">
+            <a:avLst>
+              <a:gd name="adj" fmla="val 7619"/>
+            </a:avLst>
+          </a:prstGeom>
+          <a:solidFill>
+            <a:srgbClr val="F5F5F4"/>
+          </a:solidFill>
+          <a:ln w="15240">
+            <a:solidFill>
+              <a:srgbClr val="B45309"/>
+            </a:solidFill>
+            <a:prstDash val="solid"/>
+          </a:ln>
+        </p:spPr>
+      </p:sp>
+      <p:sp>
+        <p:nvSpPr>
+          <p:cNvPr id="27" name="Text 25"/>
+          <p:cNvSpPr/>
+          <p:nvPr/>
+        </p:nvSpPr>
+        <p:spPr>
+          <a:xfrm>
+            <a:off x="2907792" y="3182112"/>
+            <a:ext cx="310896" cy="274320"/>
+          </a:xfrm>
+          <a:prstGeom prst="rect">
+            <a:avLst/>
+          </a:prstGeom>
+          <a:solidFill>
+            <a:srgbClr val="B45309"/>
+          </a:solidFill>
+          <a:ln/>
+        </p:spPr>
+        <p:txBody>
+          <a:bodyPr wrap="square" rtlCol="0" anchor="ctr"/>
+          <a:lstStyle/>
+          <a:p>
+            <a:pPr algn="ctr" indent="0" marL="0">
+              <a:buNone/>
+            </a:pPr>
+            <a:r>
+              <a:rPr lang="en-US" sz="1000" b="1" dirty="0">
+                <a:solidFill>
+                  <a:srgbClr val="FFFFFF"/>
+                </a:solidFill>
+                <a:latin typeface="Arial" pitchFamily="34" charset="0"/>
+                <a:ea typeface="Arial" pitchFamily="34" charset="-122"/>
+                <a:cs typeface="Arial" pitchFamily="34" charset="-120"/>
+              </a:rPr>
+              <a:t>5</a:t>
+            </a:r>
+            <a:endParaRPr lang="en-US" sz="1000" dirty="0"/>
+          </a:p>
+        </p:txBody>
+      </p:sp>
+      <p:sp>
+        <p:nvSpPr>
+          <p:cNvPr id="28" name="Text 26"/>
+          <p:cNvSpPr/>
+          <p:nvPr/>
+        </p:nvSpPr>
+        <p:spPr>
+          <a:xfrm>
+            <a:off x="2834640" y="3383280"/>
+            <a:ext cx="2011680" cy="384048"/>
+          </a:xfrm>
+          <a:prstGeom prst="rect">
+            <a:avLst/>
+          </a:prstGeom>
+          <a:noFill/>
+          <a:ln/>
+        </p:spPr>
+        <p:txBody>
+          <a:bodyPr wrap="square" rtlCol="0" anchor="ctr"/>
+          <a:lstStyle/>
+          <a:p>
+            <a:pPr algn="ctr" indent="0" marL="0">
+              <a:buNone/>
+            </a:pPr>
+            <a:r>
+              <a:rPr lang="en-US" sz="1200" b="1" dirty="0">
+                <a:solidFill>
+                  <a:srgbClr val="1C1917"/>
+                </a:solidFill>
+                <a:latin typeface="Arial" pitchFamily="34" charset="0"/>
+                <a:ea typeface="Arial" pitchFamily="34" charset="-122"/>
+                <a:cs typeface="Arial" pitchFamily="34" charset="-120"/>
+              </a:rPr>
+              <a:t>Debt &amp; Interest Schedule</a:t>
+            </a:r>
+            <a:endParaRPr lang="en-US" sz="1200" dirty="0"/>
+          </a:p>
+        </p:txBody>
+      </p:sp>
+      <p:sp>
+        <p:nvSpPr>
+          <p:cNvPr id="29" name="Text 27"/>
+          <p:cNvSpPr/>
+          <p:nvPr/>
+        </p:nvSpPr>
+        <p:spPr>
+          <a:xfrm>
+            <a:off x="2834640" y="3730752"/>
+            <a:ext cx="2011680" cy="310896"/>
+          </a:xfrm>
+          <a:prstGeom prst="rect">
+            <a:avLst/>
+          </a:prstGeom>
+          <a:noFill/>
+          <a:ln/>
+        </p:spPr>
+        <p:txBody>
+          <a:bodyPr wrap="square" rtlCol="0" anchor="ctr"/>
+          <a:lstStyle/>
+          <a:p>
+            <a:pPr algn="ctr" indent="0" marL="0">
+              <a:buNone/>
+            </a:pPr>
+            <a:r>
+              <a:rPr lang="en-US" sz="900" dirty="0">
+                <a:solidFill>
+                  <a:srgbClr val="78716C"/>
+                </a:solidFill>
+                <a:latin typeface="Arial" pitchFamily="34" charset="0"/>
+                <a:ea typeface="Arial" pitchFamily="34" charset="-122"/>
+                <a:cs typeface="Arial" pitchFamily="34" charset="-120"/>
+              </a:rPr>
+              <a:t>Model debt balances and interest expense</a:t>
+            </a:r>
+            <a:endParaRPr lang="en-US" sz="900" dirty="0"/>
+          </a:p>
+        </p:txBody>
+      </p:sp>
+      <p:sp>
+        <p:nvSpPr>
+          <p:cNvPr id="30" name="Shape 28"/>
+          <p:cNvSpPr/>
+          <p:nvPr/>
+        </p:nvSpPr>
+        <p:spPr>
+          <a:xfrm>
+            <a:off x="2478024" y="3488436"/>
+            <a:ext cx="301752" cy="201168"/>
+          </a:xfrm>
+          <a:prstGeom prst="leftArrow">
+            <a:avLst/>
+          </a:prstGeom>
+          <a:solidFill>
+            <a:srgbClr val="B45309"/>
+          </a:solidFill>
+          <a:ln/>
+        </p:spPr>
+      </p:sp>
+      <p:sp>
+        <p:nvSpPr>
+          <p:cNvPr id="31" name="Shape 29"/>
+          <p:cNvSpPr/>
+          <p:nvPr/>
+        </p:nvSpPr>
+        <p:spPr>
+          <a:xfrm>
+            <a:off x="411480" y="3108960"/>
+            <a:ext cx="2011680" cy="960120"/>
+          </a:xfrm>
+          <a:prstGeom prst="roundRect">
+            <a:avLst>
+              <a:gd name="adj" fmla="val 7619"/>
+            </a:avLst>
+          </a:prstGeom>
+          <a:solidFill>
+            <a:srgbClr val="F5F5F4"/>
+          </a:solidFill>
+          <a:ln w="15240">
+            <a:solidFill>
+              <a:srgbClr val="B45309"/>
+            </a:solidFill>
+            <a:prstDash val="solid"/>
+          </a:ln>
+        </p:spPr>
+      </p:sp>
+      <p:sp>
+        <p:nvSpPr>
+          <p:cNvPr id="32" name="Text 30"/>
+          <p:cNvSpPr/>
+          <p:nvPr/>
+        </p:nvSpPr>
+        <p:spPr>
+          <a:xfrm>
+            <a:off x="484632" y="3182112"/>
+            <a:ext cx="310896" cy="274320"/>
+          </a:xfrm>
+          <a:prstGeom prst="rect">
+            <a:avLst/>
+          </a:prstGeom>
+          <a:solidFill>
+            <a:srgbClr val="B45309"/>
+          </a:solidFill>
+          <a:ln/>
+        </p:spPr>
+        <p:txBody>
+          <a:bodyPr wrap="square" rtlCol="0" anchor="ctr"/>
+          <a:lstStyle/>
+          <a:p>
+            <a:pPr algn="ctr" indent="0" marL="0">
+              <a:buNone/>
+            </a:pPr>
+            <a:r>
+              <a:rPr lang="en-US" sz="1000" b="1" dirty="0">
+                <a:solidFill>
+                  <a:srgbClr val="FFFFFF"/>
+                </a:solidFill>
+                <a:latin typeface="Arial" pitchFamily="34" charset="0"/>
+                <a:ea typeface="Arial" pitchFamily="34" charset="-122"/>
+                <a:cs typeface="Arial" pitchFamily="34" charset="-120"/>
+              </a:rPr>
+              <a:t>6</a:t>
+            </a:r>
+            <a:endParaRPr lang="en-US" sz="1000" dirty="0"/>
+          </a:p>
+        </p:txBody>
+      </p:sp>
+      <p:sp>
+        <p:nvSpPr>
+          <p:cNvPr id="33" name="Text 31"/>
+          <p:cNvSpPr/>
+          <p:nvPr/>
+        </p:nvSpPr>
+        <p:spPr>
+          <a:xfrm>
+            <a:off x="411480" y="3383280"/>
+            <a:ext cx="2011680" cy="384048"/>
+          </a:xfrm>
+          <a:prstGeom prst="rect">
+            <a:avLst/>
+          </a:prstGeom>
+          <a:noFill/>
+          <a:ln/>
+        </p:spPr>
+        <p:txBody>
+          <a:bodyPr wrap="square" rtlCol="0" anchor="ctr"/>
+          <a:lstStyle/>
+          <a:p>
+            <a:pPr algn="ctr" indent="0" marL="0">
+              <a:buNone/>
+            </a:pPr>
+            <a:r>
+              <a:rPr lang="en-US" sz="1200" b="1" dirty="0">
+                <a:solidFill>
+                  <a:srgbClr val="1C1917"/>
+                </a:solidFill>
+                <a:latin typeface="Arial" pitchFamily="34" charset="0"/>
+                <a:ea typeface="Arial" pitchFamily="34" charset="-122"/>
+                <a:cs typeface="Arial" pitchFamily="34" charset="-120"/>
+              </a:rPr>
+              <a:t>Cash Flow Statement</a:t>
+            </a:r>
+            <a:endParaRPr lang="en-US" sz="1200" dirty="0"/>
+          </a:p>
+        </p:txBody>
+      </p:sp>
+      <p:sp>
+        <p:nvSpPr>
+          <p:cNvPr id="34" name="Text 32"/>
+          <p:cNvSpPr/>
+          <p:nvPr/>
+        </p:nvSpPr>
+        <p:spPr>
+          <a:xfrm>
+            <a:off x="411480" y="3730752"/>
+            <a:ext cx="2011680" cy="310896"/>
+          </a:xfrm>
+          <a:prstGeom prst="rect">
+            <a:avLst/>
+          </a:prstGeom>
+          <a:noFill/>
+          <a:ln/>
+        </p:spPr>
+        <p:txBody>
+          <a:bodyPr wrap="square" rtlCol="0" anchor="ctr"/>
+          <a:lstStyle/>
+          <a:p>
+            <a:pPr algn="ctr" indent="0" marL="0">
+              <a:buNone/>
+            </a:pPr>
+            <a:r>
+              <a:rPr lang="en-US" sz="900" dirty="0">
+                <a:solidFill>
+                  <a:srgbClr val="78716C"/>
+                </a:solidFill>
+                <a:latin typeface="Arial" pitchFamily="34" charset="0"/>
+                <a:ea typeface="Arial" pitchFamily="34" charset="-122"/>
+                <a:cs typeface="Arial" pitchFamily="34" charset="-120"/>
+              </a:rPr>
+              <a:t>Ending Cash = Begin + CFO + CFI + CFF</a:t>
+            </a:r>
+            <a:endParaRPr lang="en-US" sz="900" dirty="0"/>
+          </a:p>
+        </p:txBody>
+      </p:sp>
+    </p:spTree>
+  </p:cSld>
+  <p:clrMapOvr>
+    <a:masterClrMapping/>
+  </p:clrMapOvr>
+</p:sld>
+</file>
+
+<file path=ppt/slides/slide8.xml><?xml version="1.0" encoding="utf-8"?>
+<p:sld xmlns:a="http://schemas.openxmlformats.org/drawingml/2006/main" xmlns:r="http://schemas.openxmlformats.org/officeDocument/2006/relationships" xmlns:p="http://schemas.openxmlformats.org/presentationml/2006/main">
+  <p:cSld name="Slide 8">
+    <p:bg>
+      <p:bgPr>
+        <a:solidFill>
+          <a:srgbClr val="FFFFFF"/>
+        </a:solidFill>
+      </p:bgPr>
+    </p:bg>
+    <p:spTree>
+      <p:nvGrpSpPr>
+        <p:cNvPr id="1" name=""/>
+        <p:cNvGrpSpPr/>
+        <p:nvPr/>
+      </p:nvGrpSpPr>
+      <p:grpSpPr>
+        <a:xfrm>
+          <a:off x="0" y="0"/>
+          <a:ext cx="0" cy="0"/>
+          <a:chOff x="0" y="0"/>
+          <a:chExt cx="0" cy="0"/>
+        </a:xfrm>
+      </p:grpSpPr>
+      <p:sp>
+        <p:nvSpPr>
+          <p:cNvPr id="2" name="Shape 0"/>
+          <p:cNvSpPr/>
+          <p:nvPr/>
+        </p:nvSpPr>
+        <p:spPr>
+          <a:xfrm>
+            <a:off x="411480" y="402336"/>
+            <a:ext cx="82296" cy="329184"/>
+          </a:xfrm>
+          <a:prstGeom prst="rect">
+            <a:avLst/>
+          </a:prstGeom>
+          <a:solidFill>
+            <a:srgbClr val="B45309"/>
+          </a:solidFill>
+          <a:ln/>
+        </p:spPr>
+      </p:sp>
+      <p:sp>
+        <p:nvSpPr>
+          <p:cNvPr id="3" name="Text 1"/>
+          <p:cNvSpPr/>
+          <p:nvPr/>
+        </p:nvSpPr>
+        <p:spPr>
+          <a:xfrm>
+            <a:off x="566928" y="292608"/>
+            <a:ext cx="8138160" cy="548640"/>
+          </a:xfrm>
+          <a:prstGeom prst="rect">
+            <a:avLst/>
+          </a:prstGeom>
+          <a:noFill/>
+          <a:ln/>
+        </p:spPr>
+        <p:txBody>
+          <a:bodyPr wrap="square" rtlCol="0" anchor="ctr"/>
+          <a:lstStyle/>
+          <a:p>
+            <a:pPr indent="0" marL="0">
+              <a:buNone/>
+            </a:pPr>
+            <a:r>
+              <a:rPr lang="en-US" sz="2100" b="1" dirty="0">
+                <a:solidFill>
+                  <a:srgbClr val="1C1917"/>
+                </a:solidFill>
+                <a:latin typeface="Arial" pitchFamily="34" charset="0"/>
+                <a:ea typeface="Arial" pitchFamily="34" charset="-122"/>
+                <a:cs typeface="Arial" pitchFamily="34" charset="-120"/>
+              </a:rPr>
+              <a:t>Worked Example: Terminology Applied</a:t>
+            </a:r>
+            <a:endParaRPr lang="en-US" sz="2100" dirty="0"/>
+          </a:p>
+        </p:txBody>
+      </p:sp>
+      <p:sp>
+        <p:nvSpPr>
+          <p:cNvPr id="4" name="Shape 2"/>
+          <p:cNvSpPr/>
+          <p:nvPr/>
+        </p:nvSpPr>
+        <p:spPr>
+          <a:xfrm>
+            <a:off x="411480" y="960120"/>
+            <a:ext cx="8321040" cy="0"/>
+          </a:xfrm>
+          <a:prstGeom prst="line">
+            <a:avLst/>
+          </a:prstGeom>
+          <a:noFill/>
+          <a:ln w="12700">
+            <a:solidFill>
+              <a:srgbClr val="E7E5E4"/>
+            </a:solidFill>
+            <a:prstDash val="solid"/>
+          </a:ln>
+        </p:spPr>
+      </p:sp>
+      <p:sp>
+        <p:nvSpPr>
+          <p:cNvPr id="5" name="Text 3"/>
+          <p:cNvSpPr/>
+          <p:nvPr/>
+        </p:nvSpPr>
+        <p:spPr>
+          <a:xfrm>
+            <a:off x="411480" y="4864608"/>
+            <a:ext cx="8321040" cy="237744"/>
+          </a:xfrm>
+          <a:prstGeom prst="rect">
+            <a:avLst/>
+          </a:prstGeom>
+          <a:noFill/>
+          <a:ln/>
+        </p:spPr>
+        <p:txBody>
+          <a:bodyPr wrap="square" rtlCol="0" anchor="ctr"/>
+          <a:lstStyle/>
+          <a:p>
+            <a:pPr indent="0" marL="0">
+              <a:buNone/>
+            </a:pPr>
+            <a:r>
+              <a:rPr lang="en-US" sz="750" dirty="0">
+                <a:solidFill>
+                  <a:srgbClr val="AAAAAA"/>
+                </a:solidFill>
+                <a:latin typeface="Arial" pitchFamily="34" charset="0"/>
+                <a:ea typeface="Arial" pitchFamily="34" charset="-122"/>
+                <a:cs typeface="Arial" pitchFamily="34" charset="-120"/>
+              </a:rPr>
+              <a:t>Lesson Forge Pro (owner) — This content is educational material only and does not constitute financial, investment, or trading advice.</a:t>
+            </a:r>
+            <a:endParaRPr lang="en-US" sz="750" dirty="0"/>
+          </a:p>
+        </p:txBody>
+      </p:sp>
+      <p:sp>
+        <p:nvSpPr>
+          <p:cNvPr id="6" name="Text 4"/>
+          <p:cNvSpPr/>
+          <p:nvPr/>
+        </p:nvSpPr>
+        <p:spPr>
+          <a:xfrm>
+            <a:off x="731520" y="1188720"/>
+            <a:ext cx="7680960" cy="2743200"/>
+          </a:xfrm>
+          <a:prstGeom prst="rect">
+            <a:avLst/>
+          </a:prstGeom>
+          <a:noFill/>
+          <a:ln/>
+        </p:spPr>
+        <p:txBody>
+          <a:bodyPr wrap="square" rtlCol="0" anchor="t"/>
+          <a:lstStyle/>
+          <a:p>
+            <a:pPr marL="152400" indent="-152400">
+              <a:spcAft>
+                <a:spcPts val="800"/>
+              </a:spcAft>
+              <a:buSzPct val="100000"/>
+              <a:buChar char="•"/>
+            </a:pPr>
+            <a:r>
+              <a:rPr lang="en-US" sz="1500" dirty="0">
+                <a:solidFill>
+                  <a:srgbClr val="1C1917"/>
+                </a:solidFill>
+                <a:latin typeface="Arial" pitchFamily="34" charset="0"/>
+                <a:ea typeface="Arial" pitchFamily="34" charset="-122"/>
+                <a:cs typeface="Arial" pitchFamily="34" charset="-120"/>
+              </a:rPr>
+              <a:t>Maple Ridge: Year 0 revenue $4M, g = 10%, gross margin = 40%.</a:t>
+            </a:r>
+            <a:endParaRPr lang="en-US" sz="1500" dirty="0"/>
+          </a:p>
+          <a:p>
+            <a:pPr marL="152400" indent="-152400">
+              <a:spcAft>
+                <a:spcPts val="800"/>
+              </a:spcAft>
+              <a:buSzPct val="100000"/>
+              <a:buChar char="•"/>
+            </a:pPr>
+            <a:r>
+              <a:rPr lang="en-US" sz="1500" dirty="0">
+                <a:solidFill>
+                  <a:srgbClr val="1C1917"/>
+                </a:solidFill>
+                <a:latin typeface="Arial" pitchFamily="34" charset="0"/>
+                <a:ea typeface="Arial" pitchFamily="34" charset="-122"/>
+                <a:cs typeface="Arial" pitchFamily="34" charset="-120"/>
+              </a:rPr>
+              <a:t>Year 1 revenue: $4,000,000 × 1.10 = $4,400,000.</a:t>
+            </a:r>
+            <a:endParaRPr lang="en-US" sz="1500" dirty="0"/>
+          </a:p>
+          <a:p>
+            <a:pPr marL="152400" indent="-152400">
+              <a:spcAft>
+                <a:spcPts val="800"/>
+              </a:spcAft>
+              <a:buSzPct val="100000"/>
+              <a:buChar char="•"/>
+            </a:pPr>
+            <a:r>
+              <a:rPr lang="en-US" sz="1500" dirty="0">
+                <a:solidFill>
+                  <a:srgbClr val="1C1917"/>
+                </a:solidFill>
+                <a:latin typeface="Arial" pitchFamily="34" charset="0"/>
+                <a:ea typeface="Arial" pitchFamily="34" charset="-122"/>
+                <a:cs typeface="Arial" pitchFamily="34" charset="-120"/>
+              </a:rPr>
+              <a:t>Gross profit: $4,400,000 × 40% = $1,760,000; COGS = $2,640,000.</a:t>
+            </a:r>
+            <a:endParaRPr lang="en-US" sz="1500" dirty="0"/>
+          </a:p>
+          <a:p>
+            <a:pPr marL="152400" indent="-152400">
+              <a:spcAft>
+                <a:spcPts val="800"/>
+              </a:spcAft>
+              <a:buSzPct val="100000"/>
+              <a:buChar char="•"/>
+            </a:pPr>
+            <a:r>
+              <a:rPr lang="en-US" sz="1500" dirty="0">
+                <a:solidFill>
+                  <a:srgbClr val="1C1917"/>
+                </a:solidFill>
+                <a:latin typeface="Arial" pitchFamily="34" charset="0"/>
+                <a:ea typeface="Arial" pitchFamily="34" charset="-122"/>
+                <a:cs typeface="Arial" pitchFamily="34" charset="-120"/>
+              </a:rPr>
+              <a:t>EBIT: $1,760,000 − $800,000 operating expenses = $960,000.</a:t>
+            </a:r>
+            <a:endParaRPr lang="en-US" sz="1500" dirty="0"/>
+          </a:p>
+          <a:p>
+            <a:pPr marL="152400" indent="-152400">
+              <a:spcAft>
+                <a:spcPts val="800"/>
+              </a:spcAft>
+              <a:buSzPct val="100000"/>
+              <a:buChar char="•"/>
+            </a:pPr>
+            <a:r>
+              <a:rPr lang="en-US" sz="1500" dirty="0">
+                <a:solidFill>
+                  <a:srgbClr val="1C1917"/>
+                </a:solidFill>
+                <a:latin typeface="Arial" pitchFamily="34" charset="0"/>
+                <a:ea typeface="Arial" pitchFamily="34" charset="-122"/>
+                <a:cs typeface="Arial" pitchFamily="34" charset="-120"/>
+              </a:rPr>
+              <a:t>Every number traces back to just two drivers: growth rate and gross margin.</a:t>
+            </a:r>
+            <a:endParaRPr lang="en-US" sz="1500" dirty="0"/>
+          </a:p>
+        </p:txBody>
+      </p:sp>
+      <p:sp>
+        <p:nvSpPr>
+          <p:cNvPr id="7" name="Shape 5"/>
+          <p:cNvSpPr/>
+          <p:nvPr/>
+        </p:nvSpPr>
+        <p:spPr>
+          <a:xfrm>
+            <a:off x="731520" y="4041648"/>
+            <a:ext cx="7680960" cy="566928"/>
+          </a:xfrm>
+          <a:prstGeom prst="roundRect">
+            <a:avLst>
+              <a:gd name="adj" fmla="val 12903"/>
+            </a:avLst>
+          </a:prstGeom>
+          <a:solidFill>
+            <a:srgbClr val="B45309">
+              <a:alpha val="12000"/>
+            </a:srgbClr>
+          </a:solidFill>
+          <a:ln w="12700">
+            <a:solidFill>
+              <a:srgbClr val="B45309"/>
+            </a:solidFill>
+            <a:prstDash val="solid"/>
+          </a:ln>
+        </p:spPr>
+      </p:sp>
+      <p:sp>
+        <p:nvSpPr>
+          <p:cNvPr id="8" name="Text 6"/>
+          <p:cNvSpPr/>
+          <p:nvPr/>
+        </p:nvSpPr>
+        <p:spPr>
+          <a:xfrm>
+            <a:off x="868680" y="4087368"/>
+            <a:ext cx="7406640" cy="475488"/>
+          </a:xfrm>
+          <a:prstGeom prst="rect">
+            <a:avLst/>
+          </a:prstGeom>
+          <a:noFill/>
+          <a:ln/>
+        </p:spPr>
+        <p:txBody>
+          <a:bodyPr wrap="square" rtlCol="0" anchor="ctr"/>
+          <a:lstStyle/>
+          <a:p>
+            <a:pPr indent="0" marL="0">
+              <a:buNone/>
+            </a:pPr>
+            <a:r>
+              <a:rPr lang="en-US" sz="1100" b="1" dirty="0">
+                <a:solidFill>
+                  <a:srgbClr val="B45309"/>
+                </a:solidFill>
+                <a:latin typeface="Arial" pitchFamily="34" charset="0"/>
+                <a:ea typeface="Arial" pitchFamily="34" charset="-122"/>
+                <a:cs typeface="Arial" pitchFamily="34" charset="-120"/>
+              </a:rPr>
+              <a:t>Takeaway  </a:t>
+            </a:r>
+            <a:pPr indent="0" marL="0">
+              <a:buNone/>
+            </a:pPr>
+            <a:r>
+              <a:rPr lang="en-US" sz="1150" dirty="0">
+                <a:solidFill>
+                  <a:srgbClr val="1C1917"/>
+                </a:solidFill>
+                <a:latin typeface="Arial" pitchFamily="34" charset="0"/>
+                <a:ea typeface="Arial" pitchFamily="34" charset="-122"/>
+                <a:cs typeface="Arial" pitchFamily="34" charset="-120"/>
+              </a:rPr>
+              <a:t>A simple two-driver model illustrates how assumptions cascade into a complete pro forma income statement.</a:t>
+            </a:r>
+            <a:endParaRPr lang="en-US" sz="1100" dirty="0"/>
+          </a:p>
+        </p:txBody>
+      </p:sp>
+    </p:spTree>
+  </p:cSld>
+  <p:clrMapOvr>
+    <a:masterClrMapping/>
+  </p:clrMapOvr>
+</p:sld>
+</file>
+
+<file path=ppt/slides/slide9.xml><?xml version="1.0" encoding="utf-8"?>
+<p:sld xmlns:a="http://schemas.openxmlformats.org/drawingml/2006/main" xmlns:r="http://schemas.openxmlformats.org/officeDocument/2006/relationships" xmlns:p="http://schemas.openxmlformats.org/presentationml/2006/main">
+  <p:cSld name="Slide 9">
+    <p:bg>
+      <p:bgPr>
+        <a:solidFill>
+          <a:srgbClr val="FFFFFF"/>
+        </a:solidFill>
+      </p:bgPr>
+    </p:bg>
+    <p:spTree>
+      <p:nvGrpSpPr>
+        <p:cNvPr id="1" name=""/>
+        <p:cNvGrpSpPr/>
+        <p:nvPr/>
+      </p:nvGrpSpPr>
+      <p:grpSpPr>
+        <a:xfrm>
+          <a:off x="0" y="0"/>
+          <a:ext cx="0" cy="0"/>
+          <a:chOff x="0" y="0"/>
+          <a:chExt cx="0" cy="0"/>
+        </a:xfrm>
+      </p:grpSpPr>
+      <p:sp>
+        <p:nvSpPr>
+          <p:cNvPr id="2" name="Shape 0"/>
+          <p:cNvSpPr/>
+          <p:nvPr/>
+        </p:nvSpPr>
+        <p:spPr>
+          <a:xfrm>
+            <a:off x="411480" y="402336"/>
+            <a:ext cx="82296" cy="329184"/>
+          </a:xfrm>
+          <a:prstGeom prst="rect">
+            <a:avLst/>
+          </a:prstGeom>
+          <a:solidFill>
+            <a:srgbClr val="B45309"/>
+          </a:solidFill>
+          <a:ln/>
+        </p:spPr>
+      </p:sp>
+      <p:sp>
+        <p:nvSpPr>
+          <p:cNvPr id="3" name="Text 1"/>
+          <p:cNvSpPr/>
+          <p:nvPr/>
+        </p:nvSpPr>
+        <p:spPr>
+          <a:xfrm>
+            <a:off x="566928" y="292608"/>
+            <a:ext cx="8138160" cy="548640"/>
+          </a:xfrm>
+          <a:prstGeom prst="rect">
+            <a:avLst/>
+          </a:prstGeom>
+          <a:noFill/>
+          <a:ln/>
+        </p:spPr>
+        <p:txBody>
+          <a:bodyPr wrap="square" rtlCol="0" anchor="ctr"/>
+          <a:lstStyle/>
+          <a:p>
+            <a:pPr indent="0" marL="0">
+              <a:buNone/>
+            </a:pPr>
+            <a:r>
+              <a:rPr lang="en-US" sz="2100" b="1" dirty="0">
+                <a:solidFill>
+                  <a:srgbClr val="1C1917"/>
+                </a:solidFill>
+                <a:latin typeface="Arial" pitchFamily="34" charset="0"/>
+                <a:ea typeface="Arial" pitchFamily="34" charset="-122"/>
+                <a:cs typeface="Arial" pitchFamily="34" charset="-120"/>
+              </a:rPr>
+              <a:t>Inputs: What You Need Before Modeling</a:t>
+            </a:r>
+            <a:endParaRPr lang="en-US" sz="2100" dirty="0"/>
+          </a:p>
+        </p:txBody>
+      </p:sp>
+      <p:sp>
+        <p:nvSpPr>
+          <p:cNvPr id="4" name="Shape 2"/>
+          <p:cNvSpPr/>
+          <p:nvPr/>
+        </p:nvSpPr>
+        <p:spPr>
+          <a:xfrm>
+            <a:off x="411480" y="960120"/>
+            <a:ext cx="8321040" cy="0"/>
+          </a:xfrm>
+          <a:prstGeom prst="line">
+            <a:avLst/>
+          </a:prstGeom>
+          <a:noFill/>
+          <a:ln w="12700">
+            <a:solidFill>
+              <a:srgbClr val="E7E5E4"/>
+            </a:solidFill>
+            <a:prstDash val="solid"/>
+          </a:ln>
+        </p:spPr>
+      </p:sp>
+      <p:sp>
+        <p:nvSpPr>
+          <p:cNvPr id="5" name="Text 3"/>
+          <p:cNvSpPr/>
+          <p:nvPr/>
+        </p:nvSpPr>
+        <p:spPr>
+          <a:xfrm>
+            <a:off x="411480" y="4864608"/>
+            <a:ext cx="8321040" cy="237744"/>
+          </a:xfrm>
+          <a:prstGeom prst="rect">
+            <a:avLst/>
+          </a:prstGeom>
+          <a:noFill/>
+          <a:ln/>
+        </p:spPr>
+        <p:txBody>
+          <a:bodyPr wrap="square" rtlCol="0" anchor="ctr"/>
+          <a:lstStyle/>
+          <a:p>
+            <a:pPr indent="0" marL="0">
+              <a:buNone/>
+            </a:pPr>
+            <a:r>
+              <a:rPr lang="en-US" sz="750" dirty="0">
+                <a:solidFill>
+                  <a:srgbClr val="AAAAAA"/>
+                </a:solidFill>
+                <a:latin typeface="Arial" pitchFamily="34" charset="0"/>
+                <a:ea typeface="Arial" pitchFamily="34" charset="-122"/>
+                <a:cs typeface="Arial" pitchFamily="34" charset="-120"/>
+              </a:rPr>
+              <a:t>Lesson Forge Pro (owner) — This content is educational material only and does not constitute financial, investment, or trading advice.</a:t>
+            </a:r>
+            <a:endParaRPr lang="en-US" sz="750" dirty="0"/>
+          </a:p>
+        </p:txBody>
+      </p:sp>
+      <p:sp>
+        <p:nvSpPr>
+          <p:cNvPr id="6" name="Text 4"/>
+          <p:cNvSpPr/>
+          <p:nvPr/>
+        </p:nvSpPr>
+        <p:spPr>
+          <a:xfrm>
+            <a:off x="731520" y="1188720"/>
+            <a:ext cx="7680960" cy="2743200"/>
+          </a:xfrm>
+          <a:prstGeom prst="rect">
+            <a:avLst/>
+          </a:prstGeom>
+          <a:noFill/>
+          <a:ln/>
+        </p:spPr>
+        <p:txBody>
+          <a:bodyPr wrap="square" rtlCol="0" anchor="t"/>
+          <a:lstStyle/>
+          <a:p>
+            <a:pPr marL="152400" indent="-152400">
+              <a:spcAft>
+                <a:spcPts val="800"/>
+              </a:spcAft>
+              <a:buSzPct val="100000"/>
+              <a:buChar char="•"/>
+            </a:pPr>
+            <a:r>
+              <a:rPr lang="en-US" sz="1500" dirty="0">
+                <a:solidFill>
+                  <a:srgbClr val="1C1917"/>
+                </a:solidFill>
+                <a:latin typeface="Arial" pitchFamily="34" charset="0"/>
+                <a:ea typeface="Arial" pitchFamily="34" charset="-122"/>
+                <a:cs typeface="Arial" pitchFamily="34" charset="-120"/>
+              </a:rPr>
+              <a:t>Gather at least three years of historical income statements, balance sheets, cash flows.</a:t>
+            </a:r>
+            <a:endParaRPr lang="en-US" sz="1500" dirty="0"/>
+          </a:p>
+          <a:p>
+            <a:pPr marL="152400" indent="-152400">
+              <a:spcAft>
+                <a:spcPts val="800"/>
+              </a:spcAft>
+              <a:buSzPct val="100000"/>
+              <a:buChar char="•"/>
+            </a:pPr>
+            <a:r>
+              <a:rPr lang="en-US" sz="1500" dirty="0">
+                <a:solidFill>
+                  <a:srgbClr val="1C1917"/>
+                </a:solidFill>
+                <a:latin typeface="Arial" pitchFamily="34" charset="0"/>
+                <a:ea typeface="Arial" pitchFamily="34" charset="-122"/>
+                <a:cs typeface="Arial" pitchFamily="34" charset="-120"/>
+              </a:rPr>
+              <a:t>Operational assumptions: growth rates, margins, CapEx schedules, working capital policies.</a:t>
+            </a:r>
+            <a:endParaRPr lang="en-US" sz="1500" dirty="0"/>
+          </a:p>
+          <a:p>
+            <a:pPr marL="152400" indent="-152400">
+              <a:spcAft>
+                <a:spcPts val="800"/>
+              </a:spcAft>
+              <a:buSzPct val="100000"/>
+              <a:buChar char="•"/>
+            </a:pPr>
+            <a:r>
+              <a:rPr lang="en-US" sz="1500" dirty="0">
+                <a:solidFill>
+                  <a:srgbClr val="1C1917"/>
+                </a:solidFill>
+                <a:latin typeface="Arial" pitchFamily="34" charset="0"/>
+                <a:ea typeface="Arial" pitchFamily="34" charset="-122"/>
+                <a:cs typeface="Arial" pitchFamily="34" charset="-120"/>
+              </a:rPr>
+              <a:t>Financing assumptions: debt levels, interest rates, dividend policy, equity issuances.</a:t>
+            </a:r>
+            <a:endParaRPr lang="en-US" sz="1500" dirty="0"/>
+          </a:p>
+          <a:p>
+            <a:pPr marL="152400" indent="-152400">
+              <a:spcAft>
+                <a:spcPts val="800"/>
+              </a:spcAft>
+              <a:buSzPct val="100000"/>
+              <a:buChar char="•"/>
+            </a:pPr>
+            <a:r>
+              <a:rPr lang="en-US" sz="1500" dirty="0">
+                <a:solidFill>
+                  <a:srgbClr val="1C1917"/>
+                </a:solidFill>
+                <a:latin typeface="Arial" pitchFamily="34" charset="0"/>
+                <a:ea typeface="Arial" pitchFamily="34" charset="-122"/>
+                <a:cs typeface="Arial" pitchFamily="34" charset="-120"/>
+              </a:rPr>
+              <a:t>Source assumptions from management guidance, industry benchmarks, and your own analysis.</a:t>
+            </a:r>
+            <a:endParaRPr lang="en-US" sz="1500" dirty="0"/>
+          </a:p>
+          <a:p>
+            <a:pPr marL="152400" indent="-152400">
+              <a:spcAft>
+                <a:spcPts val="800"/>
+              </a:spcAft>
+              <a:buSzPct val="100000"/>
+              <a:buChar char="•"/>
+            </a:pPr>
+            <a:r>
+              <a:rPr lang="en-US" sz="1500" dirty="0">
+                <a:solidFill>
+                  <a:srgbClr val="1C1917"/>
+                </a:solidFill>
+                <a:latin typeface="Arial" pitchFamily="34" charset="0"/>
+                <a:ea typeface="Arial" pitchFamily="34" charset="-122"/>
+                <a:cs typeface="Arial" pitchFamily="34" charset="-120"/>
+              </a:rPr>
+              <a:t>Garbage in, garbage out—input quality determines forecast credibility.</a:t>
+            </a:r>
+            <a:endParaRPr lang="en-US" sz="1500" dirty="0"/>
+          </a:p>
+        </p:txBody>
+      </p:sp>
+      <p:sp>
+        <p:nvSpPr>
+          <p:cNvPr id="7" name="Shape 5"/>
+          <p:cNvSpPr/>
+          <p:nvPr/>
+        </p:nvSpPr>
+        <p:spPr>
+          <a:xfrm>
+            <a:off x="731520" y="4041648"/>
+            <a:ext cx="7680960" cy="566928"/>
+          </a:xfrm>
+          <a:prstGeom prst="roundRect">
+            <a:avLst>
+              <a:gd name="adj" fmla="val 12903"/>
+            </a:avLst>
+          </a:prstGeom>
+          <a:solidFill>
+            <a:srgbClr val="B45309">
+              <a:alpha val="12000"/>
+            </a:srgbClr>
+          </a:solidFill>
+          <a:ln w="12700">
+            <a:solidFill>
+              <a:srgbClr val="B45309"/>
+            </a:solidFill>
+            <a:prstDash val="solid"/>
+          </a:ln>
+        </p:spPr>
+      </p:sp>
+      <p:sp>
+        <p:nvSpPr>
+          <p:cNvPr id="8" name="Text 6"/>
+          <p:cNvSpPr/>
+          <p:nvPr/>
+        </p:nvSpPr>
+        <p:spPr>
+          <a:xfrm>
+            <a:off x="868680" y="4087368"/>
+            <a:ext cx="7406640" cy="475488"/>
+          </a:xfrm>
+          <a:prstGeom prst="rect">
+            <a:avLst/>
+          </a:prstGeom>
+          <a:noFill/>
+          <a:ln/>
+        </p:spPr>
+        <p:txBody>
+          <a:bodyPr wrap="square" rtlCol="0" anchor="ctr"/>
+          <a:lstStyle/>
+          <a:p>
+            <a:pPr indent="0" marL="0">
+              <a:buNone/>
+            </a:pPr>
+            <a:r>
+              <a:rPr lang="en-US" sz="1100" b="1" dirty="0">
+                <a:solidFill>
+                  <a:srgbClr val="B45309"/>
+                </a:solidFill>
+                <a:latin typeface="Arial" pitchFamily="34" charset="0"/>
+                <a:ea typeface="Arial" pitchFamily="34" charset="-122"/>
+                <a:cs typeface="Arial" pitchFamily="34" charset="-120"/>
+              </a:rPr>
+              <a:t>Takeaway  </a:t>
+            </a:r>
+            <a:pPr indent="0" marL="0">
+              <a:buNone/>
+            </a:pPr>
+            <a:r>
+              <a:rPr lang="en-US" sz="1150" dirty="0">
+                <a:solidFill>
+                  <a:srgbClr val="1C1917"/>
+                </a:solidFill>
+                <a:latin typeface="Arial" pitchFamily="34" charset="0"/>
+                <a:ea typeface="Arial" pitchFamily="34" charset="-122"/>
+                <a:cs typeface="Arial" pitchFamily="34" charset="-120"/>
+              </a:rPr>
+              <a:t>High-quality, well-sourced inputs are the single most important determinant of forecast reliability.</a:t>
+            </a:r>
+            <a:endParaRPr lang="en-US" sz="1100" dirty="0"/>
           </a:p>
         </p:txBody>
       </p:sp>
